--- a/presentation/FlowMetrics-MVP-2o-Bimestre.pptx
+++ b/presentation/FlowMetrics-MVP-2o-Bimestre.pptx
@@ -7014,7 +7014,7 @@
 </file>
 
 <file path=ppt/slides/slide5.xml><?xml version="1.0" encoding="utf-8"?>
-<p:sld xmlns:p="http://schemas.openxmlformats.org/presentationml/2006/main">
+<p:sld xmlns:p="http://schemas.openxmlformats.org/presentationml/2006/main" xmlns:a="http://schemas.openxmlformats.org/drawingml/2006/main" xmlns:r="http://schemas.openxmlformats.org/officeDocument/2006/relationships">
   <p:cSld>
     <p:spTree>
       <p:nvGrpSpPr>
@@ -7023,1628 +7023,1327 @@
         <p:nvPr/>
       </p:nvGrpSpPr>
       <p:grpSpPr>
-        <a:xfrm xmlns:a="http://schemas.openxmlformats.org/drawingml/2006/main"/>
+        <a:xfrm/>
       </p:grpSpPr>
       <p:sp>
         <p:nvSpPr>
-          <p:cNvPr id="1" name="">
-            <a:extLst xmlns:a="http://schemas.openxmlformats.org/drawingml/2006/main">
-              <a:ext uri="{FF2B5EF4-FFF2-40B4-BE49-F238E27FC236}">
-                <a16:creationId xmlns:a16="http://schemas.microsoft.com/office/drawing/2014/main" id="{3D85F8DB-BCE5-45AB-9AD8-75E3B8CE838A}"/>
-              </a:ext>
-            </a:extLst>
-          </p:cNvPr>
-          <p:cNvSpPr>
-            <a:spLocks xmlns:a="http://schemas.openxmlformats.org/drawingml/2006/main" noGrp="1"/>
-          </p:cNvSpPr>
-          <p:nvPr/>
-        </p:nvSpPr>
-        <p:spPr>
-          <a:xfrm xmlns:a="http://schemas.openxmlformats.org/drawingml/2006/main">
+          <p:cNvPr id="2" name="background"/>
+          <p:cNvSpPr/>
+          <p:nvPr/>
+        </p:nvSpPr>
+        <p:spPr>
+          <a:xfrm>
             <a:off x="0" y="0"/>
-            <a:ext cx="12192000" cy="6858000"/>
-          </a:xfrm>
-          <a:prstGeom xmlns:a="http://schemas.openxmlformats.org/drawingml/2006/main" prst="rect">
-            <a:avLst/>
-          </a:prstGeom>
-          <a:solidFill xmlns:a="http://schemas.openxmlformats.org/drawingml/2006/main">
+            <a:ext cx="12191695" cy="6858000"/>
+          </a:xfrm>
+          <a:prstGeom prst="rect">
+            <a:avLst/>
+          </a:prstGeom>
+          <a:solidFill>
             <a:srgbClr val="10231F"/>
           </a:solidFill>
-          <a:ln xmlns:a="http://schemas.openxmlformats.org/drawingml/2006/main" w="0">
-            <a:solidFill>
-              <a:srgbClr val="000000">
-                <a:alpha val="0"/>
-              </a:srgbClr>
-            </a:solidFill>
-            <a:prstDash val="solid"/>
-          </a:ln>
-        </p:spPr>
-      </p:sp>
-      <p:sp>
-        <p:nvSpPr>
-          <p:cNvPr id="2" name="">
-            <a:extLst xmlns:a="http://schemas.openxmlformats.org/drawingml/2006/main">
-              <a:ext uri="{FF2B5EF4-FFF2-40B4-BE49-F238E27FC236}">
-                <a16:creationId xmlns:a16="http://schemas.microsoft.com/office/drawing/2014/main" id="{F5474784-7642-4A2B-8C48-10664F57C663}"/>
-              </a:ext>
-            </a:extLst>
-          </p:cNvPr>
-          <p:cNvSpPr>
-            <a:spLocks xmlns:a="http://schemas.openxmlformats.org/drawingml/2006/main" noGrp="1"/>
-          </p:cNvSpPr>
-          <p:nvPr/>
-        </p:nvSpPr>
-        <p:spPr>
-          <a:xfrm xmlns:a="http://schemas.openxmlformats.org/drawingml/2006/main">
-            <a:off x="438150" y="400050"/>
-            <a:ext cx="11315700" cy="13335"/>
-          </a:xfrm>
-          <a:prstGeom xmlns:a="http://schemas.openxmlformats.org/drawingml/2006/main" prst="rect">
-            <a:avLst/>
-          </a:prstGeom>
-          <a:solidFill xmlns:a="http://schemas.openxmlformats.org/drawingml/2006/main">
-            <a:srgbClr val="9FB8A6"/>
-          </a:solidFill>
-          <a:ln xmlns:a="http://schemas.openxmlformats.org/drawingml/2006/main" w="0">
-            <a:solidFill>
-              <a:srgbClr val="000000">
-                <a:alpha val="0"/>
-              </a:srgbClr>
-            </a:solidFill>
-            <a:prstDash val="solid"/>
-          </a:ln>
-        </p:spPr>
-      </p:sp>
-      <p:sp>
-        <p:nvSpPr>
-          <p:cNvPr id="3" name="">
-            <a:extLst xmlns:a="http://schemas.openxmlformats.org/drawingml/2006/main">
-              <a:ext uri="{FF2B5EF4-FFF2-40B4-BE49-F238E27FC236}">
-                <a16:creationId xmlns:a16="http://schemas.microsoft.com/office/drawing/2014/main" id="{4C1250C0-CF47-405F-AD3C-5EE7BD1D6348}"/>
-              </a:ext>
-            </a:extLst>
-          </p:cNvPr>
-          <p:cNvSpPr>
-            <a:spLocks xmlns:a="http://schemas.openxmlformats.org/drawingml/2006/main" noGrp="1"/>
-          </p:cNvSpPr>
-          <p:nvPr/>
-        </p:nvSpPr>
-        <p:spPr>
-          <a:xfrm xmlns:a="http://schemas.openxmlformats.org/drawingml/2006/main">
-            <a:off x="438150" y="6248400"/>
-            <a:ext cx="5715000" cy="266700"/>
-          </a:xfrm>
-          <a:prstGeom xmlns:a="http://schemas.openxmlformats.org/drawingml/2006/main" prst="rect">
-            <a:avLst/>
-          </a:prstGeom>
-          <a:solidFill xmlns:a="http://schemas.openxmlformats.org/drawingml/2006/main">
-            <a:srgbClr val="000000">
-              <a:alpha val="0"/>
+          <a:ln w="0">
+            <a:noFill/>
+          </a:ln>
+        </p:spPr>
+      </p:sp>
+      <p:sp>
+        <p:nvSpPr>
+          <p:cNvPr id="3" name="shape"/>
+          <p:cNvSpPr/>
+          <p:nvPr/>
+        </p:nvSpPr>
+        <p:spPr>
+          <a:xfrm>
+            <a:off x="502920" y="347472"/>
+            <a:ext cx="1828800" cy="201168"/>
+          </a:xfrm>
+          <a:prstGeom prst="rect">
+            <a:avLst/>
+          </a:prstGeom>
+          <a:noFill/>
+          <a:ln w="0">
+            <a:noFill/>
+          </a:ln>
+        </p:spPr>
+        <p:txBody>
+          <a:bodyPr wrap="square" anchor="ctr" lIns="73152" rIns="73152" tIns="45720" bIns="45720"/>
+          <a:lstStyle/>
+          <a:p>
+            <a:pPr algn="l"/>
+            <a:r>
+              <a:rPr lang="pt-BR" sz="1000" b="1">
+                <a:solidFill>
+                  <a:srgbClr val="8BE9D6"/>
+                </a:solidFill>
+                <a:latin typeface="Aptos"/>
+              </a:rPr>
+              <a:t>05 | ARQUITETURA DO MVP</a:t>
+            </a:r>
+            <a:endParaRPr lang="pt-BR" sz="1000"/>
+          </a:p>
+        </p:txBody>
+      </p:sp>
+      <p:sp>
+        <p:nvSpPr>
+          <p:cNvPr id="4" name="shape"/>
+          <p:cNvSpPr/>
+          <p:nvPr/>
+        </p:nvSpPr>
+        <p:spPr>
+          <a:xfrm>
+            <a:off x="502920" y="658368"/>
+            <a:ext cx="6858000" cy="566928"/>
+          </a:xfrm>
+          <a:prstGeom prst="rect">
+            <a:avLst/>
+          </a:prstGeom>
+          <a:noFill/>
+          <a:ln w="0">
+            <a:noFill/>
+          </a:ln>
+        </p:spPr>
+        <p:txBody>
+          <a:bodyPr wrap="square" anchor="ctr" lIns="73152" rIns="73152" tIns="45720" bIns="45720"/>
+          <a:lstStyle/>
+          <a:p>
+            <a:pPr algn="l"/>
+            <a:r>
+              <a:rPr lang="pt-BR" sz="2700" b="1">
+                <a:solidFill>
+                  <a:srgbClr val="FFFFFF"/>
+                </a:solidFill>
+                <a:latin typeface="Aptos"/>
+              </a:rPr>
+              <a:t>A solucao separa experiencia, regras e dados do fluxo.</a:t>
+            </a:r>
+            <a:endParaRPr lang="pt-BR" sz="2700"/>
+          </a:p>
+        </p:txBody>
+      </p:sp>
+      <p:sp>
+        <p:nvSpPr>
+          <p:cNvPr id="5" name="shape"/>
+          <p:cNvSpPr/>
+          <p:nvPr/>
+        </p:nvSpPr>
+        <p:spPr>
+          <a:xfrm>
+            <a:off x="8092440" y="420624"/>
+            <a:ext cx="3429000" cy="566928"/>
+          </a:xfrm>
+          <a:prstGeom prst="roundRect">
+            <a:avLst/>
+          </a:prstGeom>
+          <a:solidFill>
+            <a:srgbClr val="FFFFFF">
+              <a:alpha val="18000"/>
             </a:srgbClr>
           </a:solidFill>
-          <a:ln xmlns:a="http://schemas.openxmlformats.org/drawingml/2006/main" w="0">
-            <a:solidFill>
-              <a:srgbClr val="000000">
-                <a:alpha val="0"/>
-              </a:srgbClr>
-            </a:solidFill>
-            <a:prstDash val="solid"/>
-          </a:ln>
-        </p:spPr>
-        <p:txBody>
-          <a:bodyPr xmlns:a="http://schemas.openxmlformats.org/drawingml/2006/main" lIns="0" tIns="0" rIns="0" bIns="0" anchor="t"/>
-          <a:lstStyle xmlns:a="http://schemas.openxmlformats.org/drawingml/2006/main"/>
-          <a:p xmlns:a="http://schemas.openxmlformats.org/drawingml/2006/main">
-            <a:pPr algn="l">
-              <a:defRPr sz="900" b="0">
-                <a:solidFill>
-                  <a:srgbClr val="CBD8CC"/>
-                </a:solidFill>
-                <a:latin typeface="Aptos"/>
-                <a:ea typeface="Aptos"/>
-                <a:cs typeface="Aptos"/>
-              </a:defRPr>
-            </a:pPr>
-            <a:r>
-              <a:rPr sz="900" b="0">
-                <a:solidFill>
-                  <a:srgbClr val="CBD8CC"/>
-                </a:solidFill>
-                <a:latin typeface="Aptos"/>
-                <a:ea typeface="Aptos"/>
-                <a:cs typeface="Aptos"/>
-              </a:rPr>
-              <a:t>FlowMetrics MVP | Gerencia e Arquitetura de Software</a:t>
-            </a:r>
-          </a:p>
-        </p:txBody>
-      </p:sp>
-      <p:sp>
-        <p:nvSpPr>
-          <p:cNvPr id="4" name="">
-            <a:extLst xmlns:a="http://schemas.openxmlformats.org/drawingml/2006/main">
-              <a:ext uri="{FF2B5EF4-FFF2-40B4-BE49-F238E27FC236}">
-                <a16:creationId xmlns:a16="http://schemas.microsoft.com/office/drawing/2014/main" id="{27120AFD-5807-40C8-BF37-D4BC84E8BB56}"/>
-              </a:ext>
-            </a:extLst>
-          </p:cNvPr>
-          <p:cNvSpPr>
-            <a:spLocks xmlns:a="http://schemas.openxmlformats.org/drawingml/2006/main" noGrp="1"/>
-          </p:cNvSpPr>
-          <p:nvPr/>
-        </p:nvSpPr>
-        <p:spPr>
-          <a:xfrm xmlns:a="http://schemas.openxmlformats.org/drawingml/2006/main">
-            <a:off x="11029950" y="6248400"/>
-            <a:ext cx="685800" cy="266700"/>
-          </a:xfrm>
-          <a:prstGeom xmlns:a="http://schemas.openxmlformats.org/drawingml/2006/main" prst="rect">
-            <a:avLst/>
-          </a:prstGeom>
-          <a:solidFill xmlns:a="http://schemas.openxmlformats.org/drawingml/2006/main">
-            <a:srgbClr val="000000">
-              <a:alpha val="0"/>
+          <a:ln w="12700">
+            <a:solidFill>
+              <a:srgbClr val="5B6B7E"/>
+            </a:solidFill>
+          </a:ln>
+        </p:spPr>
+        <p:txBody>
+          <a:bodyPr wrap="square" anchor="ctr" lIns="73152" rIns="73152" tIns="45720" bIns="45720"/>
+          <a:lstStyle/>
+          <a:p>
+            <a:pPr algn="ctr"/>
+            <a:r>
+              <a:rPr lang="pt-BR" sz="1200" b="1">
+                <a:solidFill>
+                  <a:srgbClr val="F4EFE4"/>
+                </a:solidFill>
+                <a:latin typeface="Aptos"/>
+              </a:rPr>
+              <a:t>MVP atual</a:t>
+            </a:r>
+            <a:endParaRPr lang="pt-BR" sz="1200"/>
+          </a:p>
+          <a:p>
+            <a:pPr algn="ctr"/>
+            <a:r>
+              <a:rPr lang="pt-BR" sz="1200" b="1">
+                <a:solidFill>
+                  <a:srgbClr val="F4EFE4"/>
+                </a:solidFill>
+                <a:latin typeface="Aptos"/>
+              </a:rPr>
+              <a:t>Next.js + FastAPI + PostgreSQL</a:t>
+            </a:r>
+            <a:endParaRPr lang="pt-BR" sz="1200"/>
+          </a:p>
+        </p:txBody>
+      </p:sp>
+      <p:sp>
+        <p:nvSpPr>
+          <p:cNvPr id="6" name="shape"/>
+          <p:cNvSpPr/>
+          <p:nvPr/>
+        </p:nvSpPr>
+        <p:spPr>
+          <a:xfrm>
+            <a:off x="658368" y="1481328"/>
+            <a:ext cx="1645920" cy="320040"/>
+          </a:xfrm>
+          <a:prstGeom prst="roundRect">
+            <a:avLst/>
+          </a:prstGeom>
+          <a:solidFill>
+            <a:srgbClr val="23C98F">
+              <a:alpha val="82000"/>
             </a:srgbClr>
           </a:solidFill>
-          <a:ln xmlns:a="http://schemas.openxmlformats.org/drawingml/2006/main" w="0">
-            <a:solidFill>
-              <a:srgbClr val="000000">
-                <a:alpha val="0"/>
-              </a:srgbClr>
-            </a:solidFill>
-            <a:prstDash val="solid"/>
-          </a:ln>
-        </p:spPr>
-        <p:txBody>
-          <a:bodyPr xmlns:a="http://schemas.openxmlformats.org/drawingml/2006/main" lIns="0" tIns="0" rIns="0" bIns="0" anchor="t"/>
-          <a:lstStyle xmlns:a="http://schemas.openxmlformats.org/drawingml/2006/main"/>
-          <a:p xmlns:a="http://schemas.openxmlformats.org/drawingml/2006/main">
-            <a:pPr algn="r">
-              <a:defRPr sz="900" b="1">
-                <a:solidFill>
-                  <a:srgbClr val="CBD8CC"/>
-                </a:solidFill>
-                <a:latin typeface="Aptos"/>
-                <a:ea typeface="Aptos"/>
-                <a:cs typeface="Aptos"/>
-              </a:defRPr>
-            </a:pPr>
-            <a:r>
-              <a:rPr sz="900" b="1">
-                <a:solidFill>
-                  <a:srgbClr val="CBD8CC"/>
-                </a:solidFill>
-                <a:latin typeface="Aptos"/>
-                <a:ea typeface="Aptos"/>
-                <a:cs typeface="Aptos"/>
-              </a:rPr>
-              <a:t>05</a:t>
-            </a:r>
-          </a:p>
-        </p:txBody>
-      </p:sp>
-      <p:sp>
-        <p:nvSpPr>
-          <p:cNvPr id="5" name="kicker-5-marker">
-            <a:extLst xmlns:a="http://schemas.openxmlformats.org/drawingml/2006/main">
-              <a:ext uri="{FF2B5EF4-FFF2-40B4-BE49-F238E27FC236}">
-                <a16:creationId xmlns:a16="http://schemas.microsoft.com/office/drawing/2014/main" id="{D7234B8B-5F13-4921-B305-4042E000F19C}"/>
-              </a:ext>
-            </a:extLst>
-          </p:cNvPr>
-          <p:cNvSpPr>
-            <a:spLocks xmlns:a="http://schemas.openxmlformats.org/drawingml/2006/main" noGrp="1"/>
-          </p:cNvSpPr>
-          <p:nvPr/>
-        </p:nvSpPr>
-        <p:spPr>
-          <a:xfrm xmlns:a="http://schemas.openxmlformats.org/drawingml/2006/main">
-            <a:off x="552450" y="747713"/>
-            <a:ext cx="266700" cy="47625"/>
-          </a:xfrm>
-          <a:prstGeom xmlns:a="http://schemas.openxmlformats.org/drawingml/2006/main" prst="rect">
-            <a:avLst/>
-          </a:prstGeom>
-          <a:solidFill xmlns:a="http://schemas.openxmlformats.org/drawingml/2006/main">
-            <a:srgbClr val="D96045"/>
-          </a:solidFill>
-          <a:ln xmlns:a="http://schemas.openxmlformats.org/drawingml/2006/main" w="0">
-            <a:solidFill>
-              <a:srgbClr val="000000">
-                <a:alpha val="0"/>
-              </a:srgbClr>
-            </a:solidFill>
-            <a:prstDash val="solid"/>
-          </a:ln>
-        </p:spPr>
-      </p:sp>
-      <p:sp>
-        <p:nvSpPr>
-          <p:cNvPr id="6" name="kicker-5-label">
-            <a:extLst xmlns:a="http://schemas.openxmlformats.org/drawingml/2006/main">
-              <a:ext uri="{FF2B5EF4-FFF2-40B4-BE49-F238E27FC236}">
-                <a16:creationId xmlns:a16="http://schemas.microsoft.com/office/drawing/2014/main" id="{32234380-2AAD-4B04-A386-5DB3FA6DB3C2}"/>
-              </a:ext>
-            </a:extLst>
-          </p:cNvPr>
-          <p:cNvSpPr>
-            <a:spLocks xmlns:a="http://schemas.openxmlformats.org/drawingml/2006/main" noGrp="1"/>
-          </p:cNvSpPr>
-          <p:nvPr/>
-        </p:nvSpPr>
-        <p:spPr>
-          <a:xfrm xmlns:a="http://schemas.openxmlformats.org/drawingml/2006/main">
-            <a:off x="952500" y="666750"/>
-            <a:ext cx="4762500" cy="209550"/>
-          </a:xfrm>
-          <a:prstGeom xmlns:a="http://schemas.openxmlformats.org/drawingml/2006/main" prst="rect">
-            <a:avLst/>
-          </a:prstGeom>
-          <a:solidFill xmlns:a="http://schemas.openxmlformats.org/drawingml/2006/main">
-            <a:srgbClr val="000000">
-              <a:alpha val="0"/>
+          <a:ln w="0">
+            <a:noFill/>
+          </a:ln>
+        </p:spPr>
+        <p:txBody>
+          <a:bodyPr wrap="square" anchor="ctr" lIns="73152" rIns="73152" tIns="45720" bIns="45720"/>
+          <a:lstStyle/>
+          <a:p>
+            <a:pPr algn="ctr"/>
+            <a:r>
+              <a:rPr lang="pt-BR" sz="1000" b="1">
+                <a:solidFill>
+                  <a:srgbClr val="B9FFF0"/>
+                </a:solidFill>
+                <a:latin typeface="Aptos"/>
+              </a:rPr>
+              <a:t>USUARIO</a:t>
+            </a:r>
+            <a:endParaRPr lang="pt-BR" sz="1000"/>
+          </a:p>
+        </p:txBody>
+      </p:sp>
+      <p:sp>
+        <p:nvSpPr>
+          <p:cNvPr id="7" name="shape"/>
+          <p:cNvSpPr/>
+          <p:nvPr/>
+        </p:nvSpPr>
+        <p:spPr>
+          <a:xfrm>
+            <a:off x="2487168" y="1207008"/>
+            <a:ext cx="2011680" cy="320040"/>
+          </a:xfrm>
+          <a:prstGeom prst="roundRect">
+            <a:avLst/>
+          </a:prstGeom>
+          <a:solidFill>
+            <a:srgbClr val="2BD3FF">
+              <a:alpha val="82000"/>
             </a:srgbClr>
           </a:solidFill>
-          <a:ln xmlns:a="http://schemas.openxmlformats.org/drawingml/2006/main" w="0">
-            <a:solidFill>
-              <a:srgbClr val="000000">
-                <a:alpha val="0"/>
-              </a:srgbClr>
-            </a:solidFill>
-            <a:prstDash val="solid"/>
-          </a:ln>
-        </p:spPr>
-        <p:txBody>
-          <a:bodyPr xmlns:a="http://schemas.openxmlformats.org/drawingml/2006/main" lIns="0" tIns="0" rIns="0" bIns="0" anchor="t"/>
-          <a:lstStyle xmlns:a="http://schemas.openxmlformats.org/drawingml/2006/main"/>
-          <a:p xmlns:a="http://schemas.openxmlformats.org/drawingml/2006/main">
-            <a:pPr algn="l">
-              <a:defRPr sz="900" b="1">
-                <a:solidFill>
-                  <a:srgbClr val="DBE6DA"/>
-                </a:solidFill>
-                <a:latin typeface="Aptos"/>
-                <a:ea typeface="Aptos"/>
-                <a:cs typeface="Aptos"/>
-              </a:defRPr>
-            </a:pPr>
-            <a:r>
-              <a:rPr sz="900" b="1">
-                <a:solidFill>
-                  <a:srgbClr val="DBE6DA"/>
-                </a:solidFill>
-                <a:latin typeface="Aptos"/>
-                <a:ea typeface="Aptos"/>
-                <a:cs typeface="Aptos"/>
-              </a:rPr>
-              <a:t>ARQUITETURA</a:t>
-            </a:r>
-          </a:p>
-        </p:txBody>
-      </p:sp>
-      <p:sp>
-        <p:nvSpPr>
-          <p:cNvPr id="7" name="">
-            <a:extLst xmlns:a="http://schemas.openxmlformats.org/drawingml/2006/main">
-              <a:ext uri="{FF2B5EF4-FFF2-40B4-BE49-F238E27FC236}">
-                <a16:creationId xmlns:a16="http://schemas.microsoft.com/office/drawing/2014/main" id="{2A6D3617-7345-4C37-BDF5-2763448ACB08}"/>
-              </a:ext>
-            </a:extLst>
-          </p:cNvPr>
-          <p:cNvSpPr>
-            <a:spLocks xmlns:a="http://schemas.openxmlformats.org/drawingml/2006/main" noGrp="1"/>
-          </p:cNvSpPr>
-          <p:nvPr/>
-        </p:nvSpPr>
-        <p:spPr>
-          <a:xfrm xmlns:a="http://schemas.openxmlformats.org/drawingml/2006/main">
-            <a:off x="533400" y="1066800"/>
-            <a:ext cx="7429500" cy="1066800"/>
-          </a:xfrm>
-          <a:prstGeom xmlns:a="http://schemas.openxmlformats.org/drawingml/2006/main" prst="rect">
-            <a:avLst/>
-          </a:prstGeom>
-          <a:solidFill xmlns:a="http://schemas.openxmlformats.org/drawingml/2006/main">
-            <a:srgbClr val="000000">
-              <a:alpha val="0"/>
+          <a:ln w="0">
+            <a:noFill/>
+          </a:ln>
+        </p:spPr>
+        <p:txBody>
+          <a:bodyPr wrap="square" anchor="ctr" lIns="73152" rIns="73152" tIns="45720" bIns="45720"/>
+          <a:lstStyle/>
+          <a:p>
+            <a:pPr algn="ctr"/>
+            <a:r>
+              <a:rPr lang="pt-BR" sz="1000" b="1">
+                <a:solidFill>
+                  <a:srgbClr val="DDFBFF"/>
+                </a:solidFill>
+                <a:latin typeface="Aptos"/>
+              </a:rPr>
+              <a:t>FRONTEND</a:t>
+            </a:r>
+            <a:endParaRPr lang="pt-BR" sz="1000"/>
+          </a:p>
+        </p:txBody>
+      </p:sp>
+      <p:sp>
+        <p:nvSpPr>
+          <p:cNvPr id="8" name="shape"/>
+          <p:cNvSpPr/>
+          <p:nvPr/>
+        </p:nvSpPr>
+        <p:spPr>
+          <a:xfrm>
+            <a:off x="4828032" y="1207008"/>
+            <a:ext cx="2999232" cy="320040"/>
+          </a:xfrm>
+          <a:prstGeom prst="roundRect">
+            <a:avLst/>
+          </a:prstGeom>
+          <a:solidFill>
+            <a:srgbClr val="FFC857">
+              <a:alpha val="82000"/>
             </a:srgbClr>
           </a:solidFill>
-          <a:ln xmlns:a="http://schemas.openxmlformats.org/drawingml/2006/main" w="0">
-            <a:solidFill>
-              <a:srgbClr val="000000">
-                <a:alpha val="0"/>
-              </a:srgbClr>
-            </a:solidFill>
-            <a:prstDash val="solid"/>
-          </a:ln>
-        </p:spPr>
-        <p:txBody>
-          <a:bodyPr xmlns:a="http://schemas.openxmlformats.org/drawingml/2006/main" lIns="0" tIns="0" rIns="0" bIns="0" anchor="t"/>
-          <a:lstStyle xmlns:a="http://schemas.openxmlformats.org/drawingml/2006/main"/>
-          <a:p xmlns:a="http://schemas.openxmlformats.org/drawingml/2006/main">
-            <a:pPr algn="l">
-              <a:defRPr sz="3150" b="1">
-                <a:solidFill>
-                  <a:srgbClr val="FFFAF0"/>
-                </a:solidFill>
-                <a:latin typeface="Aptos Display"/>
-                <a:ea typeface="Aptos Display"/>
-                <a:cs typeface="Aptos Display"/>
-              </a:defRPr>
-            </a:pPr>
-            <a:r>
-              <a:rPr sz="3150" b="1">
-                <a:solidFill>
-                  <a:srgbClr val="FFFAF0"/>
-                </a:solidFill>
-                <a:latin typeface="Aptos Display"/>
-                <a:ea typeface="Aptos Display"/>
-                <a:cs typeface="Aptos Display"/>
-              </a:rPr>
-              <a:t>Separacao clara: interface, API, regra de metrica e persistencia.</a:t>
-            </a:r>
-          </a:p>
-        </p:txBody>
-      </p:sp>
-      <p:sp>
-        <p:nvSpPr>
-          <p:cNvPr id="8" name="">
-            <a:extLst xmlns:a="http://schemas.openxmlformats.org/drawingml/2006/main">
-              <a:ext uri="{FF2B5EF4-FFF2-40B4-BE49-F238E27FC236}">
-                <a16:creationId xmlns:a16="http://schemas.microsoft.com/office/drawing/2014/main" id="{C0262870-5DA1-4353-B101-4A3CF320D3CF}"/>
-              </a:ext>
-            </a:extLst>
-          </p:cNvPr>
-          <p:cNvSpPr>
-            <a:spLocks xmlns:a="http://schemas.openxmlformats.org/drawingml/2006/main" noGrp="1"/>
-          </p:cNvSpPr>
-          <p:nvPr/>
-        </p:nvSpPr>
-        <p:spPr>
-          <a:xfrm xmlns:a="http://schemas.openxmlformats.org/drawingml/2006/main">
-            <a:off x="876300" y="3257550"/>
-            <a:ext cx="1790700" cy="819150"/>
-          </a:xfrm>
-          <a:prstGeom xmlns:a="http://schemas.openxmlformats.org/drawingml/2006/main" prst="rect">
-            <a:avLst/>
-          </a:prstGeom>
-          <a:solidFill xmlns:a="http://schemas.openxmlformats.org/drawingml/2006/main">
+          <a:ln w="0">
+            <a:noFill/>
+          </a:ln>
+        </p:spPr>
+        <p:txBody>
+          <a:bodyPr wrap="square" anchor="ctr" lIns="73152" rIns="73152" tIns="45720" bIns="45720"/>
+          <a:lstStyle/>
+          <a:p>
+            <a:pPr algn="ctr"/>
+            <a:r>
+              <a:rPr lang="pt-BR" sz="1000" b="1">
+                <a:solidFill>
+                  <a:srgbClr val="FFF0BB"/>
+                </a:solidFill>
+                <a:latin typeface="Aptos"/>
+              </a:rPr>
+              <a:t>BACKEND + REGRAS</a:t>
+            </a:r>
+            <a:endParaRPr lang="pt-BR" sz="1000"/>
+          </a:p>
+        </p:txBody>
+      </p:sp>
+      <p:sp>
+        <p:nvSpPr>
+          <p:cNvPr id="9" name="shape"/>
+          <p:cNvSpPr/>
+          <p:nvPr/>
+        </p:nvSpPr>
+        <p:spPr>
+          <a:xfrm>
+            <a:off x="8430768" y="1481328"/>
+            <a:ext cx="2514600" cy="320040"/>
+          </a:xfrm>
+          <a:prstGeom prst="roundRect">
+            <a:avLst/>
+          </a:prstGeom>
+          <a:solidFill>
+            <a:srgbClr val="FF5A8A">
+              <a:alpha val="82000"/>
+            </a:srgbClr>
+          </a:solidFill>
+          <a:ln w="0">
+            <a:noFill/>
+          </a:ln>
+        </p:spPr>
+        <p:txBody>
+          <a:bodyPr wrap="square" anchor="ctr" lIns="73152" rIns="73152" tIns="45720" bIns="45720"/>
+          <a:lstStyle/>
+          <a:p>
+            <a:pPr algn="ctr"/>
+            <a:r>
+              <a:rPr lang="pt-BR" sz="1000" b="1">
+                <a:solidFill>
+                  <a:srgbClr val="FFE2EA"/>
+                </a:solidFill>
+                <a:latin typeface="Aptos"/>
+              </a:rPr>
+              <a:t>DADOS</a:t>
+            </a:r>
+            <a:endParaRPr lang="pt-BR" sz="1000"/>
+          </a:p>
+        </p:txBody>
+      </p:sp>
+      <p:sp>
+        <p:nvSpPr>
+          <p:cNvPr id="10" name="shape"/>
+          <p:cNvSpPr/>
+          <p:nvPr/>
+        </p:nvSpPr>
+        <p:spPr>
+          <a:xfrm>
+            <a:off x="658368" y="1993392"/>
+            <a:ext cx="1645920" cy="914400"/>
+          </a:xfrm>
+          <a:prstGeom prst="roundRect">
+            <a:avLst/>
+          </a:prstGeom>
+          <a:solidFill>
             <a:srgbClr val="F4EFE4"/>
           </a:solidFill>
-          <a:ln xmlns:a="http://schemas.openxmlformats.org/drawingml/2006/main" w="9525">
-            <a:solidFill>
-              <a:srgbClr val="000000">
-                <a:alpha val="0"/>
-              </a:srgbClr>
-            </a:solidFill>
-            <a:prstDash val="solid"/>
-          </a:ln>
-        </p:spPr>
-      </p:sp>
-      <p:sp>
-        <p:nvSpPr>
-          <p:cNvPr id="9" name="">
-            <a:extLst xmlns:a="http://schemas.openxmlformats.org/drawingml/2006/main">
-              <a:ext uri="{FF2B5EF4-FFF2-40B4-BE49-F238E27FC236}">
-                <a16:creationId xmlns:a16="http://schemas.microsoft.com/office/drawing/2014/main" id="{CC0F4BB9-DE44-4B09-A017-854678C7281B}"/>
-              </a:ext>
-            </a:extLst>
-          </p:cNvPr>
-          <p:cNvSpPr>
-            <a:spLocks xmlns:a="http://schemas.openxmlformats.org/drawingml/2006/main" noGrp="1"/>
-          </p:cNvSpPr>
-          <p:nvPr/>
-        </p:nvSpPr>
-        <p:spPr>
-          <a:xfrm xmlns:a="http://schemas.openxmlformats.org/drawingml/2006/main">
-            <a:off x="1028700" y="3409950"/>
-            <a:ext cx="1485900" cy="228600"/>
-          </a:xfrm>
-          <a:prstGeom xmlns:a="http://schemas.openxmlformats.org/drawingml/2006/main" prst="rect">
-            <a:avLst/>
-          </a:prstGeom>
-          <a:solidFill xmlns:a="http://schemas.openxmlformats.org/drawingml/2006/main">
-            <a:srgbClr val="000000">
-              <a:alpha val="0"/>
+          <a:ln w="12700">
+            <a:solidFill>
+              <a:srgbClr val="8BE9D6"/>
+            </a:solidFill>
+          </a:ln>
+        </p:spPr>
+        <p:txBody>
+          <a:bodyPr wrap="square" anchor="ctr" lIns="73152" rIns="73152" tIns="45720" bIns="45720"/>
+          <a:lstStyle/>
+          <a:p>
+            <a:pPr algn="ctr"/>
+            <a:r>
+              <a:rPr lang="pt-BR" sz="1600" b="1">
+                <a:solidFill>
+                  <a:srgbClr val="10231F"/>
+                </a:solidFill>
+                <a:latin typeface="Aptos"/>
+              </a:rPr>
+              <a:t>Gestor</a:t>
+            </a:r>
+            <a:endParaRPr lang="pt-BR" sz="1600"/>
+          </a:p>
+          <a:p>
+            <a:pPr algn="ctr"/>
+            <a:r>
+              <a:rPr lang="pt-BR" sz="1600" b="1">
+                <a:solidFill>
+                  <a:srgbClr val="10231F"/>
+                </a:solidFill>
+                <a:latin typeface="Aptos"/>
+              </a:rPr>
+              <a:t>navegador</a:t>
+            </a:r>
+            <a:endParaRPr lang="pt-BR" sz="1600"/>
+          </a:p>
+        </p:txBody>
+      </p:sp>
+      <p:sp>
+        <p:nvSpPr>
+          <p:cNvPr id="11" name="shape"/>
+          <p:cNvSpPr/>
+          <p:nvPr/>
+        </p:nvSpPr>
+        <p:spPr>
+          <a:xfrm>
+            <a:off x="2578608" y="1737360"/>
+            <a:ext cx="1874520" cy="1115568"/>
+          </a:xfrm>
+          <a:prstGeom prst="roundRect">
+            <a:avLst/>
+          </a:prstGeom>
+          <a:solidFill>
+            <a:srgbClr val="163B4A"/>
+          </a:solidFill>
+          <a:ln w="12700">
+            <a:solidFill>
+              <a:srgbClr val="2BD3FF"/>
+            </a:solidFill>
+          </a:ln>
+        </p:spPr>
+        <p:txBody>
+          <a:bodyPr wrap="square" anchor="ctr" lIns="73152" rIns="73152" tIns="45720" bIns="45720"/>
+          <a:lstStyle/>
+          <a:p>
+            <a:pPr algn="ctr"/>
+            <a:r>
+              <a:rPr lang="pt-BR" sz="1400" b="1">
+                <a:solidFill>
+                  <a:srgbClr val="FFFFFF"/>
+                </a:solidFill>
+                <a:latin typeface="Aptos"/>
+              </a:rPr>
+              <a:t>Next.js</a:t>
+            </a:r>
+            <a:endParaRPr lang="pt-BR" sz="1400"/>
+          </a:p>
+          <a:p>
+            <a:pPr algn="ctr"/>
+            <a:r>
+              <a:rPr lang="pt-BR" sz="1400" b="1">
+                <a:solidFill>
+                  <a:srgbClr val="FFFFFF"/>
+                </a:solidFill>
+                <a:latin typeface="Aptos"/>
+              </a:rPr>
+              <a:t>apps/web</a:t>
+            </a:r>
+            <a:endParaRPr lang="pt-BR" sz="1400"/>
+          </a:p>
+          <a:p>
+            <a:pPr algn="ctr"/>
+            <a:r>
+              <a:rPr lang="pt-BR" sz="1400" b="1">
+                <a:solidFill>
+                  <a:srgbClr val="FFFFFF"/>
+                </a:solidFill>
+                <a:latin typeface="Aptos"/>
+              </a:rPr>
+              <a:t>React + TypeScript</a:t>
+            </a:r>
+            <a:endParaRPr lang="pt-BR" sz="1400"/>
+          </a:p>
+        </p:txBody>
+      </p:sp>
+      <p:sp>
+        <p:nvSpPr>
+          <p:cNvPr id="12" name="shape"/>
+          <p:cNvSpPr/>
+          <p:nvPr/>
+        </p:nvSpPr>
+        <p:spPr>
+          <a:xfrm>
+            <a:off x="4919472" y="1737360"/>
+            <a:ext cx="1938528" cy="1115568"/>
+          </a:xfrm>
+          <a:prstGeom prst="roundRect">
+            <a:avLst/>
+          </a:prstGeom>
+          <a:solidFill>
+            <a:srgbClr val="3D3222"/>
+          </a:solidFill>
+          <a:ln w="12700">
+            <a:solidFill>
+              <a:srgbClr val="FFC857"/>
+            </a:solidFill>
+          </a:ln>
+        </p:spPr>
+        <p:txBody>
+          <a:bodyPr wrap="square" anchor="ctr" lIns="73152" rIns="73152" tIns="45720" bIns="45720"/>
+          <a:lstStyle/>
+          <a:p>
+            <a:pPr algn="ctr"/>
+            <a:r>
+              <a:rPr lang="pt-BR" sz="1400" b="1">
+                <a:solidFill>
+                  <a:srgbClr val="FFFFFF"/>
+                </a:solidFill>
+                <a:latin typeface="Aptos"/>
+              </a:rPr>
+              <a:t>FastAPI</a:t>
+            </a:r>
+            <a:endParaRPr lang="pt-BR" sz="1400"/>
+          </a:p>
+          <a:p>
+            <a:pPr algn="ctr"/>
+            <a:r>
+              <a:rPr lang="pt-BR" sz="1400" b="1">
+                <a:solidFill>
+                  <a:srgbClr val="FFFFFF"/>
+                </a:solidFill>
+                <a:latin typeface="Aptos"/>
+              </a:rPr>
+              <a:t>apps/api</a:t>
+            </a:r>
+            <a:endParaRPr lang="pt-BR" sz="1400"/>
+          </a:p>
+          <a:p>
+            <a:pPr algn="ctr"/>
+            <a:r>
+              <a:rPr lang="pt-BR" sz="1400" b="1">
+                <a:solidFill>
+                  <a:srgbClr val="FFFFFF"/>
+                </a:solidFill>
+                <a:latin typeface="Aptos"/>
+              </a:rPr>
+              <a:t>rotas + Pydantic</a:t>
+            </a:r>
+            <a:endParaRPr lang="pt-BR" sz="1400"/>
+          </a:p>
+        </p:txBody>
+      </p:sp>
+      <p:sp>
+        <p:nvSpPr>
+          <p:cNvPr id="13" name="shape"/>
+          <p:cNvSpPr/>
+          <p:nvPr/>
+        </p:nvSpPr>
+        <p:spPr>
+          <a:xfrm>
+            <a:off x="7333488" y="1737360"/>
+            <a:ext cx="1371600" cy="1115568"/>
+          </a:xfrm>
+          <a:prstGeom prst="roundRect">
+            <a:avLst/>
+          </a:prstGeom>
+          <a:solidFill>
+            <a:srgbClr val="3D3222"/>
+          </a:solidFill>
+          <a:ln w="12700">
+            <a:solidFill>
+              <a:srgbClr val="FFC857"/>
+            </a:solidFill>
+          </a:ln>
+        </p:spPr>
+        <p:txBody>
+          <a:bodyPr wrap="square" anchor="ctr" lIns="73152" rIns="73152" tIns="45720" bIns="45720"/>
+          <a:lstStyle/>
+          <a:p>
+            <a:pPr algn="ctr"/>
+            <a:r>
+              <a:rPr lang="pt-BR" sz="1300" b="1">
+                <a:solidFill>
+                  <a:srgbClr val="FFFFFF"/>
+                </a:solidFill>
+                <a:latin typeface="Aptos"/>
+              </a:rPr>
+              <a:t>CRUD</a:t>
+            </a:r>
+            <a:endParaRPr lang="pt-BR" sz="1300"/>
+          </a:p>
+          <a:p>
+            <a:pPr algn="ctr"/>
+            <a:r>
+              <a:rPr lang="pt-BR" sz="1300" b="1">
+                <a:solidFill>
+                  <a:srgbClr val="FFFFFF"/>
+                </a:solidFill>
+                <a:latin typeface="Aptos"/>
+              </a:rPr>
+              <a:t>cards +</a:t>
+            </a:r>
+            <a:endParaRPr lang="pt-BR" sz="1300"/>
+          </a:p>
+          <a:p>
+            <a:pPr algn="ctr"/>
+            <a:r>
+              <a:rPr lang="pt-BR" sz="1300" b="1">
+                <a:solidFill>
+                  <a:srgbClr val="FFFFFF"/>
+                </a:solidFill>
+                <a:latin typeface="Aptos"/>
+              </a:rPr>
+              <a:t>usuarios</a:t>
+            </a:r>
+            <a:endParaRPr lang="pt-BR" sz="1300"/>
+          </a:p>
+        </p:txBody>
+      </p:sp>
+      <p:sp>
+        <p:nvSpPr>
+          <p:cNvPr id="14" name="shape"/>
+          <p:cNvSpPr/>
+          <p:nvPr/>
+        </p:nvSpPr>
+        <p:spPr>
+          <a:xfrm>
+            <a:off x="9189720" y="1993392"/>
+            <a:ext cx="1901952" cy="960120"/>
+          </a:xfrm>
+          <a:prstGeom prst="roundRect">
+            <a:avLst/>
+          </a:prstGeom>
+          <a:solidFill>
+            <a:srgbClr val="451E33"/>
+          </a:solidFill>
+          <a:ln w="12700">
+            <a:solidFill>
+              <a:srgbClr val="FF5A8A"/>
+            </a:solidFill>
+          </a:ln>
+        </p:spPr>
+        <p:txBody>
+          <a:bodyPr wrap="square" anchor="ctr" lIns="73152" rIns="73152" tIns="45720" bIns="45720"/>
+          <a:lstStyle/>
+          <a:p>
+            <a:pPr algn="ctr"/>
+            <a:r>
+              <a:rPr lang="pt-BR" sz="1500" b="1">
+                <a:solidFill>
+                  <a:srgbClr val="FFFFFF"/>
+                </a:solidFill>
+                <a:latin typeface="Aptos"/>
+              </a:rPr>
+              <a:t>PostgreSQL 16</a:t>
+            </a:r>
+            <a:endParaRPr lang="pt-BR" sz="1500"/>
+          </a:p>
+          <a:p>
+            <a:pPr algn="ctr"/>
+            <a:r>
+              <a:rPr lang="pt-BR" sz="1500" b="1">
+                <a:solidFill>
+                  <a:srgbClr val="FFFFFF"/>
+                </a:solidFill>
+                <a:latin typeface="Aptos"/>
+              </a:rPr>
+              <a:t>fonte da verdade</a:t>
+            </a:r>
+            <a:endParaRPr lang="pt-BR" sz="1500"/>
+          </a:p>
+        </p:txBody>
+      </p:sp>
+      <p:sp>
+        <p:nvSpPr>
+          <p:cNvPr id="15" name="shape"/>
+          <p:cNvSpPr/>
+          <p:nvPr/>
+        </p:nvSpPr>
+        <p:spPr>
+          <a:xfrm>
+            <a:off x="2221992" y="2313432"/>
+            <a:ext cx="292608" cy="237744"/>
+          </a:xfrm>
+          <a:prstGeom prst="rightArrow">
+            <a:avLst/>
+          </a:prstGeom>
+          <a:solidFill>
+            <a:srgbClr val="8BE9D6"/>
+          </a:solidFill>
+          <a:ln w="0">
+            <a:noFill/>
+          </a:ln>
+        </p:spPr>
+      </p:sp>
+      <p:sp>
+        <p:nvSpPr>
+          <p:cNvPr id="16" name="shape"/>
+          <p:cNvSpPr/>
+          <p:nvPr/>
+        </p:nvSpPr>
+        <p:spPr>
+          <a:xfrm>
+            <a:off x="4498848" y="2221992"/>
+            <a:ext cx="347472" cy="237744"/>
+          </a:xfrm>
+          <a:prstGeom prst="rightArrow">
+            <a:avLst/>
+          </a:prstGeom>
+          <a:solidFill>
+            <a:srgbClr val="2BD3FF"/>
+          </a:solidFill>
+          <a:ln w="0">
+            <a:noFill/>
+          </a:ln>
+        </p:spPr>
+      </p:sp>
+      <p:sp>
+        <p:nvSpPr>
+          <p:cNvPr id="17" name="shape"/>
+          <p:cNvSpPr/>
+          <p:nvPr/>
+        </p:nvSpPr>
+        <p:spPr>
+          <a:xfrm>
+            <a:off x="6931152" y="2221992"/>
+            <a:ext cx="347472" cy="237744"/>
+          </a:xfrm>
+          <a:prstGeom prst="rightArrow">
+            <a:avLst/>
+          </a:prstGeom>
+          <a:solidFill>
+            <a:srgbClr val="FFC857"/>
+          </a:solidFill>
+          <a:ln w="0">
+            <a:noFill/>
+          </a:ln>
+        </p:spPr>
+      </p:sp>
+      <p:sp>
+        <p:nvSpPr>
+          <p:cNvPr id="18" name="shape"/>
+          <p:cNvSpPr/>
+          <p:nvPr/>
+        </p:nvSpPr>
+        <p:spPr>
+          <a:xfrm>
+            <a:off x="8741664" y="2331720"/>
+            <a:ext cx="347472" cy="237744"/>
+          </a:xfrm>
+          <a:prstGeom prst="rightArrow">
+            <a:avLst/>
+          </a:prstGeom>
+          <a:solidFill>
+            <a:srgbClr val="FF5A8A"/>
+          </a:solidFill>
+          <a:ln w="0">
+            <a:noFill/>
+          </a:ln>
+        </p:spPr>
+      </p:sp>
+      <p:sp>
+        <p:nvSpPr>
+          <p:cNvPr id="19" name="shape"/>
+          <p:cNvSpPr/>
+          <p:nvPr/>
+        </p:nvSpPr>
+        <p:spPr>
+          <a:xfrm>
+            <a:off x="5138928" y="2926080"/>
+            <a:ext cx="256032" cy="658368"/>
+          </a:xfrm>
+          <a:prstGeom prst="downArrow">
+            <a:avLst/>
+          </a:prstGeom>
+          <a:solidFill>
+            <a:srgbClr val="FFC857"/>
+          </a:solidFill>
+          <a:ln w="0">
+            <a:noFill/>
+          </a:ln>
+        </p:spPr>
+      </p:sp>
+      <p:sp>
+        <p:nvSpPr>
+          <p:cNvPr id="20" name="shape"/>
+          <p:cNvSpPr/>
+          <p:nvPr/>
+        </p:nvSpPr>
+        <p:spPr>
+          <a:xfrm>
+            <a:off x="6812280" y="2926080"/>
+            <a:ext cx="256032" cy="658368"/>
+          </a:xfrm>
+          <a:prstGeom prst="downArrow">
+            <a:avLst/>
+          </a:prstGeom>
+          <a:solidFill>
+            <a:srgbClr val="FFC857"/>
+          </a:solidFill>
+          <a:ln w="0">
+            <a:noFill/>
+          </a:ln>
+        </p:spPr>
+      </p:sp>
+      <p:sp>
+        <p:nvSpPr>
+          <p:cNvPr id="21" name="shape"/>
+          <p:cNvSpPr/>
+          <p:nvPr/>
+        </p:nvSpPr>
+        <p:spPr>
+          <a:xfrm>
+            <a:off x="8065008" y="4050792"/>
+            <a:ext cx="420624" cy="237744"/>
+          </a:xfrm>
+          <a:prstGeom prst="rightArrow">
+            <a:avLst/>
+          </a:prstGeom>
+          <a:solidFill>
+            <a:srgbClr val="FF5A8A"/>
+          </a:solidFill>
+          <a:ln w="0">
+            <a:noFill/>
+          </a:ln>
+        </p:spPr>
+      </p:sp>
+      <p:sp>
+        <p:nvSpPr>
+          <p:cNvPr id="22" name="shape"/>
+          <p:cNvSpPr/>
+          <p:nvPr/>
+        </p:nvSpPr>
+        <p:spPr>
+          <a:xfrm>
+            <a:off x="4187952" y="3703320"/>
+            <a:ext cx="1783080" cy="960120"/>
+          </a:xfrm>
+          <a:prstGeom prst="roundRect">
+            <a:avLst/>
+          </a:prstGeom>
+          <a:solidFill>
+            <a:srgbClr val="FFFFFF">
+              <a:alpha val="15000"/>
             </a:srgbClr>
           </a:solidFill>
-          <a:ln xmlns:a="http://schemas.openxmlformats.org/drawingml/2006/main" w="0">
-            <a:solidFill>
-              <a:srgbClr val="000000">
-                <a:alpha val="0"/>
-              </a:srgbClr>
-            </a:solidFill>
-            <a:prstDash val="solid"/>
-          </a:ln>
-        </p:spPr>
-        <p:txBody>
-          <a:bodyPr xmlns:a="http://schemas.openxmlformats.org/drawingml/2006/main" lIns="0" tIns="0" rIns="0" bIns="0" anchor="t"/>
-          <a:lstStyle xmlns:a="http://schemas.openxmlformats.org/drawingml/2006/main"/>
-          <a:p xmlns:a="http://schemas.openxmlformats.org/drawingml/2006/main">
-            <a:pPr algn="l">
-              <a:defRPr sz="1575" b="1">
+          <a:ln w="12700">
+            <a:solidFill>
+              <a:srgbClr val="FFC857"/>
+            </a:solidFill>
+          </a:ln>
+        </p:spPr>
+        <p:txBody>
+          <a:bodyPr wrap="square" anchor="ctr" lIns="73152" rIns="73152" tIns="45720" bIns="45720"/>
+          <a:lstStyle/>
+          <a:p>
+            <a:pPr algn="ctr"/>
+            <a:r>
+              <a:rPr lang="pt-BR" sz="1200" b="1">
+                <a:solidFill>
+                  <a:srgbClr val="FFF3C4"/>
+                </a:solidFill>
+                <a:latin typeface="Aptos"/>
+              </a:rPr>
+              <a:t>Metrics Service</a:t>
+            </a:r>
+            <a:endParaRPr lang="pt-BR" sz="1200"/>
+          </a:p>
+          <a:p>
+            <a:pPr algn="ctr"/>
+            <a:r>
+              <a:rPr lang="pt-BR" sz="1200" b="1">
+                <a:solidFill>
+                  <a:srgbClr val="FFF3C4"/>
+                </a:solidFill>
+                <a:latin typeface="Aptos"/>
+              </a:rPr>
+              <a:t>lead/cycle time</a:t>
+            </a:r>
+            <a:endParaRPr lang="pt-BR" sz="1200"/>
+          </a:p>
+          <a:p>
+            <a:pPr algn="ctr"/>
+            <a:r>
+              <a:rPr lang="pt-BR" sz="1200" b="1">
+                <a:solidFill>
+                  <a:srgbClr val="FFF3C4"/>
+                </a:solidFill>
+                <a:latin typeface="Aptos"/>
+              </a:rPr>
+              <a:t>throughput, gargalo</a:t>
+            </a:r>
+            <a:endParaRPr lang="pt-BR" sz="1200"/>
+          </a:p>
+        </p:txBody>
+      </p:sp>
+      <p:sp>
+        <p:nvSpPr>
+          <p:cNvPr id="23" name="shape"/>
+          <p:cNvSpPr/>
+          <p:nvPr/>
+        </p:nvSpPr>
+        <p:spPr>
+          <a:xfrm>
+            <a:off x="6236208" y="3703320"/>
+            <a:ext cx="1783080" cy="960120"/>
+          </a:xfrm>
+          <a:prstGeom prst="roundRect">
+            <a:avLst/>
+          </a:prstGeom>
+          <a:solidFill>
+            <a:srgbClr val="FFFFFF">
+              <a:alpha val="15000"/>
+            </a:srgbClr>
+          </a:solidFill>
+          <a:ln w="12700">
+            <a:solidFill>
+              <a:srgbClr val="FFC857"/>
+            </a:solidFill>
+          </a:ln>
+        </p:spPr>
+        <p:txBody>
+          <a:bodyPr wrap="square" anchor="ctr" lIns="73152" rIns="73152" tIns="45720" bIns="45720"/>
+          <a:lstStyle/>
+          <a:p>
+            <a:pPr algn="ctr"/>
+            <a:r>
+              <a:rPr lang="pt-BR" sz="1200" b="1">
+                <a:solidFill>
+                  <a:srgbClr val="FFF3C4"/>
+                </a:solidFill>
+                <a:latin typeface="Aptos"/>
+              </a:rPr>
+              <a:t>Repository</a:t>
+            </a:r>
+            <a:endParaRPr lang="pt-BR" sz="1200"/>
+          </a:p>
+          <a:p>
+            <a:pPr algn="ctr"/>
+            <a:r>
+              <a:rPr lang="pt-BR" sz="1200" b="1">
+                <a:solidFill>
+                  <a:srgbClr val="FFF3C4"/>
+                </a:solidFill>
+                <a:latin typeface="Aptos"/>
+              </a:rPr>
+              <a:t>SQL explicito</a:t>
+            </a:r>
+            <a:endParaRPr lang="pt-BR" sz="1200"/>
+          </a:p>
+          <a:p>
+            <a:pPr algn="ctr"/>
+            <a:r>
+              <a:rPr lang="pt-BR" sz="1200" b="1">
+                <a:solidFill>
+                  <a:srgbClr val="FFF3C4"/>
+                </a:solidFill>
+                <a:latin typeface="Aptos"/>
+              </a:rPr>
+              <a:t>transacoes</a:t>
+            </a:r>
+            <a:endParaRPr lang="pt-BR" sz="1200"/>
+          </a:p>
+        </p:txBody>
+      </p:sp>
+      <p:sp>
+        <p:nvSpPr>
+          <p:cNvPr id="24" name="shape"/>
+          <p:cNvSpPr/>
+          <p:nvPr/>
+        </p:nvSpPr>
+        <p:spPr>
+          <a:xfrm>
+            <a:off x="8613648" y="3767328"/>
+            <a:ext cx="2670048" cy="1554480"/>
+          </a:xfrm>
+          <a:prstGeom prst="roundRect">
+            <a:avLst/>
+          </a:prstGeom>
+          <a:solidFill>
+            <a:srgbClr val="FFFFFF">
+              <a:alpha val="15000"/>
+            </a:srgbClr>
+          </a:solidFill>
+          <a:ln w="12700">
+            <a:solidFill>
+              <a:srgbClr val="FF5A8A"/>
+            </a:solidFill>
+          </a:ln>
+        </p:spPr>
+      </p:sp>
+      <p:sp>
+        <p:nvSpPr>
+          <p:cNvPr id="25" name="shape"/>
+          <p:cNvSpPr/>
+          <p:nvPr/>
+        </p:nvSpPr>
+        <p:spPr>
+          <a:xfrm>
+            <a:off x="8796528" y="3904488"/>
+            <a:ext cx="2240280" cy="256032"/>
+          </a:xfrm>
+          <a:prstGeom prst="rect">
+            <a:avLst/>
+          </a:prstGeom>
+          <a:noFill/>
+          <a:ln w="0">
+            <a:noFill/>
+          </a:ln>
+        </p:spPr>
+        <p:txBody>
+          <a:bodyPr wrap="square" anchor="ctr" lIns="73152" rIns="73152" tIns="45720" bIns="45720"/>
+          <a:lstStyle/>
+          <a:p>
+            <a:pPr algn="l"/>
+            <a:r>
+              <a:rPr lang="pt-BR" sz="1100" b="1">
+                <a:solidFill>
+                  <a:srgbClr val="FFC2D4"/>
+                </a:solidFill>
+                <a:latin typeface="Aptos"/>
+              </a:rPr>
+              <a:t>Modelo persistido</a:t>
+            </a:r>
+            <a:endParaRPr lang="pt-BR" sz="1100"/>
+          </a:p>
+        </p:txBody>
+      </p:sp>
+      <p:sp>
+        <p:nvSpPr>
+          <p:cNvPr id="26" name="shape"/>
+          <p:cNvSpPr/>
+          <p:nvPr/>
+        </p:nvSpPr>
+        <p:spPr>
+          <a:xfrm>
+            <a:off x="8851392" y="4279392"/>
+            <a:ext cx="841248" cy="292608"/>
+          </a:xfrm>
+          <a:prstGeom prst="roundRect">
+            <a:avLst/>
+          </a:prstGeom>
+          <a:solidFill>
+            <a:srgbClr val="23C98F"/>
+          </a:solidFill>
+          <a:ln w="0">
+            <a:noFill/>
+          </a:ln>
+        </p:spPr>
+        <p:txBody>
+          <a:bodyPr wrap="square" anchor="ctr" lIns="73152" rIns="73152" tIns="45720" bIns="45720"/>
+          <a:lstStyle/>
+          <a:p>
+            <a:pPr algn="ctr"/>
+            <a:r>
+              <a:rPr lang="pt-BR" sz="1100" b="1">
                 <a:solidFill>
                   <a:srgbClr val="10231F"/>
                 </a:solidFill>
-                <a:latin typeface="Aptos Display"/>
-                <a:ea typeface="Aptos Display"/>
-                <a:cs typeface="Aptos Display"/>
-              </a:defRPr>
-            </a:pPr>
-            <a:r>
-              <a:rPr sz="1575" b="1">
+                <a:latin typeface="Aptos"/>
+              </a:rPr>
+              <a:t>users</a:t>
+            </a:r>
+            <a:endParaRPr lang="pt-BR" sz="1100"/>
+          </a:p>
+        </p:txBody>
+      </p:sp>
+      <p:sp>
+        <p:nvSpPr>
+          <p:cNvPr id="27" name="shape"/>
+          <p:cNvSpPr/>
+          <p:nvPr/>
+        </p:nvSpPr>
+        <p:spPr>
+          <a:xfrm>
+            <a:off x="9802368" y="4279392"/>
+            <a:ext cx="841248" cy="292608"/>
+          </a:xfrm>
+          <a:prstGeom prst="roundRect">
+            <a:avLst/>
+          </a:prstGeom>
+          <a:solidFill>
+            <a:srgbClr val="2BD3FF"/>
+          </a:solidFill>
+          <a:ln w="0">
+            <a:noFill/>
+          </a:ln>
+        </p:spPr>
+        <p:txBody>
+          <a:bodyPr wrap="square" anchor="ctr" lIns="73152" rIns="73152" tIns="45720" bIns="45720"/>
+          <a:lstStyle/>
+          <a:p>
+            <a:pPr algn="ctr"/>
+            <a:r>
+              <a:rPr lang="pt-BR" sz="1100" b="1">
                 <a:solidFill>
                   <a:srgbClr val="10231F"/>
                 </a:solidFill>
-                <a:latin typeface="Aptos Display"/>
-                <a:ea typeface="Aptos Display"/>
-                <a:cs typeface="Aptos Display"/>
-              </a:rPr>
-              <a:t>Usuario</a:t>
-            </a:r>
-          </a:p>
-        </p:txBody>
-      </p:sp>
-      <p:sp>
-        <p:nvSpPr>
-          <p:cNvPr id="10" name="">
-            <a:extLst xmlns:a="http://schemas.openxmlformats.org/drawingml/2006/main">
-              <a:ext uri="{FF2B5EF4-FFF2-40B4-BE49-F238E27FC236}">
-                <a16:creationId xmlns:a16="http://schemas.microsoft.com/office/drawing/2014/main" id="{24887759-9EB4-4883-8583-66853A7C87AE}"/>
-              </a:ext>
-            </a:extLst>
-          </p:cNvPr>
-          <p:cNvSpPr>
-            <a:spLocks xmlns:a="http://schemas.openxmlformats.org/drawingml/2006/main" noGrp="1"/>
-          </p:cNvSpPr>
-          <p:nvPr/>
-        </p:nvSpPr>
-        <p:spPr>
-          <a:xfrm xmlns:a="http://schemas.openxmlformats.org/drawingml/2006/main">
-            <a:off x="1028700" y="3714750"/>
-            <a:ext cx="1485900" cy="209550"/>
-          </a:xfrm>
-          <a:prstGeom xmlns:a="http://schemas.openxmlformats.org/drawingml/2006/main" prst="rect">
-            <a:avLst/>
-          </a:prstGeom>
-          <a:solidFill xmlns:a="http://schemas.openxmlformats.org/drawingml/2006/main">
-            <a:srgbClr val="000000">
-              <a:alpha val="0"/>
+                <a:latin typeface="Aptos"/>
+              </a:rPr>
+              <a:t>cards</a:t>
+            </a:r>
+            <a:endParaRPr lang="pt-BR" sz="1100"/>
+          </a:p>
+        </p:txBody>
+      </p:sp>
+      <p:sp>
+        <p:nvSpPr>
+          <p:cNvPr id="28" name="shape"/>
+          <p:cNvSpPr/>
+          <p:nvPr/>
+        </p:nvSpPr>
+        <p:spPr>
+          <a:xfrm>
+            <a:off x="8851392" y="4681728"/>
+            <a:ext cx="1792224" cy="292608"/>
+          </a:xfrm>
+          <a:prstGeom prst="roundRect">
+            <a:avLst/>
+          </a:prstGeom>
+          <a:solidFill>
+            <a:srgbClr val="FF5A8A"/>
+          </a:solidFill>
+          <a:ln w="0">
+            <a:noFill/>
+          </a:ln>
+        </p:spPr>
+        <p:txBody>
+          <a:bodyPr wrap="square" anchor="ctr" lIns="73152" rIns="73152" tIns="45720" bIns="45720"/>
+          <a:lstStyle/>
+          <a:p>
+            <a:pPr algn="ctr"/>
+            <a:r>
+              <a:rPr lang="pt-BR" sz="1000" b="1">
+                <a:solidFill>
+                  <a:srgbClr val="FFFFFF"/>
+                </a:solidFill>
+                <a:latin typeface="Aptos"/>
+              </a:rPr>
+              <a:t>card_transitions</a:t>
+            </a:r>
+            <a:endParaRPr lang="pt-BR" sz="1000"/>
+          </a:p>
+        </p:txBody>
+      </p:sp>
+      <p:sp>
+        <p:nvSpPr>
+          <p:cNvPr id="29" name="shape"/>
+          <p:cNvSpPr/>
+          <p:nvPr/>
+        </p:nvSpPr>
+        <p:spPr>
+          <a:xfrm>
+            <a:off x="8851392" y="5074920"/>
+            <a:ext cx="2011680" cy="201168"/>
+          </a:xfrm>
+          <a:prstGeom prst="rect">
+            <a:avLst/>
+          </a:prstGeom>
+          <a:noFill/>
+          <a:ln w="0">
+            <a:noFill/>
+          </a:ln>
+        </p:spPr>
+        <p:txBody>
+          <a:bodyPr wrap="square" anchor="ctr" lIns="73152" rIns="73152" tIns="45720" bIns="45720"/>
+          <a:lstStyle/>
+          <a:p>
+            <a:pPr algn="l"/>
+            <a:r>
+              <a:rPr lang="pt-BR" sz="900" b="0">
+                <a:solidFill>
+                  <a:srgbClr val="F4EFE4"/>
+                </a:solidFill>
+                <a:latin typeface="Aptos"/>
+              </a:rPr>
+              <a:t>historico alimenta as metricas</a:t>
+            </a:r>
+            <a:endParaRPr lang="pt-BR" sz="900"/>
+          </a:p>
+        </p:txBody>
+      </p:sp>
+      <p:sp>
+        <p:nvSpPr>
+          <p:cNvPr id="30" name="shape"/>
+          <p:cNvSpPr/>
+          <p:nvPr/>
+        </p:nvSpPr>
+        <p:spPr>
+          <a:xfrm>
+            <a:off x="658368" y="5632704"/>
+            <a:ext cx="10497312" cy="585216"/>
+          </a:xfrm>
+          <a:prstGeom prst="roundRect">
+            <a:avLst/>
+          </a:prstGeom>
+          <a:solidFill>
+            <a:srgbClr val="FFFFFF">
+              <a:alpha val="14000"/>
             </a:srgbClr>
           </a:solidFill>
-          <a:ln xmlns:a="http://schemas.openxmlformats.org/drawingml/2006/main" w="0">
-            <a:solidFill>
-              <a:srgbClr val="000000">
-                <a:alpha val="0"/>
-              </a:srgbClr>
-            </a:solidFill>
-            <a:prstDash val="solid"/>
-          </a:ln>
-        </p:spPr>
-        <p:txBody>
-          <a:bodyPr xmlns:a="http://schemas.openxmlformats.org/drawingml/2006/main" lIns="0" tIns="0" rIns="0" bIns="0" anchor="t"/>
-          <a:lstStyle xmlns:a="http://schemas.openxmlformats.org/drawingml/2006/main"/>
-          <a:p xmlns:a="http://schemas.openxmlformats.org/drawingml/2006/main">
-            <a:pPr algn="l">
-              <a:defRPr sz="975" b="0">
-                <a:solidFill>
-                  <a:srgbClr val="6F7D75"/>
-                </a:solidFill>
-                <a:latin typeface="Aptos"/>
-                <a:ea typeface="Aptos"/>
-                <a:cs typeface="Aptos"/>
-              </a:defRPr>
-            </a:pPr>
-            <a:r>
-              <a:rPr sz="975" b="0">
-                <a:solidFill>
-                  <a:srgbClr val="6F7D75"/>
-                </a:solidFill>
-                <a:latin typeface="Aptos"/>
-                <a:ea typeface="Aptos"/>
-                <a:cs typeface="Aptos"/>
-              </a:rPr>
-              <a:t>gestor no navegador</a:t>
-            </a:r>
-          </a:p>
-        </p:txBody>
-      </p:sp>
-      <p:sp>
-        <p:nvSpPr>
-          <p:cNvPr id="11" name="">
-            <a:extLst xmlns:a="http://schemas.openxmlformats.org/drawingml/2006/main">
-              <a:ext uri="{FF2B5EF4-FFF2-40B4-BE49-F238E27FC236}">
-                <a16:creationId xmlns:a16="http://schemas.microsoft.com/office/drawing/2014/main" id="{3CB8F791-E382-460E-B7C1-942C32D44EDE}"/>
-              </a:ext>
-            </a:extLst>
-          </p:cNvPr>
-          <p:cNvSpPr>
-            <a:spLocks xmlns:a="http://schemas.openxmlformats.org/drawingml/2006/main" noGrp="1"/>
-          </p:cNvSpPr>
-          <p:nvPr/>
-        </p:nvSpPr>
-        <p:spPr>
-          <a:xfrm xmlns:a="http://schemas.openxmlformats.org/drawingml/2006/main">
-            <a:off x="3143250" y="3257550"/>
-            <a:ext cx="1943100" cy="819150"/>
-          </a:xfrm>
-          <a:prstGeom xmlns:a="http://schemas.openxmlformats.org/drawingml/2006/main" prst="rect">
-            <a:avLst/>
-          </a:prstGeom>
-          <a:solidFill xmlns:a="http://schemas.openxmlformats.org/drawingml/2006/main">
-            <a:srgbClr val="F4EFE4"/>
-          </a:solidFill>
-          <a:ln xmlns:a="http://schemas.openxmlformats.org/drawingml/2006/main" w="9525">
-            <a:solidFill>
-              <a:srgbClr val="000000">
-                <a:alpha val="0"/>
-              </a:srgbClr>
-            </a:solidFill>
-            <a:prstDash val="solid"/>
-          </a:ln>
-        </p:spPr>
-      </p:sp>
-      <p:sp>
-        <p:nvSpPr>
-          <p:cNvPr id="12" name="">
-            <a:extLst xmlns:a="http://schemas.openxmlformats.org/drawingml/2006/main">
-              <a:ext uri="{FF2B5EF4-FFF2-40B4-BE49-F238E27FC236}">
-                <a16:creationId xmlns:a16="http://schemas.microsoft.com/office/drawing/2014/main" id="{041E06D1-BC18-4175-9997-837B60EE8F4C}"/>
-              </a:ext>
-            </a:extLst>
-          </p:cNvPr>
-          <p:cNvSpPr>
-            <a:spLocks xmlns:a="http://schemas.openxmlformats.org/drawingml/2006/main" noGrp="1"/>
-          </p:cNvSpPr>
-          <p:nvPr/>
-        </p:nvSpPr>
-        <p:spPr>
-          <a:xfrm xmlns:a="http://schemas.openxmlformats.org/drawingml/2006/main">
-            <a:off x="3295650" y="3409950"/>
-            <a:ext cx="1638300" cy="228600"/>
-          </a:xfrm>
-          <a:prstGeom xmlns:a="http://schemas.openxmlformats.org/drawingml/2006/main" prst="rect">
-            <a:avLst/>
-          </a:prstGeom>
-          <a:solidFill xmlns:a="http://schemas.openxmlformats.org/drawingml/2006/main">
-            <a:srgbClr val="000000">
-              <a:alpha val="0"/>
-            </a:srgbClr>
-          </a:solidFill>
-          <a:ln xmlns:a="http://schemas.openxmlformats.org/drawingml/2006/main" w="0">
-            <a:solidFill>
-              <a:srgbClr val="000000">
-                <a:alpha val="0"/>
-              </a:srgbClr>
-            </a:solidFill>
-            <a:prstDash val="solid"/>
-          </a:ln>
-        </p:spPr>
-        <p:txBody>
-          <a:bodyPr xmlns:a="http://schemas.openxmlformats.org/drawingml/2006/main" lIns="0" tIns="0" rIns="0" bIns="0" anchor="t"/>
-          <a:lstStyle xmlns:a="http://schemas.openxmlformats.org/drawingml/2006/main"/>
-          <a:p xmlns:a="http://schemas.openxmlformats.org/drawingml/2006/main">
-            <a:pPr algn="l">
-              <a:defRPr sz="1575" b="1">
-                <a:solidFill>
-                  <a:srgbClr val="10231F"/>
-                </a:solidFill>
-                <a:latin typeface="Aptos Display"/>
-                <a:ea typeface="Aptos Display"/>
-                <a:cs typeface="Aptos Display"/>
-              </a:defRPr>
-            </a:pPr>
-            <a:r>
-              <a:rPr sz="1575" b="1">
-                <a:solidFill>
-                  <a:srgbClr val="10231F"/>
-                </a:solidFill>
-                <a:latin typeface="Aptos Display"/>
-                <a:ea typeface="Aptos Display"/>
-                <a:cs typeface="Aptos Display"/>
-              </a:rPr>
-              <a:t>Next.js</a:t>
-            </a:r>
-          </a:p>
-        </p:txBody>
-      </p:sp>
-      <p:sp>
-        <p:nvSpPr>
-          <p:cNvPr id="13" name="">
-            <a:extLst xmlns:a="http://schemas.openxmlformats.org/drawingml/2006/main">
-              <a:ext uri="{FF2B5EF4-FFF2-40B4-BE49-F238E27FC236}">
-                <a16:creationId xmlns:a16="http://schemas.microsoft.com/office/drawing/2014/main" id="{86B1401F-F257-4DDF-A318-D01953DA6CDB}"/>
-              </a:ext>
-            </a:extLst>
-          </p:cNvPr>
-          <p:cNvSpPr>
-            <a:spLocks xmlns:a="http://schemas.openxmlformats.org/drawingml/2006/main" noGrp="1"/>
-          </p:cNvSpPr>
-          <p:nvPr/>
-        </p:nvSpPr>
-        <p:spPr>
-          <a:xfrm xmlns:a="http://schemas.openxmlformats.org/drawingml/2006/main">
-            <a:off x="3295650" y="3714750"/>
-            <a:ext cx="1638300" cy="209550"/>
-          </a:xfrm>
-          <a:prstGeom xmlns:a="http://schemas.openxmlformats.org/drawingml/2006/main" prst="rect">
-            <a:avLst/>
-          </a:prstGeom>
-          <a:solidFill xmlns:a="http://schemas.openxmlformats.org/drawingml/2006/main">
-            <a:srgbClr val="000000">
-              <a:alpha val="0"/>
-            </a:srgbClr>
-          </a:solidFill>
-          <a:ln xmlns:a="http://schemas.openxmlformats.org/drawingml/2006/main" w="0">
-            <a:solidFill>
-              <a:srgbClr val="000000">
-                <a:alpha val="0"/>
-              </a:srgbClr>
-            </a:solidFill>
-            <a:prstDash val="solid"/>
-          </a:ln>
-        </p:spPr>
-        <p:txBody>
-          <a:bodyPr xmlns:a="http://schemas.openxmlformats.org/drawingml/2006/main" lIns="0" tIns="0" rIns="0" bIns="0" anchor="t"/>
-          <a:lstStyle xmlns:a="http://schemas.openxmlformats.org/drawingml/2006/main"/>
-          <a:p xmlns:a="http://schemas.openxmlformats.org/drawingml/2006/main">
-            <a:pPr algn="l">
-              <a:defRPr sz="975" b="0">
-                <a:solidFill>
-                  <a:srgbClr val="6F7D75"/>
-                </a:solidFill>
-                <a:latin typeface="Aptos"/>
-                <a:ea typeface="Aptos"/>
-                <a:cs typeface="Aptos"/>
-              </a:defRPr>
-            </a:pPr>
-            <a:r>
-              <a:rPr sz="975" b="0">
-                <a:solidFill>
-                  <a:srgbClr val="6F7D75"/>
-                </a:solidFill>
-                <a:latin typeface="Aptos"/>
-                <a:ea typeface="Aptos"/>
-                <a:cs typeface="Aptos"/>
-              </a:rPr>
-              <a:t>apps/web</a:t>
-            </a:r>
-          </a:p>
-        </p:txBody>
-      </p:sp>
-      <p:sp>
-        <p:nvSpPr>
-          <p:cNvPr id="14" name="">
-            <a:extLst xmlns:a="http://schemas.openxmlformats.org/drawingml/2006/main">
-              <a:ext uri="{FF2B5EF4-FFF2-40B4-BE49-F238E27FC236}">
-                <a16:creationId xmlns:a16="http://schemas.microsoft.com/office/drawing/2014/main" id="{BB02EB32-6003-4175-809E-3B504F86DCDA}"/>
-              </a:ext>
-            </a:extLst>
-          </p:cNvPr>
-          <p:cNvSpPr>
-            <a:spLocks xmlns:a="http://schemas.openxmlformats.org/drawingml/2006/main" noGrp="1"/>
-          </p:cNvSpPr>
-          <p:nvPr/>
-        </p:nvSpPr>
-        <p:spPr>
-          <a:xfrm xmlns:a="http://schemas.openxmlformats.org/drawingml/2006/main">
-            <a:off x="5562600" y="3257550"/>
-            <a:ext cx="1943100" cy="819150"/>
-          </a:xfrm>
-          <a:prstGeom xmlns:a="http://schemas.openxmlformats.org/drawingml/2006/main" prst="rect">
-            <a:avLst/>
-          </a:prstGeom>
-          <a:solidFill xmlns:a="http://schemas.openxmlformats.org/drawingml/2006/main">
-            <a:srgbClr val="F4EFE4"/>
-          </a:solidFill>
-          <a:ln xmlns:a="http://schemas.openxmlformats.org/drawingml/2006/main" w="9525">
-            <a:solidFill>
-              <a:srgbClr val="000000">
-                <a:alpha val="0"/>
-              </a:srgbClr>
-            </a:solidFill>
-            <a:prstDash val="solid"/>
-          </a:ln>
-        </p:spPr>
-      </p:sp>
-      <p:sp>
-        <p:nvSpPr>
-          <p:cNvPr id="15" name="">
-            <a:extLst xmlns:a="http://schemas.openxmlformats.org/drawingml/2006/main">
-              <a:ext uri="{FF2B5EF4-FFF2-40B4-BE49-F238E27FC236}">
-                <a16:creationId xmlns:a16="http://schemas.microsoft.com/office/drawing/2014/main" id="{70EC66DA-98C5-4FFD-8205-C05798D01A11}"/>
-              </a:ext>
-            </a:extLst>
-          </p:cNvPr>
-          <p:cNvSpPr>
-            <a:spLocks xmlns:a="http://schemas.openxmlformats.org/drawingml/2006/main" noGrp="1"/>
-          </p:cNvSpPr>
-          <p:nvPr/>
-        </p:nvSpPr>
-        <p:spPr>
-          <a:xfrm xmlns:a="http://schemas.openxmlformats.org/drawingml/2006/main">
-            <a:off x="5715000" y="3409950"/>
-            <a:ext cx="1638300" cy="228600"/>
-          </a:xfrm>
-          <a:prstGeom xmlns:a="http://schemas.openxmlformats.org/drawingml/2006/main" prst="rect">
-            <a:avLst/>
-          </a:prstGeom>
-          <a:solidFill xmlns:a="http://schemas.openxmlformats.org/drawingml/2006/main">
-            <a:srgbClr val="000000">
-              <a:alpha val="0"/>
-            </a:srgbClr>
-          </a:solidFill>
-          <a:ln xmlns:a="http://schemas.openxmlformats.org/drawingml/2006/main" w="0">
-            <a:solidFill>
-              <a:srgbClr val="000000">
-                <a:alpha val="0"/>
-              </a:srgbClr>
-            </a:solidFill>
-            <a:prstDash val="solid"/>
-          </a:ln>
-        </p:spPr>
-        <p:txBody>
-          <a:bodyPr xmlns:a="http://schemas.openxmlformats.org/drawingml/2006/main" lIns="0" tIns="0" rIns="0" bIns="0" anchor="t"/>
-          <a:lstStyle xmlns:a="http://schemas.openxmlformats.org/drawingml/2006/main"/>
-          <a:p xmlns:a="http://schemas.openxmlformats.org/drawingml/2006/main">
-            <a:pPr algn="l">
-              <a:defRPr sz="1575" b="1">
-                <a:solidFill>
-                  <a:srgbClr val="10231F"/>
-                </a:solidFill>
-                <a:latin typeface="Aptos Display"/>
-                <a:ea typeface="Aptos Display"/>
-                <a:cs typeface="Aptos Display"/>
-              </a:defRPr>
-            </a:pPr>
-            <a:r>
-              <a:rPr sz="1575" b="1">
-                <a:solidFill>
-                  <a:srgbClr val="10231F"/>
-                </a:solidFill>
-                <a:latin typeface="Aptos Display"/>
-                <a:ea typeface="Aptos Display"/>
-                <a:cs typeface="Aptos Display"/>
-              </a:rPr>
-              <a:t>FastAPI</a:t>
-            </a:r>
-          </a:p>
-        </p:txBody>
-      </p:sp>
-      <p:sp>
-        <p:nvSpPr>
-          <p:cNvPr id="16" name="">
-            <a:extLst xmlns:a="http://schemas.openxmlformats.org/drawingml/2006/main">
-              <a:ext uri="{FF2B5EF4-FFF2-40B4-BE49-F238E27FC236}">
-                <a16:creationId xmlns:a16="http://schemas.microsoft.com/office/drawing/2014/main" id="{0A3AADC2-0F07-4033-A686-C6071C496CBC}"/>
-              </a:ext>
-            </a:extLst>
-          </p:cNvPr>
-          <p:cNvSpPr>
-            <a:spLocks xmlns:a="http://schemas.openxmlformats.org/drawingml/2006/main" noGrp="1"/>
-          </p:cNvSpPr>
-          <p:nvPr/>
-        </p:nvSpPr>
-        <p:spPr>
-          <a:xfrm xmlns:a="http://schemas.openxmlformats.org/drawingml/2006/main">
-            <a:off x="5715000" y="3714750"/>
-            <a:ext cx="1638300" cy="209550"/>
-          </a:xfrm>
-          <a:prstGeom xmlns:a="http://schemas.openxmlformats.org/drawingml/2006/main" prst="rect">
-            <a:avLst/>
-          </a:prstGeom>
-          <a:solidFill xmlns:a="http://schemas.openxmlformats.org/drawingml/2006/main">
-            <a:srgbClr val="000000">
-              <a:alpha val="0"/>
-            </a:srgbClr>
-          </a:solidFill>
-          <a:ln xmlns:a="http://schemas.openxmlformats.org/drawingml/2006/main" w="0">
-            <a:solidFill>
-              <a:srgbClr val="000000">
-                <a:alpha val="0"/>
-              </a:srgbClr>
-            </a:solidFill>
-            <a:prstDash val="solid"/>
-          </a:ln>
-        </p:spPr>
-        <p:txBody>
-          <a:bodyPr xmlns:a="http://schemas.openxmlformats.org/drawingml/2006/main" lIns="0" tIns="0" rIns="0" bIns="0" anchor="t"/>
-          <a:lstStyle xmlns:a="http://schemas.openxmlformats.org/drawingml/2006/main"/>
-          <a:p xmlns:a="http://schemas.openxmlformats.org/drawingml/2006/main">
-            <a:pPr algn="l">
-              <a:defRPr sz="975" b="0">
-                <a:solidFill>
-                  <a:srgbClr val="6F7D75"/>
-                </a:solidFill>
-                <a:latin typeface="Aptos"/>
-                <a:ea typeface="Aptos"/>
-                <a:cs typeface="Aptos"/>
-              </a:defRPr>
-            </a:pPr>
-            <a:r>
-              <a:rPr sz="975" b="0">
-                <a:solidFill>
-                  <a:srgbClr val="6F7D75"/>
-                </a:solidFill>
-                <a:latin typeface="Aptos"/>
-                <a:ea typeface="Aptos"/>
-                <a:cs typeface="Aptos"/>
-              </a:rPr>
-              <a:t>apps/api</a:t>
-            </a:r>
-          </a:p>
-        </p:txBody>
-      </p:sp>
-      <p:sp>
-        <p:nvSpPr>
-          <p:cNvPr id="17" name="">
-            <a:extLst xmlns:a="http://schemas.openxmlformats.org/drawingml/2006/main">
-              <a:ext uri="{FF2B5EF4-FFF2-40B4-BE49-F238E27FC236}">
-                <a16:creationId xmlns:a16="http://schemas.microsoft.com/office/drawing/2014/main" id="{A62ADCA8-C833-4A42-8F73-008389AD17E7}"/>
-              </a:ext>
-            </a:extLst>
-          </p:cNvPr>
-          <p:cNvSpPr>
-            <a:spLocks xmlns:a="http://schemas.openxmlformats.org/drawingml/2006/main" noGrp="1"/>
-          </p:cNvSpPr>
-          <p:nvPr/>
-        </p:nvSpPr>
-        <p:spPr>
-          <a:xfrm xmlns:a="http://schemas.openxmlformats.org/drawingml/2006/main">
-            <a:off x="7981950" y="2876550"/>
-            <a:ext cx="1943100" cy="819150"/>
-          </a:xfrm>
-          <a:prstGeom xmlns:a="http://schemas.openxmlformats.org/drawingml/2006/main" prst="rect">
-            <a:avLst/>
-          </a:prstGeom>
-          <a:solidFill xmlns:a="http://schemas.openxmlformats.org/drawingml/2006/main">
-            <a:srgbClr val="F4EFE4"/>
-          </a:solidFill>
-          <a:ln xmlns:a="http://schemas.openxmlformats.org/drawingml/2006/main" w="9525">
-            <a:solidFill>
-              <a:srgbClr val="000000">
-                <a:alpha val="0"/>
-              </a:srgbClr>
-            </a:solidFill>
-            <a:prstDash val="solid"/>
-          </a:ln>
-        </p:spPr>
-      </p:sp>
-      <p:sp>
-        <p:nvSpPr>
-          <p:cNvPr id="18" name="">
-            <a:extLst xmlns:a="http://schemas.openxmlformats.org/drawingml/2006/main">
-              <a:ext uri="{FF2B5EF4-FFF2-40B4-BE49-F238E27FC236}">
-                <a16:creationId xmlns:a16="http://schemas.microsoft.com/office/drawing/2014/main" id="{DD0D6D54-7F33-4D1C-A86F-21041D2D5A12}"/>
-              </a:ext>
-            </a:extLst>
-          </p:cNvPr>
-          <p:cNvSpPr>
-            <a:spLocks xmlns:a="http://schemas.openxmlformats.org/drawingml/2006/main" noGrp="1"/>
-          </p:cNvSpPr>
-          <p:nvPr/>
-        </p:nvSpPr>
-        <p:spPr>
-          <a:xfrm xmlns:a="http://schemas.openxmlformats.org/drawingml/2006/main">
-            <a:off x="8134350" y="3028950"/>
-            <a:ext cx="1638300" cy="228600"/>
-          </a:xfrm>
-          <a:prstGeom xmlns:a="http://schemas.openxmlformats.org/drawingml/2006/main" prst="rect">
-            <a:avLst/>
-          </a:prstGeom>
-          <a:solidFill xmlns:a="http://schemas.openxmlformats.org/drawingml/2006/main">
-            <a:srgbClr val="000000">
-              <a:alpha val="0"/>
-            </a:srgbClr>
-          </a:solidFill>
-          <a:ln xmlns:a="http://schemas.openxmlformats.org/drawingml/2006/main" w="0">
-            <a:solidFill>
-              <a:srgbClr val="000000">
-                <a:alpha val="0"/>
-              </a:srgbClr>
-            </a:solidFill>
-            <a:prstDash val="solid"/>
-          </a:ln>
-        </p:spPr>
-        <p:txBody>
-          <a:bodyPr xmlns:a="http://schemas.openxmlformats.org/drawingml/2006/main" lIns="0" tIns="0" rIns="0" bIns="0" anchor="t"/>
-          <a:lstStyle xmlns:a="http://schemas.openxmlformats.org/drawingml/2006/main"/>
-          <a:p xmlns:a="http://schemas.openxmlformats.org/drawingml/2006/main">
-            <a:pPr algn="l">
-              <a:defRPr sz="1575" b="1">
-                <a:solidFill>
-                  <a:srgbClr val="10231F"/>
-                </a:solidFill>
-                <a:latin typeface="Aptos Display"/>
-                <a:ea typeface="Aptos Display"/>
-                <a:cs typeface="Aptos Display"/>
-              </a:defRPr>
-            </a:pPr>
-            <a:r>
-              <a:rPr sz="1575" b="1">
-                <a:solidFill>
-                  <a:srgbClr val="10231F"/>
-                </a:solidFill>
-                <a:latin typeface="Aptos Display"/>
-                <a:ea typeface="Aptos Display"/>
-                <a:cs typeface="Aptos Display"/>
-              </a:rPr>
-              <a:t>Metrics Service</a:t>
-            </a:r>
-          </a:p>
-        </p:txBody>
-      </p:sp>
-      <p:sp>
-        <p:nvSpPr>
-          <p:cNvPr id="19" name="">
-            <a:extLst xmlns:a="http://schemas.openxmlformats.org/drawingml/2006/main">
-              <a:ext uri="{FF2B5EF4-FFF2-40B4-BE49-F238E27FC236}">
-                <a16:creationId xmlns:a16="http://schemas.microsoft.com/office/drawing/2014/main" id="{7A8EA7A9-5403-4938-B20E-42B702289400}"/>
-              </a:ext>
-            </a:extLst>
-          </p:cNvPr>
-          <p:cNvSpPr>
-            <a:spLocks xmlns:a="http://schemas.openxmlformats.org/drawingml/2006/main" noGrp="1"/>
-          </p:cNvSpPr>
-          <p:nvPr/>
-        </p:nvSpPr>
-        <p:spPr>
-          <a:xfrm xmlns:a="http://schemas.openxmlformats.org/drawingml/2006/main">
-            <a:off x="8134350" y="3333750"/>
-            <a:ext cx="1638300" cy="209550"/>
-          </a:xfrm>
-          <a:prstGeom xmlns:a="http://schemas.openxmlformats.org/drawingml/2006/main" prst="rect">
-            <a:avLst/>
-          </a:prstGeom>
-          <a:solidFill xmlns:a="http://schemas.openxmlformats.org/drawingml/2006/main">
-            <a:srgbClr val="000000">
-              <a:alpha val="0"/>
-            </a:srgbClr>
-          </a:solidFill>
-          <a:ln xmlns:a="http://schemas.openxmlformats.org/drawingml/2006/main" w="0">
-            <a:solidFill>
-              <a:srgbClr val="000000">
-                <a:alpha val="0"/>
-              </a:srgbClr>
-            </a:solidFill>
-            <a:prstDash val="solid"/>
-          </a:ln>
-        </p:spPr>
-        <p:txBody>
-          <a:bodyPr xmlns:a="http://schemas.openxmlformats.org/drawingml/2006/main" lIns="0" tIns="0" rIns="0" bIns="0" anchor="t"/>
-          <a:lstStyle xmlns:a="http://schemas.openxmlformats.org/drawingml/2006/main"/>
-          <a:p xmlns:a="http://schemas.openxmlformats.org/drawingml/2006/main">
-            <a:pPr algn="l">
-              <a:defRPr sz="975" b="0">
-                <a:solidFill>
-                  <a:srgbClr val="6F7D75"/>
-                </a:solidFill>
-                <a:latin typeface="Aptos"/>
-                <a:ea typeface="Aptos"/>
-                <a:cs typeface="Aptos"/>
-              </a:defRPr>
-            </a:pPr>
-            <a:r>
-              <a:rPr sz="975" b="0">
-                <a:solidFill>
-                  <a:srgbClr val="6F7D75"/>
-                </a:solidFill>
-                <a:latin typeface="Aptos"/>
-                <a:ea typeface="Aptos"/>
-                <a:cs typeface="Aptos"/>
-              </a:rPr>
-              <a:t>calculo puro</a:t>
-            </a:r>
-          </a:p>
-        </p:txBody>
-      </p:sp>
-      <p:sp>
-        <p:nvSpPr>
-          <p:cNvPr id="20" name="">
-            <a:extLst xmlns:a="http://schemas.openxmlformats.org/drawingml/2006/main">
-              <a:ext uri="{FF2B5EF4-FFF2-40B4-BE49-F238E27FC236}">
-                <a16:creationId xmlns:a16="http://schemas.microsoft.com/office/drawing/2014/main" id="{7359AC41-4B9C-4662-BA1A-A75129CF0095}"/>
-              </a:ext>
-            </a:extLst>
-          </p:cNvPr>
-          <p:cNvSpPr>
-            <a:spLocks xmlns:a="http://schemas.openxmlformats.org/drawingml/2006/main" noGrp="1"/>
-          </p:cNvSpPr>
-          <p:nvPr/>
-        </p:nvSpPr>
-        <p:spPr>
-          <a:xfrm xmlns:a="http://schemas.openxmlformats.org/drawingml/2006/main">
-            <a:off x="7981950" y="4114800"/>
-            <a:ext cx="1943100" cy="819150"/>
-          </a:xfrm>
-          <a:prstGeom xmlns:a="http://schemas.openxmlformats.org/drawingml/2006/main" prst="rect">
-            <a:avLst/>
-          </a:prstGeom>
-          <a:solidFill xmlns:a="http://schemas.openxmlformats.org/drawingml/2006/main">
-            <a:srgbClr val="F4EFE4"/>
-          </a:solidFill>
-          <a:ln xmlns:a="http://schemas.openxmlformats.org/drawingml/2006/main" w="9525">
-            <a:solidFill>
-              <a:srgbClr val="000000">
-                <a:alpha val="0"/>
-              </a:srgbClr>
-            </a:solidFill>
-            <a:prstDash val="solid"/>
-          </a:ln>
-        </p:spPr>
-      </p:sp>
-      <p:sp>
-        <p:nvSpPr>
-          <p:cNvPr id="21" name="">
-            <a:extLst xmlns:a="http://schemas.openxmlformats.org/drawingml/2006/main">
-              <a:ext uri="{FF2B5EF4-FFF2-40B4-BE49-F238E27FC236}">
-                <a16:creationId xmlns:a16="http://schemas.microsoft.com/office/drawing/2014/main" id="{65839E90-59BC-4D62-8DED-DA063A498B7A}"/>
-              </a:ext>
-            </a:extLst>
-          </p:cNvPr>
-          <p:cNvSpPr>
-            <a:spLocks xmlns:a="http://schemas.openxmlformats.org/drawingml/2006/main" noGrp="1"/>
-          </p:cNvSpPr>
-          <p:nvPr/>
-        </p:nvSpPr>
-        <p:spPr>
-          <a:xfrm xmlns:a="http://schemas.openxmlformats.org/drawingml/2006/main">
-            <a:off x="8134350" y="4267200"/>
-            <a:ext cx="1638300" cy="228600"/>
-          </a:xfrm>
-          <a:prstGeom xmlns:a="http://schemas.openxmlformats.org/drawingml/2006/main" prst="rect">
-            <a:avLst/>
-          </a:prstGeom>
-          <a:solidFill xmlns:a="http://schemas.openxmlformats.org/drawingml/2006/main">
-            <a:srgbClr val="000000">
-              <a:alpha val="0"/>
-            </a:srgbClr>
-          </a:solidFill>
-          <a:ln xmlns:a="http://schemas.openxmlformats.org/drawingml/2006/main" w="0">
-            <a:solidFill>
-              <a:srgbClr val="000000">
-                <a:alpha val="0"/>
-              </a:srgbClr>
-            </a:solidFill>
-            <a:prstDash val="solid"/>
-          </a:ln>
-        </p:spPr>
-        <p:txBody>
-          <a:bodyPr xmlns:a="http://schemas.openxmlformats.org/drawingml/2006/main" lIns="0" tIns="0" rIns="0" bIns="0" anchor="t"/>
-          <a:lstStyle xmlns:a="http://schemas.openxmlformats.org/drawingml/2006/main"/>
-          <a:p xmlns:a="http://schemas.openxmlformats.org/drawingml/2006/main">
-            <a:pPr algn="l">
-              <a:defRPr sz="1575" b="1">
-                <a:solidFill>
-                  <a:srgbClr val="10231F"/>
-                </a:solidFill>
-                <a:latin typeface="Aptos Display"/>
-                <a:ea typeface="Aptos Display"/>
-                <a:cs typeface="Aptos Display"/>
-              </a:defRPr>
-            </a:pPr>
-            <a:r>
-              <a:rPr sz="1575" b="1">
-                <a:solidFill>
-                  <a:srgbClr val="10231F"/>
-                </a:solidFill>
-                <a:latin typeface="Aptos Display"/>
-                <a:ea typeface="Aptos Display"/>
-                <a:cs typeface="Aptos Display"/>
-              </a:rPr>
-              <a:t>Repository</a:t>
-            </a:r>
-          </a:p>
-        </p:txBody>
-      </p:sp>
-      <p:sp>
-        <p:nvSpPr>
-          <p:cNvPr id="22" name="">
-            <a:extLst xmlns:a="http://schemas.openxmlformats.org/drawingml/2006/main">
-              <a:ext uri="{FF2B5EF4-FFF2-40B4-BE49-F238E27FC236}">
-                <a16:creationId xmlns:a16="http://schemas.microsoft.com/office/drawing/2014/main" id="{48242B6D-D2F0-4551-8E26-E99D88F3A388}"/>
-              </a:ext>
-            </a:extLst>
-          </p:cNvPr>
-          <p:cNvSpPr>
-            <a:spLocks xmlns:a="http://schemas.openxmlformats.org/drawingml/2006/main" noGrp="1"/>
-          </p:cNvSpPr>
-          <p:nvPr/>
-        </p:nvSpPr>
-        <p:spPr>
-          <a:xfrm xmlns:a="http://schemas.openxmlformats.org/drawingml/2006/main">
-            <a:off x="8134350" y="4572000"/>
-            <a:ext cx="1638300" cy="209550"/>
-          </a:xfrm>
-          <a:prstGeom xmlns:a="http://schemas.openxmlformats.org/drawingml/2006/main" prst="rect">
-            <a:avLst/>
-          </a:prstGeom>
-          <a:solidFill xmlns:a="http://schemas.openxmlformats.org/drawingml/2006/main">
-            <a:srgbClr val="000000">
-              <a:alpha val="0"/>
-            </a:srgbClr>
-          </a:solidFill>
-          <a:ln xmlns:a="http://schemas.openxmlformats.org/drawingml/2006/main" w="0">
-            <a:solidFill>
-              <a:srgbClr val="000000">
-                <a:alpha val="0"/>
-              </a:srgbClr>
-            </a:solidFill>
-            <a:prstDash val="solid"/>
-          </a:ln>
-        </p:spPr>
-        <p:txBody>
-          <a:bodyPr xmlns:a="http://schemas.openxmlformats.org/drawingml/2006/main" lIns="0" tIns="0" rIns="0" bIns="0" anchor="t"/>
-          <a:lstStyle xmlns:a="http://schemas.openxmlformats.org/drawingml/2006/main"/>
-          <a:p xmlns:a="http://schemas.openxmlformats.org/drawingml/2006/main">
-            <a:pPr algn="l">
-              <a:defRPr sz="975" b="0">
-                <a:solidFill>
-                  <a:srgbClr val="6F7D75"/>
-                </a:solidFill>
-                <a:latin typeface="Aptos"/>
-                <a:ea typeface="Aptos"/>
-                <a:cs typeface="Aptos"/>
-              </a:defRPr>
-            </a:pPr>
-            <a:r>
-              <a:rPr sz="975" b="0">
-                <a:solidFill>
-                  <a:srgbClr val="6F7D75"/>
-                </a:solidFill>
-                <a:latin typeface="Aptos"/>
-                <a:ea typeface="Aptos"/>
-                <a:cs typeface="Aptos"/>
-              </a:rPr>
-              <a:t>SQL / psycopg</a:t>
-            </a:r>
-          </a:p>
-        </p:txBody>
-      </p:sp>
-      <p:sp>
-        <p:nvSpPr>
-          <p:cNvPr id="23" name="">
-            <a:extLst xmlns:a="http://schemas.openxmlformats.org/drawingml/2006/main">
-              <a:ext uri="{FF2B5EF4-FFF2-40B4-BE49-F238E27FC236}">
-                <a16:creationId xmlns:a16="http://schemas.microsoft.com/office/drawing/2014/main" id="{A29CC6D9-A8F7-484F-A6DB-AA13FC771B2F}"/>
-              </a:ext>
-            </a:extLst>
-          </p:cNvPr>
-          <p:cNvSpPr>
-            <a:spLocks xmlns:a="http://schemas.openxmlformats.org/drawingml/2006/main" noGrp="1"/>
-          </p:cNvSpPr>
-          <p:nvPr/>
-        </p:nvSpPr>
-        <p:spPr>
-          <a:xfrm xmlns:a="http://schemas.openxmlformats.org/drawingml/2006/main">
-            <a:off x="10382250" y="3505200"/>
-            <a:ext cx="1333500" cy="819150"/>
-          </a:xfrm>
-          <a:prstGeom xmlns:a="http://schemas.openxmlformats.org/drawingml/2006/main" prst="rect">
-            <a:avLst/>
-          </a:prstGeom>
-          <a:solidFill xmlns:a="http://schemas.openxmlformats.org/drawingml/2006/main">
-            <a:srgbClr val="F4EFE4"/>
-          </a:solidFill>
-          <a:ln xmlns:a="http://schemas.openxmlformats.org/drawingml/2006/main" w="9525">
-            <a:solidFill>
-              <a:srgbClr val="000000">
-                <a:alpha val="0"/>
-              </a:srgbClr>
-            </a:solidFill>
-            <a:prstDash val="solid"/>
-          </a:ln>
-        </p:spPr>
-      </p:sp>
-      <p:sp>
-        <p:nvSpPr>
-          <p:cNvPr id="24" name="">
-            <a:extLst xmlns:a="http://schemas.openxmlformats.org/drawingml/2006/main">
-              <a:ext uri="{FF2B5EF4-FFF2-40B4-BE49-F238E27FC236}">
-                <a16:creationId xmlns:a16="http://schemas.microsoft.com/office/drawing/2014/main" id="{DBA785FF-74EC-4F69-B00F-D00F5D1CF131}"/>
-              </a:ext>
-            </a:extLst>
-          </p:cNvPr>
-          <p:cNvSpPr>
-            <a:spLocks xmlns:a="http://schemas.openxmlformats.org/drawingml/2006/main" noGrp="1"/>
-          </p:cNvSpPr>
-          <p:nvPr/>
-        </p:nvSpPr>
-        <p:spPr>
-          <a:xfrm xmlns:a="http://schemas.openxmlformats.org/drawingml/2006/main">
-            <a:off x="10534650" y="3657600"/>
-            <a:ext cx="1028700" cy="228600"/>
-          </a:xfrm>
-          <a:prstGeom xmlns:a="http://schemas.openxmlformats.org/drawingml/2006/main" prst="rect">
-            <a:avLst/>
-          </a:prstGeom>
-          <a:solidFill xmlns:a="http://schemas.openxmlformats.org/drawingml/2006/main">
-            <a:srgbClr val="000000">
-              <a:alpha val="0"/>
-            </a:srgbClr>
-          </a:solidFill>
-          <a:ln xmlns:a="http://schemas.openxmlformats.org/drawingml/2006/main" w="0">
-            <a:solidFill>
-              <a:srgbClr val="000000">
-                <a:alpha val="0"/>
-              </a:srgbClr>
-            </a:solidFill>
-            <a:prstDash val="solid"/>
-          </a:ln>
-        </p:spPr>
-        <p:txBody>
-          <a:bodyPr xmlns:a="http://schemas.openxmlformats.org/drawingml/2006/main" lIns="0" tIns="0" rIns="0" bIns="0" anchor="t"/>
-          <a:lstStyle xmlns:a="http://schemas.openxmlformats.org/drawingml/2006/main"/>
-          <a:p xmlns:a="http://schemas.openxmlformats.org/drawingml/2006/main">
-            <a:pPr algn="l">
-              <a:defRPr sz="1575" b="1">
-                <a:solidFill>
-                  <a:srgbClr val="10231F"/>
-                </a:solidFill>
-                <a:latin typeface="Aptos Display"/>
-                <a:ea typeface="Aptos Display"/>
-                <a:cs typeface="Aptos Display"/>
-              </a:defRPr>
-            </a:pPr>
-            <a:r>
-              <a:rPr sz="1575" b="1">
-                <a:solidFill>
-                  <a:srgbClr val="10231F"/>
-                </a:solidFill>
-                <a:latin typeface="Aptos Display"/>
-                <a:ea typeface="Aptos Display"/>
-                <a:cs typeface="Aptos Display"/>
-              </a:rPr>
-              <a:t>PostgreSQL</a:t>
-            </a:r>
-          </a:p>
-        </p:txBody>
-      </p:sp>
-      <p:sp>
-        <p:nvSpPr>
-          <p:cNvPr id="25" name="">
-            <a:extLst xmlns:a="http://schemas.openxmlformats.org/drawingml/2006/main">
-              <a:ext uri="{FF2B5EF4-FFF2-40B4-BE49-F238E27FC236}">
-                <a16:creationId xmlns:a16="http://schemas.microsoft.com/office/drawing/2014/main" id="{3538BDC5-1363-40A4-90BB-AB6BC0B8912A}"/>
-              </a:ext>
-            </a:extLst>
-          </p:cNvPr>
-          <p:cNvSpPr>
-            <a:spLocks xmlns:a="http://schemas.openxmlformats.org/drawingml/2006/main" noGrp="1"/>
-          </p:cNvSpPr>
-          <p:nvPr/>
-        </p:nvSpPr>
-        <p:spPr>
-          <a:xfrm xmlns:a="http://schemas.openxmlformats.org/drawingml/2006/main">
-            <a:off x="10534650" y="3962400"/>
-            <a:ext cx="1028700" cy="209550"/>
-          </a:xfrm>
-          <a:prstGeom xmlns:a="http://schemas.openxmlformats.org/drawingml/2006/main" prst="rect">
-            <a:avLst/>
-          </a:prstGeom>
-          <a:solidFill xmlns:a="http://schemas.openxmlformats.org/drawingml/2006/main">
-            <a:srgbClr val="000000">
-              <a:alpha val="0"/>
-            </a:srgbClr>
-          </a:solidFill>
-          <a:ln xmlns:a="http://schemas.openxmlformats.org/drawingml/2006/main" w="0">
-            <a:solidFill>
-              <a:srgbClr val="000000">
-                <a:alpha val="0"/>
-              </a:srgbClr>
-            </a:solidFill>
-            <a:prstDash val="solid"/>
-          </a:ln>
-        </p:spPr>
-        <p:txBody>
-          <a:bodyPr xmlns:a="http://schemas.openxmlformats.org/drawingml/2006/main" lIns="0" tIns="0" rIns="0" bIns="0" anchor="t"/>
-          <a:lstStyle xmlns:a="http://schemas.openxmlformats.org/drawingml/2006/main"/>
-          <a:p xmlns:a="http://schemas.openxmlformats.org/drawingml/2006/main">
-            <a:pPr algn="l">
-              <a:defRPr sz="975" b="0">
-                <a:solidFill>
-                  <a:srgbClr val="6F7D75"/>
-                </a:solidFill>
-                <a:latin typeface="Aptos"/>
-                <a:ea typeface="Aptos"/>
-                <a:cs typeface="Aptos"/>
-              </a:defRPr>
-            </a:pPr>
-            <a:r>
-              <a:rPr sz="975" b="0">
-                <a:solidFill>
-                  <a:srgbClr val="6F7D75"/>
-                </a:solidFill>
-                <a:latin typeface="Aptos"/>
-                <a:ea typeface="Aptos"/>
-                <a:cs typeface="Aptos"/>
-              </a:rPr>
-              <a:t>fonte da verdade</a:t>
-            </a:r>
-          </a:p>
-        </p:txBody>
-      </p:sp>
-      <p:sp>
-        <p:nvSpPr>
-          <p:cNvPr id="26" name="">
-            <a:extLst xmlns:a="http://schemas.openxmlformats.org/drawingml/2006/main">
-              <a:ext uri="{FF2B5EF4-FFF2-40B4-BE49-F238E27FC236}">
-                <a16:creationId xmlns:a16="http://schemas.microsoft.com/office/drawing/2014/main" id="{BACFCDD5-C3EC-4937-91C7-A1F2E4153BFF}"/>
-              </a:ext>
-            </a:extLst>
-          </p:cNvPr>
-          <p:cNvSpPr>
-            <a:spLocks xmlns:a="http://schemas.openxmlformats.org/drawingml/2006/main" noGrp="1"/>
-          </p:cNvSpPr>
-          <p:nvPr/>
-        </p:nvSpPr>
-        <p:spPr>
-          <a:xfrm xmlns:a="http://schemas.openxmlformats.org/drawingml/2006/main">
-            <a:off x="2667000" y="3667125"/>
-            <a:ext cx="476250" cy="0"/>
-          </a:xfrm>
-          <a:prstGeom xmlns:a="http://schemas.openxmlformats.org/drawingml/2006/main" prst="line">
-            <a:avLst/>
-          </a:prstGeom>
-          <a:solidFill xmlns:a="http://schemas.openxmlformats.org/drawingml/2006/main">
-            <a:srgbClr val="000000">
-              <a:alpha val="0"/>
-            </a:srgbClr>
-          </a:solidFill>
-          <a:ln xmlns:a="http://schemas.openxmlformats.org/drawingml/2006/main" w="19050">
-            <a:solidFill>
-              <a:srgbClr val="9FB8A6"/>
-            </a:solidFill>
-            <a:prstDash val="solid"/>
-          </a:ln>
-        </p:spPr>
-      </p:sp>
-      <p:sp>
-        <p:nvSpPr>
-          <p:cNvPr id="27" name="">
-            <a:extLst xmlns:a="http://schemas.openxmlformats.org/drawingml/2006/main">
-              <a:ext uri="{FF2B5EF4-FFF2-40B4-BE49-F238E27FC236}">
-                <a16:creationId xmlns:a16="http://schemas.microsoft.com/office/drawing/2014/main" id="{66B88002-5FF1-46BF-902F-8B6E7B63A264}"/>
-              </a:ext>
-            </a:extLst>
-          </p:cNvPr>
-          <p:cNvSpPr>
-            <a:spLocks xmlns:a="http://schemas.openxmlformats.org/drawingml/2006/main" noGrp="1"/>
-          </p:cNvSpPr>
-          <p:nvPr/>
-        </p:nvSpPr>
-        <p:spPr>
-          <a:xfrm xmlns:a="http://schemas.openxmlformats.org/drawingml/2006/main">
-            <a:off x="5086350" y="3667125"/>
-            <a:ext cx="476250" cy="0"/>
-          </a:xfrm>
-          <a:prstGeom xmlns:a="http://schemas.openxmlformats.org/drawingml/2006/main" prst="line">
-            <a:avLst/>
-          </a:prstGeom>
-          <a:solidFill xmlns:a="http://schemas.openxmlformats.org/drawingml/2006/main">
-            <a:srgbClr val="000000">
-              <a:alpha val="0"/>
-            </a:srgbClr>
-          </a:solidFill>
-          <a:ln xmlns:a="http://schemas.openxmlformats.org/drawingml/2006/main" w="19050">
-            <a:solidFill>
-              <a:srgbClr val="9FB8A6"/>
-            </a:solidFill>
-            <a:prstDash val="solid"/>
-          </a:ln>
-        </p:spPr>
-      </p:sp>
-      <p:sp>
-        <p:nvSpPr>
-          <p:cNvPr id="28" name="">
-            <a:extLst xmlns:a="http://schemas.openxmlformats.org/drawingml/2006/main">
-              <a:ext uri="{FF2B5EF4-FFF2-40B4-BE49-F238E27FC236}">
-                <a16:creationId xmlns:a16="http://schemas.microsoft.com/office/drawing/2014/main" id="{E6A28579-2E11-4871-905B-88568C1F49B3}"/>
-              </a:ext>
-            </a:extLst>
-          </p:cNvPr>
-          <p:cNvSpPr>
-            <a:spLocks xmlns:a="http://schemas.openxmlformats.org/drawingml/2006/main" noGrp="1"/>
-          </p:cNvSpPr>
-          <p:nvPr/>
-        </p:nvSpPr>
-        <p:spPr>
-          <a:xfrm xmlns:a="http://schemas.openxmlformats.org/drawingml/2006/main">
-            <a:off x="7505700" y="3667125"/>
-            <a:ext cx="476250" cy="-381000"/>
-          </a:xfrm>
-          <a:prstGeom xmlns:a="http://schemas.openxmlformats.org/drawingml/2006/main" prst="line">
-            <a:avLst/>
-          </a:prstGeom>
-          <a:solidFill xmlns:a="http://schemas.openxmlformats.org/drawingml/2006/main">
-            <a:srgbClr val="000000">
-              <a:alpha val="0"/>
-            </a:srgbClr>
-          </a:solidFill>
-          <a:ln xmlns:a="http://schemas.openxmlformats.org/drawingml/2006/main" w="19050">
-            <a:solidFill>
-              <a:srgbClr val="9FB8A6"/>
-            </a:solidFill>
-            <a:prstDash val="solid"/>
-          </a:ln>
-        </p:spPr>
-      </p:sp>
-      <p:sp>
-        <p:nvSpPr>
-          <p:cNvPr id="29" name="">
-            <a:extLst xmlns:a="http://schemas.openxmlformats.org/drawingml/2006/main">
-              <a:ext uri="{FF2B5EF4-FFF2-40B4-BE49-F238E27FC236}">
-                <a16:creationId xmlns:a16="http://schemas.microsoft.com/office/drawing/2014/main" id="{38110680-A722-451B-BB7D-ADE1FDF001AD}"/>
-              </a:ext>
-            </a:extLst>
-          </p:cNvPr>
-          <p:cNvSpPr>
-            <a:spLocks xmlns:a="http://schemas.openxmlformats.org/drawingml/2006/main" noGrp="1"/>
-          </p:cNvSpPr>
-          <p:nvPr/>
-        </p:nvSpPr>
-        <p:spPr>
-          <a:xfrm xmlns:a="http://schemas.openxmlformats.org/drawingml/2006/main">
-            <a:off x="7505700" y="3667125"/>
-            <a:ext cx="476250" cy="857250"/>
-          </a:xfrm>
-          <a:prstGeom xmlns:a="http://schemas.openxmlformats.org/drawingml/2006/main" prst="line">
-            <a:avLst/>
-          </a:prstGeom>
-          <a:solidFill xmlns:a="http://schemas.openxmlformats.org/drawingml/2006/main">
-            <a:srgbClr val="000000">
-              <a:alpha val="0"/>
-            </a:srgbClr>
-          </a:solidFill>
-          <a:ln xmlns:a="http://schemas.openxmlformats.org/drawingml/2006/main" w="19050">
-            <a:solidFill>
-              <a:srgbClr val="9FB8A6"/>
-            </a:solidFill>
-            <a:prstDash val="solid"/>
-          </a:ln>
-        </p:spPr>
-      </p:sp>
-      <p:sp>
-        <p:nvSpPr>
-          <p:cNvPr id="30" name="">
-            <a:extLst xmlns:a="http://schemas.openxmlformats.org/drawingml/2006/main">
-              <a:ext uri="{FF2B5EF4-FFF2-40B4-BE49-F238E27FC236}">
-                <a16:creationId xmlns:a16="http://schemas.microsoft.com/office/drawing/2014/main" id="{8D448125-2AC1-4FC2-AE96-24B9192FF349}"/>
-              </a:ext>
-            </a:extLst>
-          </p:cNvPr>
-          <p:cNvSpPr>
-            <a:spLocks xmlns:a="http://schemas.openxmlformats.org/drawingml/2006/main" noGrp="1"/>
-          </p:cNvSpPr>
-          <p:nvPr/>
-        </p:nvSpPr>
-        <p:spPr>
-          <a:xfrm xmlns:a="http://schemas.openxmlformats.org/drawingml/2006/main">
-            <a:off x="9925050" y="4524375"/>
-            <a:ext cx="457200" cy="-619125"/>
-          </a:xfrm>
-          <a:prstGeom xmlns:a="http://schemas.openxmlformats.org/drawingml/2006/main" prst="line">
-            <a:avLst/>
-          </a:prstGeom>
-          <a:solidFill xmlns:a="http://schemas.openxmlformats.org/drawingml/2006/main">
-            <a:srgbClr val="000000">
-              <a:alpha val="0"/>
-            </a:srgbClr>
-          </a:solidFill>
-          <a:ln xmlns:a="http://schemas.openxmlformats.org/drawingml/2006/main" w="19050">
-            <a:solidFill>
-              <a:srgbClr val="9FB8A6"/>
-            </a:solidFill>
-            <a:prstDash val="solid"/>
-          </a:ln>
-        </p:spPr>
-      </p:sp>
-      <p:sp>
-        <p:nvSpPr>
-          <p:cNvPr id="31" name="">
-            <a:extLst xmlns:a="http://schemas.openxmlformats.org/drawingml/2006/main">
-              <a:ext uri="{FF2B5EF4-FFF2-40B4-BE49-F238E27FC236}">
-                <a16:creationId xmlns:a16="http://schemas.microsoft.com/office/drawing/2014/main" id="{F5185106-9F29-49A8-85A5-AF9E7BB6F973}"/>
-              </a:ext>
-            </a:extLst>
-          </p:cNvPr>
-          <p:cNvSpPr>
-            <a:spLocks xmlns:a="http://schemas.openxmlformats.org/drawingml/2006/main" noGrp="1"/>
-          </p:cNvSpPr>
-          <p:nvPr/>
-        </p:nvSpPr>
-        <p:spPr>
-          <a:xfrm xmlns:a="http://schemas.openxmlformats.org/drawingml/2006/main">
-            <a:off x="9925050" y="3286125"/>
-            <a:ext cx="457200" cy="619125"/>
-          </a:xfrm>
-          <a:prstGeom xmlns:a="http://schemas.openxmlformats.org/drawingml/2006/main" prst="line">
-            <a:avLst/>
-          </a:prstGeom>
-          <a:solidFill xmlns:a="http://schemas.openxmlformats.org/drawingml/2006/main">
-            <a:srgbClr val="000000">
-              <a:alpha val="0"/>
-            </a:srgbClr>
-          </a:solidFill>
-          <a:ln xmlns:a="http://schemas.openxmlformats.org/drawingml/2006/main" w="19050">
-            <a:solidFill>
-              <a:srgbClr val="9FB8A6"/>
-            </a:solidFill>
-            <a:prstDash val="solid"/>
-          </a:ln>
-        </p:spPr>
-      </p:sp>
-      <p:sp>
-        <p:nvSpPr>
-          <p:cNvPr id="32" name="">
-            <a:extLst xmlns:a="http://schemas.openxmlformats.org/drawingml/2006/main">
-              <a:ext uri="{FF2B5EF4-FFF2-40B4-BE49-F238E27FC236}">
-                <a16:creationId xmlns:a16="http://schemas.microsoft.com/office/drawing/2014/main" id="{8FC3BBAF-9A40-43BB-B30D-D7C3DDA5B74A}"/>
-              </a:ext>
-            </a:extLst>
-          </p:cNvPr>
-          <p:cNvSpPr>
-            <a:spLocks xmlns:a="http://schemas.openxmlformats.org/drawingml/2006/main" noGrp="1"/>
-          </p:cNvSpPr>
-          <p:nvPr/>
-        </p:nvSpPr>
-        <p:spPr>
-          <a:xfrm xmlns:a="http://schemas.openxmlformats.org/drawingml/2006/main">
-            <a:off x="666750" y="5467350"/>
-            <a:ext cx="8191500" cy="381000"/>
-          </a:xfrm>
-          <a:prstGeom xmlns:a="http://schemas.openxmlformats.org/drawingml/2006/main" prst="rect">
-            <a:avLst/>
-          </a:prstGeom>
-          <a:solidFill xmlns:a="http://schemas.openxmlformats.org/drawingml/2006/main">
-            <a:srgbClr val="000000">
-              <a:alpha val="0"/>
-            </a:srgbClr>
-          </a:solidFill>
-          <a:ln xmlns:a="http://schemas.openxmlformats.org/drawingml/2006/main" w="0">
-            <a:solidFill>
-              <a:srgbClr val="000000">
-                <a:alpha val="0"/>
-              </a:srgbClr>
-            </a:solidFill>
-            <a:prstDash val="solid"/>
-          </a:ln>
-        </p:spPr>
-        <p:txBody>
-          <a:bodyPr xmlns:a="http://schemas.openxmlformats.org/drawingml/2006/main" lIns="0" tIns="0" rIns="0" bIns="0" anchor="t"/>
-          <a:lstStyle xmlns:a="http://schemas.openxmlformats.org/drawingml/2006/main"/>
-          <a:p xmlns:a="http://schemas.openxmlformats.org/drawingml/2006/main">
-            <a:pPr algn="l">
-              <a:defRPr sz="1425" b="0">
-                <a:solidFill>
-                  <a:srgbClr val="DBE6DA"/>
-                </a:solidFill>
-                <a:latin typeface="Aptos"/>
-                <a:ea typeface="Aptos"/>
-                <a:cs typeface="Aptos"/>
-              </a:defRPr>
-            </a:pPr>
-            <a:r>
-              <a:rPr sz="1425" b="0">
-                <a:solidFill>
-                  <a:srgbClr val="DBE6DA"/>
-                </a:solidFill>
-                <a:latin typeface="Aptos"/>
-                <a:ea typeface="Aptos"/>
-                <a:cs typeface="Aptos"/>
-              </a:rPr>
-              <a:t>Planejado para evoluir: autenticacao externa, GitHub Actions e deploy Railway sem reescrever a regra de negocio.</a:t>
-            </a:r>
+          <a:ln w="12700">
+            <a:solidFill>
+              <a:srgbClr val="5B6B7E"/>
+            </a:solidFill>
+          </a:ln>
+        </p:spPr>
+      </p:sp>
+      <p:sp>
+        <p:nvSpPr>
+          <p:cNvPr id="31" name="shape"/>
+          <p:cNvSpPr/>
+          <p:nvPr/>
+        </p:nvSpPr>
+        <p:spPr>
+          <a:xfrm>
+            <a:off x="868680" y="5769864"/>
+            <a:ext cx="1417320" cy="228600"/>
+          </a:xfrm>
+          <a:prstGeom prst="rect">
+            <a:avLst/>
+          </a:prstGeom>
+          <a:noFill/>
+          <a:ln w="0">
+            <a:noFill/>
+          </a:ln>
+        </p:spPr>
+        <p:txBody>
+          <a:bodyPr wrap="square" anchor="ctr" lIns="73152" rIns="73152" tIns="45720" bIns="45720"/>
+          <a:lstStyle/>
+          <a:p>
+            <a:pPr algn="l"/>
+            <a:r>
+              <a:rPr lang="pt-BR" sz="1100" b="1">
+                <a:solidFill>
+                  <a:srgbClr val="8BE9D6"/>
+                </a:solidFill>
+                <a:latin typeface="Aptos"/>
+              </a:rPr>
+              <a:t>Deploy do MVP</a:t>
+            </a:r>
+            <a:endParaRPr lang="pt-BR" sz="1100"/>
+          </a:p>
+        </p:txBody>
+      </p:sp>
+      <p:sp>
+        <p:nvSpPr>
+          <p:cNvPr id="32" name="shape"/>
+          <p:cNvSpPr/>
+          <p:nvPr/>
+        </p:nvSpPr>
+        <p:spPr>
+          <a:xfrm>
+            <a:off x="2514600" y="5687568"/>
+            <a:ext cx="2103120" cy="438912"/>
+          </a:xfrm>
+          <a:prstGeom prst="roundRect">
+            <a:avLst/>
+          </a:prstGeom>
+          <a:solidFill>
+            <a:srgbClr val="163B4A"/>
+          </a:solidFill>
+          <a:ln w="0">
+            <a:noFill/>
+          </a:ln>
+        </p:spPr>
+        <p:txBody>
+          <a:bodyPr wrap="square" anchor="ctr" lIns="73152" rIns="73152" tIns="45720" bIns="45720"/>
+          <a:lstStyle/>
+          <a:p>
+            <a:pPr algn="ctr"/>
+            <a:r>
+              <a:rPr lang="pt-BR" sz="1300" b="1">
+                <a:solidFill>
+                  <a:srgbClr val="FFFFFF"/>
+                </a:solidFill>
+                <a:latin typeface="Aptos"/>
+              </a:rPr>
+              <a:t>web: /</a:t>
+            </a:r>
+            <a:endParaRPr lang="pt-BR" sz="1300"/>
+          </a:p>
+        </p:txBody>
+      </p:sp>
+      <p:sp>
+        <p:nvSpPr>
+          <p:cNvPr id="33" name="shape"/>
+          <p:cNvSpPr/>
+          <p:nvPr/>
+        </p:nvSpPr>
+        <p:spPr>
+          <a:xfrm>
+            <a:off x="4828032" y="5687568"/>
+            <a:ext cx="2377440" cy="438912"/>
+          </a:xfrm>
+          <a:prstGeom prst="roundRect">
+            <a:avLst/>
+          </a:prstGeom>
+          <a:solidFill>
+            <a:srgbClr val="3D3222"/>
+          </a:solidFill>
+          <a:ln w="0">
+            <a:noFill/>
+          </a:ln>
+        </p:spPr>
+        <p:txBody>
+          <a:bodyPr wrap="square" anchor="ctr" lIns="73152" rIns="73152" tIns="45720" bIns="45720"/>
+          <a:lstStyle/>
+          <a:p>
+            <a:pPr algn="ctr"/>
+            <a:r>
+              <a:rPr lang="pt-BR" sz="1300" b="1">
+                <a:solidFill>
+                  <a:srgbClr val="FFFFFF"/>
+                </a:solidFill>
+                <a:latin typeface="Aptos"/>
+              </a:rPr>
+              <a:t>backend: /_/backend</a:t>
+            </a:r>
+            <a:endParaRPr lang="pt-BR" sz="1300"/>
+          </a:p>
+        </p:txBody>
+      </p:sp>
+      <p:sp>
+        <p:nvSpPr>
+          <p:cNvPr id="34" name="shape"/>
+          <p:cNvSpPr/>
+          <p:nvPr/>
+        </p:nvSpPr>
+        <p:spPr>
+          <a:xfrm>
+            <a:off x="7424928" y="5687568"/>
+            <a:ext cx="3401568" cy="438912"/>
+          </a:xfrm>
+          <a:prstGeom prst="roundRect">
+            <a:avLst/>
+          </a:prstGeom>
+          <a:solidFill>
+            <a:srgbClr val="451E33"/>
+          </a:solidFill>
+          <a:ln w="0">
+            <a:noFill/>
+          </a:ln>
+        </p:spPr>
+        <p:txBody>
+          <a:bodyPr wrap="square" anchor="ctr" lIns="73152" rIns="73152" tIns="45720" bIns="45720"/>
+          <a:lstStyle/>
+          <a:p>
+            <a:pPr algn="ctr"/>
+            <a:r>
+              <a:rPr lang="pt-BR" sz="1200" b="1">
+                <a:solidFill>
+                  <a:srgbClr val="FFFFFF"/>
+                </a:solidFill>
+                <a:latin typeface="Aptos"/>
+              </a:rPr>
+              <a:t>DATABASE_URL aponta para Postgres externo</a:t>
+            </a:r>
+            <a:endParaRPr lang="pt-BR" sz="1200"/>
           </a:p>
         </p:txBody>
       </p:sp>
     </p:spTree>
-    <p:extLst>
-      <p:ext uri="{BB962C8B-B14F-4D97-AF65-F5344CB8AC3E}">
-        <p14:creationId xmlns:p14="http://schemas.microsoft.com/office/powerpoint/2010/main" val="297770611"/>
-      </p:ext>
-    </p:extLst>
   </p:cSld>
+  <p:clrMapOvr>
+    <a:masterClrMapping/>
+  </p:clrMapOvr>
 </p:sld>
 </file>
 
@@ -10001,7 +9700,7 @@
 </file>
 
 <file path=ppt/slides/slide7.xml><?xml version="1.0" encoding="utf-8"?>
-<p:sld xmlns:p="http://schemas.openxmlformats.org/presentationml/2006/main">
+<p:sld xmlns:p="http://schemas.openxmlformats.org/presentationml/2006/main" xmlns:a="http://schemas.openxmlformats.org/drawingml/2006/main" xmlns:r="http://schemas.openxmlformats.org/officeDocument/2006/relationships">
   <p:cSld>
     <p:spTree>
       <p:nvGrpSpPr>
@@ -10010,1455 +9709,1207 @@
         <p:nvPr/>
       </p:nvGrpSpPr>
       <p:grpSpPr>
-        <a:xfrm xmlns:a="http://schemas.openxmlformats.org/drawingml/2006/main"/>
+        <a:xfrm/>
       </p:grpSpPr>
       <p:sp>
         <p:nvSpPr>
-          <p:cNvPr id="1" name="">
-            <a:extLst xmlns:a="http://schemas.openxmlformats.org/drawingml/2006/main">
-              <a:ext uri="{FF2B5EF4-FFF2-40B4-BE49-F238E27FC236}">
-                <a16:creationId xmlns:a16="http://schemas.microsoft.com/office/drawing/2014/main" id="{0C94E6DA-1298-4E3B-A61F-37D4675D78B7}"/>
-              </a:ext>
-            </a:extLst>
-          </p:cNvPr>
-          <p:cNvSpPr>
-            <a:spLocks xmlns:a="http://schemas.openxmlformats.org/drawingml/2006/main" noGrp="1"/>
-          </p:cNvSpPr>
-          <p:nvPr/>
-        </p:nvSpPr>
-        <p:spPr>
-          <a:xfrm xmlns:a="http://schemas.openxmlformats.org/drawingml/2006/main">
+          <p:cNvPr id="2" name="background"/>
+          <p:cNvSpPr/>
+          <p:nvPr/>
+        </p:nvSpPr>
+        <p:spPr>
+          <a:xfrm>
             <a:off x="0" y="0"/>
-            <a:ext cx="12192000" cy="6858000"/>
-          </a:xfrm>
-          <a:prstGeom xmlns:a="http://schemas.openxmlformats.org/drawingml/2006/main" prst="rect">
-            <a:avLst/>
-          </a:prstGeom>
-          <a:solidFill xmlns:a="http://schemas.openxmlformats.org/drawingml/2006/main">
+            <a:ext cx="12191695" cy="6858000"/>
+          </a:xfrm>
+          <a:prstGeom prst="rect">
+            <a:avLst/>
+          </a:prstGeom>
+          <a:solidFill>
             <a:srgbClr val="F4EFE4"/>
           </a:solidFill>
-          <a:ln xmlns:a="http://schemas.openxmlformats.org/drawingml/2006/main" w="0">
-            <a:solidFill>
-              <a:srgbClr val="000000">
-                <a:alpha val="0"/>
-              </a:srgbClr>
-            </a:solidFill>
-            <a:prstDash val="solid"/>
-          </a:ln>
-        </p:spPr>
-      </p:sp>
-      <p:sp>
-        <p:nvSpPr>
-          <p:cNvPr id="2" name="">
-            <a:extLst xmlns:a="http://schemas.openxmlformats.org/drawingml/2006/main">
-              <a:ext uri="{FF2B5EF4-FFF2-40B4-BE49-F238E27FC236}">
-                <a16:creationId xmlns:a16="http://schemas.microsoft.com/office/drawing/2014/main" id="{BB921897-C7F2-454D-8C37-5F44F8629027}"/>
-              </a:ext>
-            </a:extLst>
-          </p:cNvPr>
-          <p:cNvSpPr>
-            <a:spLocks xmlns:a="http://schemas.openxmlformats.org/drawingml/2006/main" noGrp="1"/>
-          </p:cNvSpPr>
-          <p:nvPr/>
-        </p:nvSpPr>
-        <p:spPr>
-          <a:xfrm xmlns:a="http://schemas.openxmlformats.org/drawingml/2006/main">
-            <a:off x="438150" y="400050"/>
-            <a:ext cx="11315700" cy="13335"/>
-          </a:xfrm>
-          <a:prstGeom xmlns:a="http://schemas.openxmlformats.org/drawingml/2006/main" prst="rect">
-            <a:avLst/>
-          </a:prstGeom>
-          <a:solidFill xmlns:a="http://schemas.openxmlformats.org/drawingml/2006/main">
-            <a:srgbClr val="153A33"/>
-          </a:solidFill>
-          <a:ln xmlns:a="http://schemas.openxmlformats.org/drawingml/2006/main" w="0">
-            <a:solidFill>
-              <a:srgbClr val="000000">
-                <a:alpha val="0"/>
-              </a:srgbClr>
-            </a:solidFill>
-            <a:prstDash val="solid"/>
-          </a:ln>
-        </p:spPr>
-      </p:sp>
-      <p:sp>
-        <p:nvSpPr>
-          <p:cNvPr id="3" name="">
-            <a:extLst xmlns:a="http://schemas.openxmlformats.org/drawingml/2006/main">
-              <a:ext uri="{FF2B5EF4-FFF2-40B4-BE49-F238E27FC236}">
-                <a16:creationId xmlns:a16="http://schemas.microsoft.com/office/drawing/2014/main" id="{0DDF469D-7613-4F98-8DCC-D8BFF86F77A2}"/>
-              </a:ext>
-            </a:extLst>
-          </p:cNvPr>
-          <p:cNvSpPr>
-            <a:spLocks xmlns:a="http://schemas.openxmlformats.org/drawingml/2006/main" noGrp="1"/>
-          </p:cNvSpPr>
-          <p:nvPr/>
-        </p:nvSpPr>
-        <p:spPr>
-          <a:xfrm xmlns:a="http://schemas.openxmlformats.org/drawingml/2006/main">
-            <a:off x="438150" y="6248400"/>
-            <a:ext cx="5715000" cy="266700"/>
-          </a:xfrm>
-          <a:prstGeom xmlns:a="http://schemas.openxmlformats.org/drawingml/2006/main" prst="rect">
-            <a:avLst/>
-          </a:prstGeom>
-          <a:solidFill xmlns:a="http://schemas.openxmlformats.org/drawingml/2006/main">
-            <a:srgbClr val="000000">
-              <a:alpha val="0"/>
+          <a:ln w="0">
+            <a:noFill/>
+          </a:ln>
+        </p:spPr>
+      </p:sp>
+      <p:sp>
+        <p:nvSpPr>
+          <p:cNvPr id="3" name="shape"/>
+          <p:cNvSpPr/>
+          <p:nvPr/>
+        </p:nvSpPr>
+        <p:spPr>
+          <a:xfrm>
+            <a:off x="502920" y="347472"/>
+            <a:ext cx="1508760" cy="201168"/>
+          </a:xfrm>
+          <a:prstGeom prst="rect">
+            <a:avLst/>
+          </a:prstGeom>
+          <a:noFill/>
+          <a:ln w="0">
+            <a:noFill/>
+          </a:ln>
+        </p:spPr>
+        <p:txBody>
+          <a:bodyPr wrap="square" anchor="ctr" lIns="73152" rIns="73152" tIns="45720" bIns="45720"/>
+          <a:lstStyle/>
+          <a:p>
+            <a:pPr algn="l"/>
+            <a:r>
+              <a:rPr lang="pt-BR" sz="1000" b="1">
+                <a:solidFill>
+                  <a:srgbClr val="B9572E"/>
+                </a:solidFill>
+                <a:latin typeface="Aptos"/>
+              </a:rPr>
+              <a:t>07 | GANTT DO MVP</a:t>
+            </a:r>
+            <a:endParaRPr lang="pt-BR" sz="1000"/>
+          </a:p>
+        </p:txBody>
+      </p:sp>
+      <p:sp>
+        <p:nvSpPr>
+          <p:cNvPr id="4" name="shape"/>
+          <p:cNvSpPr/>
+          <p:nvPr/>
+        </p:nvSpPr>
+        <p:spPr>
+          <a:xfrm>
+            <a:off x="502920" y="658368"/>
+            <a:ext cx="7223760" cy="566928"/>
+          </a:xfrm>
+          <a:prstGeom prst="rect">
+            <a:avLst/>
+          </a:prstGeom>
+          <a:noFill/>
+          <a:ln w="0">
+            <a:noFill/>
+          </a:ln>
+        </p:spPr>
+        <p:txBody>
+          <a:bodyPr wrap="square" anchor="ctr" lIns="73152" rIns="73152" tIns="45720" bIns="45720"/>
+          <a:lstStyle/>
+          <a:p>
+            <a:pPr algn="l"/>
+            <a:r>
+              <a:rPr lang="pt-BR" sz="2500" b="1">
+                <a:solidFill>
+                  <a:srgbClr val="10231F"/>
+                </a:solidFill>
+                <a:latin typeface="Aptos"/>
+              </a:rPr>
+              <a:t>O cronograma mostra as etapas e os meses percorridos ate a entrega.</a:t>
+            </a:r>
+            <a:endParaRPr lang="pt-BR" sz="2500"/>
+          </a:p>
+        </p:txBody>
+      </p:sp>
+      <p:sp>
+        <p:nvSpPr>
+          <p:cNvPr id="5" name="shape"/>
+          <p:cNvSpPr/>
+          <p:nvPr/>
+        </p:nvSpPr>
+        <p:spPr>
+          <a:xfrm>
+            <a:off x="8458200" y="420624"/>
+            <a:ext cx="2788920" cy="566928"/>
+          </a:xfrm>
+          <a:prstGeom prst="roundRect">
+            <a:avLst/>
+          </a:prstGeom>
+          <a:solidFill>
+            <a:srgbClr val="10231F"/>
+          </a:solidFill>
+          <a:ln w="0">
+            <a:noFill/>
+          </a:ln>
+        </p:spPr>
+        <p:txBody>
+          <a:bodyPr wrap="square" anchor="ctr" lIns="73152" rIns="73152" tIns="45720" bIns="45720"/>
+          <a:lstStyle/>
+          <a:p>
+            <a:pPr algn="ctr"/>
+            <a:r>
+              <a:rPr lang="pt-BR" sz="1200" b="1">
+                <a:solidFill>
+                  <a:srgbClr val="F4EFE4"/>
+                </a:solidFill>
+                <a:latin typeface="Aptos"/>
+              </a:rPr>
+              <a:t>Periodo executado</a:t>
+            </a:r>
+            <a:endParaRPr lang="pt-BR" sz="1200"/>
+          </a:p>
+          <a:p>
+            <a:pPr algn="ctr"/>
+            <a:r>
+              <a:rPr lang="pt-BR" sz="1200" b="1">
+                <a:solidFill>
+                  <a:srgbClr val="F4EFE4"/>
+                </a:solidFill>
+                <a:latin typeface="Aptos"/>
+              </a:rPr>
+              <a:t>01/05 a 17/06/2026</a:t>
+            </a:r>
+            <a:endParaRPr lang="pt-BR" sz="1200"/>
+          </a:p>
+        </p:txBody>
+      </p:sp>
+      <p:sp>
+        <p:nvSpPr>
+          <p:cNvPr id="6" name="shape"/>
+          <p:cNvSpPr/>
+          <p:nvPr/>
+        </p:nvSpPr>
+        <p:spPr>
+          <a:xfrm>
+            <a:off x="2240280" y="1298448"/>
+            <a:ext cx="5698808" cy="256032"/>
+          </a:xfrm>
+          <a:prstGeom prst="roundRect">
+            <a:avLst/>
+          </a:prstGeom>
+          <a:solidFill>
+            <a:srgbClr val="10231F"/>
+          </a:solidFill>
+          <a:ln w="0">
+            <a:noFill/>
+          </a:ln>
+        </p:spPr>
+        <p:txBody>
+          <a:bodyPr wrap="square" anchor="ctr" lIns="73152" rIns="73152" tIns="45720" bIns="45720"/>
+          <a:lstStyle/>
+          <a:p>
+            <a:pPr algn="ctr"/>
+            <a:r>
+              <a:rPr lang="pt-BR" sz="1100" b="1">
+                <a:solidFill>
+                  <a:srgbClr val="F4EFE4"/>
+                </a:solidFill>
+                <a:latin typeface="Aptos"/>
+              </a:rPr>
+              <a:t>MAIO 2026</a:t>
+            </a:r>
+            <a:endParaRPr lang="pt-BR" sz="1100"/>
+          </a:p>
+        </p:txBody>
+      </p:sp>
+      <p:sp>
+        <p:nvSpPr>
+          <p:cNvPr id="7" name="shape"/>
+          <p:cNvSpPr/>
+          <p:nvPr/>
+        </p:nvSpPr>
+        <p:spPr>
+          <a:xfrm>
+            <a:off x="7939088" y="1298448"/>
+            <a:ext cx="3105912" cy="256032"/>
+          </a:xfrm>
+          <a:prstGeom prst="roundRect">
+            <a:avLst/>
+          </a:prstGeom>
+          <a:solidFill>
+            <a:srgbClr val="B9572E"/>
+          </a:solidFill>
+          <a:ln w="0">
+            <a:noFill/>
+          </a:ln>
+        </p:spPr>
+        <p:txBody>
+          <a:bodyPr wrap="square" anchor="ctr" lIns="73152" rIns="73152" tIns="45720" bIns="45720"/>
+          <a:lstStyle/>
+          <a:p>
+            <a:pPr algn="ctr"/>
+            <a:r>
+              <a:rPr lang="pt-BR" sz="1100" b="1">
+                <a:solidFill>
+                  <a:srgbClr val="FFFFFF"/>
+                </a:solidFill>
+                <a:latin typeface="Aptos"/>
+              </a:rPr>
+              <a:t>JUNHO 2026</a:t>
+            </a:r>
+            <a:endParaRPr lang="pt-BR" sz="1100"/>
+          </a:p>
+        </p:txBody>
+      </p:sp>
+      <p:sp>
+        <p:nvSpPr>
+          <p:cNvPr id="8" name="shape"/>
+          <p:cNvSpPr/>
+          <p:nvPr/>
+        </p:nvSpPr>
+        <p:spPr>
+          <a:xfrm>
+            <a:off x="2240280" y="1627632"/>
+            <a:ext cx="9144" cy="4224528"/>
+          </a:xfrm>
+          <a:prstGeom prst="rect">
+            <a:avLst/>
+          </a:prstGeom>
+          <a:solidFill>
+            <a:srgbClr val="10231F">
+              <a:alpha val="18000"/>
             </a:srgbClr>
           </a:solidFill>
-          <a:ln xmlns:a="http://schemas.openxmlformats.org/drawingml/2006/main" w="0">
-            <a:solidFill>
-              <a:srgbClr val="000000">
-                <a:alpha val="0"/>
-              </a:srgbClr>
-            </a:solidFill>
-            <a:prstDash val="solid"/>
-          </a:ln>
-        </p:spPr>
-        <p:txBody>
-          <a:bodyPr xmlns:a="http://schemas.openxmlformats.org/drawingml/2006/main" lIns="0" tIns="0" rIns="0" bIns="0" anchor="t"/>
-          <a:lstStyle xmlns:a="http://schemas.openxmlformats.org/drawingml/2006/main"/>
-          <a:p xmlns:a="http://schemas.openxmlformats.org/drawingml/2006/main">
-            <a:pPr algn="l">
-              <a:defRPr sz="900" b="0">
-                <a:solidFill>
-                  <a:srgbClr val="6F7D75"/>
-                </a:solidFill>
-                <a:latin typeface="Aptos"/>
-                <a:ea typeface="Aptos"/>
-                <a:cs typeface="Aptos"/>
-              </a:defRPr>
-            </a:pPr>
-            <a:r>
-              <a:rPr sz="900" b="0">
-                <a:solidFill>
-                  <a:srgbClr val="6F7D75"/>
-                </a:solidFill>
-                <a:latin typeface="Aptos"/>
-                <a:ea typeface="Aptos"/>
-                <a:cs typeface="Aptos"/>
-              </a:rPr>
-              <a:t>FlowMetrics MVP | Gerencia e Arquitetura de Software</a:t>
-            </a:r>
-          </a:p>
-        </p:txBody>
-      </p:sp>
-      <p:sp>
-        <p:nvSpPr>
-          <p:cNvPr id="4" name="">
-            <a:extLst xmlns:a="http://schemas.openxmlformats.org/drawingml/2006/main">
-              <a:ext uri="{FF2B5EF4-FFF2-40B4-BE49-F238E27FC236}">
-                <a16:creationId xmlns:a16="http://schemas.microsoft.com/office/drawing/2014/main" id="{F1248F41-A5AC-4900-ABCC-128126C1990E}"/>
-              </a:ext>
-            </a:extLst>
-          </p:cNvPr>
-          <p:cNvSpPr>
-            <a:spLocks xmlns:a="http://schemas.openxmlformats.org/drawingml/2006/main" noGrp="1"/>
-          </p:cNvSpPr>
-          <p:nvPr/>
-        </p:nvSpPr>
-        <p:spPr>
-          <a:xfrm xmlns:a="http://schemas.openxmlformats.org/drawingml/2006/main">
-            <a:off x="11029950" y="6248400"/>
-            <a:ext cx="685800" cy="266700"/>
-          </a:xfrm>
-          <a:prstGeom xmlns:a="http://schemas.openxmlformats.org/drawingml/2006/main" prst="rect">
-            <a:avLst/>
-          </a:prstGeom>
-          <a:solidFill xmlns:a="http://schemas.openxmlformats.org/drawingml/2006/main">
-            <a:srgbClr val="000000">
-              <a:alpha val="0"/>
+          <a:ln w="0">
+            <a:noFill/>
+          </a:ln>
+        </p:spPr>
+      </p:sp>
+      <p:sp>
+        <p:nvSpPr>
+          <p:cNvPr id="9" name="shape"/>
+          <p:cNvSpPr/>
+          <p:nvPr/>
+        </p:nvSpPr>
+        <p:spPr>
+          <a:xfrm>
+            <a:off x="2011680" y="5888736"/>
+            <a:ext cx="457200" cy="219456"/>
+          </a:xfrm>
+          <a:prstGeom prst="rect">
+            <a:avLst/>
+          </a:prstGeom>
+          <a:noFill/>
+          <a:ln w="0">
+            <a:noFill/>
+          </a:ln>
+        </p:spPr>
+        <p:txBody>
+          <a:bodyPr wrap="square" anchor="ctr" lIns="73152" rIns="73152" tIns="45720" bIns="45720"/>
+          <a:lstStyle/>
+          <a:p>
+            <a:pPr algn="ctr"/>
+            <a:r>
+              <a:rPr lang="pt-BR" sz="850" b="1">
+                <a:solidFill>
+                  <a:srgbClr val="5B4A3A"/>
+                </a:solidFill>
+                <a:latin typeface="Aptos"/>
+              </a:rPr>
+              <a:t>01/05</a:t>
+            </a:r>
+            <a:endParaRPr lang="pt-BR" sz="850"/>
+          </a:p>
+        </p:txBody>
+      </p:sp>
+      <p:sp>
+        <p:nvSpPr>
+          <p:cNvPr id="10" name="shape"/>
+          <p:cNvSpPr/>
+          <p:nvPr/>
+        </p:nvSpPr>
+        <p:spPr>
+          <a:xfrm>
+            <a:off x="3527108" y="1627632"/>
+            <a:ext cx="9144" cy="4224528"/>
+          </a:xfrm>
+          <a:prstGeom prst="rect">
+            <a:avLst/>
+          </a:prstGeom>
+          <a:solidFill>
+            <a:srgbClr val="10231F">
+              <a:alpha val="18000"/>
             </a:srgbClr>
           </a:solidFill>
-          <a:ln xmlns:a="http://schemas.openxmlformats.org/drawingml/2006/main" w="0">
-            <a:solidFill>
-              <a:srgbClr val="000000">
-                <a:alpha val="0"/>
-              </a:srgbClr>
-            </a:solidFill>
-            <a:prstDash val="solid"/>
-          </a:ln>
-        </p:spPr>
-        <p:txBody>
-          <a:bodyPr xmlns:a="http://schemas.openxmlformats.org/drawingml/2006/main" lIns="0" tIns="0" rIns="0" bIns="0" anchor="t"/>
-          <a:lstStyle xmlns:a="http://schemas.openxmlformats.org/drawingml/2006/main"/>
-          <a:p xmlns:a="http://schemas.openxmlformats.org/drawingml/2006/main">
-            <a:pPr algn="r">
-              <a:defRPr sz="900" b="1">
-                <a:solidFill>
-                  <a:srgbClr val="153A33"/>
-                </a:solidFill>
-                <a:latin typeface="Aptos"/>
-                <a:ea typeface="Aptos"/>
-                <a:cs typeface="Aptos"/>
-              </a:defRPr>
-            </a:pPr>
-            <a:r>
-              <a:rPr sz="900" b="1">
-                <a:solidFill>
-                  <a:srgbClr val="153A33"/>
-                </a:solidFill>
-                <a:latin typeface="Aptos"/>
-                <a:ea typeface="Aptos"/>
-                <a:cs typeface="Aptos"/>
-              </a:rPr>
-              <a:t>07</a:t>
-            </a:r>
-          </a:p>
-        </p:txBody>
-      </p:sp>
-      <p:sp>
-        <p:nvSpPr>
-          <p:cNvPr id="5" name="kicker-7-marker">
-            <a:extLst xmlns:a="http://schemas.openxmlformats.org/drawingml/2006/main">
-              <a:ext uri="{FF2B5EF4-FFF2-40B4-BE49-F238E27FC236}">
-                <a16:creationId xmlns:a16="http://schemas.microsoft.com/office/drawing/2014/main" id="{B7929429-76D7-4D53-AB0B-351E23FCF793}"/>
-              </a:ext>
-            </a:extLst>
-          </p:cNvPr>
-          <p:cNvSpPr>
-            <a:spLocks xmlns:a="http://schemas.openxmlformats.org/drawingml/2006/main" noGrp="1"/>
-          </p:cNvSpPr>
-          <p:nvPr/>
-        </p:nvSpPr>
-        <p:spPr>
-          <a:xfrm xmlns:a="http://schemas.openxmlformats.org/drawingml/2006/main">
-            <a:off x="552450" y="728663"/>
-            <a:ext cx="266700" cy="47625"/>
-          </a:xfrm>
-          <a:prstGeom xmlns:a="http://schemas.openxmlformats.org/drawingml/2006/main" prst="rect">
-            <a:avLst/>
-          </a:prstGeom>
-          <a:solidFill xmlns:a="http://schemas.openxmlformats.org/drawingml/2006/main">
-            <a:srgbClr val="D96045"/>
-          </a:solidFill>
-          <a:ln xmlns:a="http://schemas.openxmlformats.org/drawingml/2006/main" w="0">
-            <a:solidFill>
-              <a:srgbClr val="000000">
-                <a:alpha val="0"/>
-              </a:srgbClr>
-            </a:solidFill>
-            <a:prstDash val="solid"/>
-          </a:ln>
-        </p:spPr>
-      </p:sp>
-      <p:sp>
-        <p:nvSpPr>
-          <p:cNvPr id="6" name="kicker-7-label">
-            <a:extLst xmlns:a="http://schemas.openxmlformats.org/drawingml/2006/main">
-              <a:ext uri="{FF2B5EF4-FFF2-40B4-BE49-F238E27FC236}">
-                <a16:creationId xmlns:a16="http://schemas.microsoft.com/office/drawing/2014/main" id="{2ED5409B-D2C2-44C6-912C-1FDB238C837F}"/>
-              </a:ext>
-            </a:extLst>
-          </p:cNvPr>
-          <p:cNvSpPr>
-            <a:spLocks xmlns:a="http://schemas.openxmlformats.org/drawingml/2006/main" noGrp="1"/>
-          </p:cNvSpPr>
-          <p:nvPr/>
-        </p:nvSpPr>
-        <p:spPr>
-          <a:xfrm xmlns:a="http://schemas.openxmlformats.org/drawingml/2006/main">
-            <a:off x="952500" y="647700"/>
-            <a:ext cx="4762500" cy="209550"/>
-          </a:xfrm>
-          <a:prstGeom xmlns:a="http://schemas.openxmlformats.org/drawingml/2006/main" prst="rect">
-            <a:avLst/>
-          </a:prstGeom>
-          <a:solidFill xmlns:a="http://schemas.openxmlformats.org/drawingml/2006/main">
-            <a:srgbClr val="000000">
-              <a:alpha val="0"/>
+          <a:ln w="0">
+            <a:noFill/>
+          </a:ln>
+        </p:spPr>
+      </p:sp>
+      <p:sp>
+        <p:nvSpPr>
+          <p:cNvPr id="11" name="shape"/>
+          <p:cNvSpPr/>
+          <p:nvPr/>
+        </p:nvSpPr>
+        <p:spPr>
+          <a:xfrm>
+            <a:off x="3298508" y="5888736"/>
+            <a:ext cx="457200" cy="219456"/>
+          </a:xfrm>
+          <a:prstGeom prst="rect">
+            <a:avLst/>
+          </a:prstGeom>
+          <a:noFill/>
+          <a:ln w="0">
+            <a:noFill/>
+          </a:ln>
+        </p:spPr>
+        <p:txBody>
+          <a:bodyPr wrap="square" anchor="ctr" lIns="73152" rIns="73152" tIns="45720" bIns="45720"/>
+          <a:lstStyle/>
+          <a:p>
+            <a:pPr algn="ctr"/>
+            <a:r>
+              <a:rPr lang="pt-BR" sz="850" b="1">
+                <a:solidFill>
+                  <a:srgbClr val="5B4A3A"/>
+                </a:solidFill>
+                <a:latin typeface="Aptos"/>
+              </a:rPr>
+              <a:t>08/05</a:t>
+            </a:r>
+            <a:endParaRPr lang="pt-BR" sz="850"/>
+          </a:p>
+        </p:txBody>
+      </p:sp>
+      <p:sp>
+        <p:nvSpPr>
+          <p:cNvPr id="12" name="shape"/>
+          <p:cNvSpPr/>
+          <p:nvPr/>
+        </p:nvSpPr>
+        <p:spPr>
+          <a:xfrm>
+            <a:off x="4813935" y="1627632"/>
+            <a:ext cx="9144" cy="4224528"/>
+          </a:xfrm>
+          <a:prstGeom prst="rect">
+            <a:avLst/>
+          </a:prstGeom>
+          <a:solidFill>
+            <a:srgbClr val="10231F">
+              <a:alpha val="18000"/>
             </a:srgbClr>
           </a:solidFill>
-          <a:ln xmlns:a="http://schemas.openxmlformats.org/drawingml/2006/main" w="0">
-            <a:solidFill>
-              <a:srgbClr val="000000">
-                <a:alpha val="0"/>
-              </a:srgbClr>
-            </a:solidFill>
-            <a:prstDash val="solid"/>
-          </a:ln>
-        </p:spPr>
-        <p:txBody>
-          <a:bodyPr xmlns:a="http://schemas.openxmlformats.org/drawingml/2006/main" lIns="0" tIns="0" rIns="0" bIns="0" anchor="t"/>
-          <a:lstStyle xmlns:a="http://schemas.openxmlformats.org/drawingml/2006/main"/>
-          <a:p xmlns:a="http://schemas.openxmlformats.org/drawingml/2006/main">
-            <a:pPr algn="l">
-              <a:defRPr sz="900" b="1">
-                <a:solidFill>
-                  <a:srgbClr val="153A33"/>
-                </a:solidFill>
-                <a:latin typeface="Aptos"/>
-                <a:ea typeface="Aptos"/>
-                <a:cs typeface="Aptos"/>
-              </a:defRPr>
-            </a:pPr>
-            <a:r>
-              <a:rPr sz="900" b="1">
-                <a:solidFill>
-                  <a:srgbClr val="153A33"/>
-                </a:solidFill>
-                <a:latin typeface="Aptos"/>
-                <a:ea typeface="Aptos"/>
-                <a:cs typeface="Aptos"/>
-              </a:rPr>
-              <a:t>GANTT</a:t>
-            </a:r>
-          </a:p>
-        </p:txBody>
-      </p:sp>
-      <p:sp>
-        <p:nvSpPr>
-          <p:cNvPr id="7" name="">
-            <a:extLst xmlns:a="http://schemas.openxmlformats.org/drawingml/2006/main">
-              <a:ext uri="{FF2B5EF4-FFF2-40B4-BE49-F238E27FC236}">
-                <a16:creationId xmlns:a16="http://schemas.microsoft.com/office/drawing/2014/main" id="{E5ABA521-54C1-482F-A889-8FB00BEF8E82}"/>
-              </a:ext>
-            </a:extLst>
-          </p:cNvPr>
-          <p:cNvSpPr>
-            <a:spLocks xmlns:a="http://schemas.openxmlformats.org/drawingml/2006/main" noGrp="1"/>
-          </p:cNvSpPr>
-          <p:nvPr/>
-        </p:nvSpPr>
-        <p:spPr>
-          <a:xfrm xmlns:a="http://schemas.openxmlformats.org/drawingml/2006/main">
-            <a:off x="533400" y="1028700"/>
-            <a:ext cx="7239000" cy="1066800"/>
-          </a:xfrm>
-          <a:prstGeom xmlns:a="http://schemas.openxmlformats.org/drawingml/2006/main" prst="rect">
-            <a:avLst/>
-          </a:prstGeom>
-          <a:solidFill xmlns:a="http://schemas.openxmlformats.org/drawingml/2006/main">
-            <a:srgbClr val="000000">
-              <a:alpha val="0"/>
+          <a:ln w="0">
+            <a:noFill/>
+          </a:ln>
+        </p:spPr>
+      </p:sp>
+      <p:sp>
+        <p:nvSpPr>
+          <p:cNvPr id="13" name="shape"/>
+          <p:cNvSpPr/>
+          <p:nvPr/>
+        </p:nvSpPr>
+        <p:spPr>
+          <a:xfrm>
+            <a:off x="4585335" y="5888736"/>
+            <a:ext cx="457200" cy="219456"/>
+          </a:xfrm>
+          <a:prstGeom prst="rect">
+            <a:avLst/>
+          </a:prstGeom>
+          <a:noFill/>
+          <a:ln w="0">
+            <a:noFill/>
+          </a:ln>
+        </p:spPr>
+        <p:txBody>
+          <a:bodyPr wrap="square" anchor="ctr" lIns="73152" rIns="73152" tIns="45720" bIns="45720"/>
+          <a:lstStyle/>
+          <a:p>
+            <a:pPr algn="ctr"/>
+            <a:r>
+              <a:rPr lang="pt-BR" sz="850" b="1">
+                <a:solidFill>
+                  <a:srgbClr val="5B4A3A"/>
+                </a:solidFill>
+                <a:latin typeface="Aptos"/>
+              </a:rPr>
+              <a:t>15/05</a:t>
+            </a:r>
+            <a:endParaRPr lang="pt-BR" sz="850"/>
+          </a:p>
+        </p:txBody>
+      </p:sp>
+      <p:sp>
+        <p:nvSpPr>
+          <p:cNvPr id="14" name="shape"/>
+          <p:cNvSpPr/>
+          <p:nvPr/>
+        </p:nvSpPr>
+        <p:spPr>
+          <a:xfrm>
+            <a:off x="6100762" y="1627632"/>
+            <a:ext cx="9144" cy="4224528"/>
+          </a:xfrm>
+          <a:prstGeom prst="rect">
+            <a:avLst/>
+          </a:prstGeom>
+          <a:solidFill>
+            <a:srgbClr val="10231F">
+              <a:alpha val="18000"/>
             </a:srgbClr>
           </a:solidFill>
-          <a:ln xmlns:a="http://schemas.openxmlformats.org/drawingml/2006/main" w="0">
-            <a:solidFill>
-              <a:srgbClr val="000000">
-                <a:alpha val="0"/>
-              </a:srgbClr>
-            </a:solidFill>
-            <a:prstDash val="solid"/>
-          </a:ln>
-        </p:spPr>
-        <p:txBody>
-          <a:bodyPr xmlns:a="http://schemas.openxmlformats.org/drawingml/2006/main" lIns="0" tIns="0" rIns="0" bIns="0" anchor="t"/>
-          <a:lstStyle xmlns:a="http://schemas.openxmlformats.org/drawingml/2006/main"/>
-          <a:p xmlns:a="http://schemas.openxmlformats.org/drawingml/2006/main">
-            <a:pPr algn="l">
-              <a:defRPr sz="3150" b="1">
+          <a:ln w="0">
+            <a:noFill/>
+          </a:ln>
+        </p:spPr>
+      </p:sp>
+      <p:sp>
+        <p:nvSpPr>
+          <p:cNvPr id="15" name="shape"/>
+          <p:cNvSpPr/>
+          <p:nvPr/>
+        </p:nvSpPr>
+        <p:spPr>
+          <a:xfrm>
+            <a:off x="5872162" y="5888736"/>
+            <a:ext cx="457200" cy="219456"/>
+          </a:xfrm>
+          <a:prstGeom prst="rect">
+            <a:avLst/>
+          </a:prstGeom>
+          <a:noFill/>
+          <a:ln w="0">
+            <a:noFill/>
+          </a:ln>
+        </p:spPr>
+        <p:txBody>
+          <a:bodyPr wrap="square" anchor="ctr" lIns="73152" rIns="73152" tIns="45720" bIns="45720"/>
+          <a:lstStyle/>
+          <a:p>
+            <a:pPr algn="ctr"/>
+            <a:r>
+              <a:rPr lang="pt-BR" sz="850" b="1">
+                <a:solidFill>
+                  <a:srgbClr val="5B4A3A"/>
+                </a:solidFill>
+                <a:latin typeface="Aptos"/>
+              </a:rPr>
+              <a:t>22/05</a:t>
+            </a:r>
+            <a:endParaRPr lang="pt-BR" sz="850"/>
+          </a:p>
+        </p:txBody>
+      </p:sp>
+      <p:sp>
+        <p:nvSpPr>
+          <p:cNvPr id="16" name="shape"/>
+          <p:cNvSpPr/>
+          <p:nvPr/>
+        </p:nvSpPr>
+        <p:spPr>
+          <a:xfrm>
+            <a:off x="7387590" y="1627632"/>
+            <a:ext cx="9144" cy="4224528"/>
+          </a:xfrm>
+          <a:prstGeom prst="rect">
+            <a:avLst/>
+          </a:prstGeom>
+          <a:solidFill>
+            <a:srgbClr val="10231F">
+              <a:alpha val="18000"/>
+            </a:srgbClr>
+          </a:solidFill>
+          <a:ln w="0">
+            <a:noFill/>
+          </a:ln>
+        </p:spPr>
+      </p:sp>
+      <p:sp>
+        <p:nvSpPr>
+          <p:cNvPr id="17" name="shape"/>
+          <p:cNvSpPr/>
+          <p:nvPr/>
+        </p:nvSpPr>
+        <p:spPr>
+          <a:xfrm>
+            <a:off x="7158990" y="5888736"/>
+            <a:ext cx="457200" cy="219456"/>
+          </a:xfrm>
+          <a:prstGeom prst="rect">
+            <a:avLst/>
+          </a:prstGeom>
+          <a:noFill/>
+          <a:ln w="0">
+            <a:noFill/>
+          </a:ln>
+        </p:spPr>
+        <p:txBody>
+          <a:bodyPr wrap="square" anchor="ctr" lIns="73152" rIns="73152" tIns="45720" bIns="45720"/>
+          <a:lstStyle/>
+          <a:p>
+            <a:pPr algn="ctr"/>
+            <a:r>
+              <a:rPr lang="pt-BR" sz="850" b="1">
+                <a:solidFill>
+                  <a:srgbClr val="5B4A3A"/>
+                </a:solidFill>
+                <a:latin typeface="Aptos"/>
+              </a:rPr>
+              <a:t>29/05</a:t>
+            </a:r>
+            <a:endParaRPr lang="pt-BR" sz="850"/>
+          </a:p>
+        </p:txBody>
+      </p:sp>
+      <p:sp>
+        <p:nvSpPr>
+          <p:cNvPr id="18" name="shape"/>
+          <p:cNvSpPr/>
+          <p:nvPr/>
+        </p:nvSpPr>
+        <p:spPr>
+          <a:xfrm>
+            <a:off x="8674418" y="1627632"/>
+            <a:ext cx="9144" cy="4224528"/>
+          </a:xfrm>
+          <a:prstGeom prst="rect">
+            <a:avLst/>
+          </a:prstGeom>
+          <a:solidFill>
+            <a:srgbClr val="10231F">
+              <a:alpha val="18000"/>
+            </a:srgbClr>
+          </a:solidFill>
+          <a:ln w="0">
+            <a:noFill/>
+          </a:ln>
+        </p:spPr>
+      </p:sp>
+      <p:sp>
+        <p:nvSpPr>
+          <p:cNvPr id="19" name="shape"/>
+          <p:cNvSpPr/>
+          <p:nvPr/>
+        </p:nvSpPr>
+        <p:spPr>
+          <a:xfrm>
+            <a:off x="8445818" y="5888736"/>
+            <a:ext cx="457200" cy="219456"/>
+          </a:xfrm>
+          <a:prstGeom prst="rect">
+            <a:avLst/>
+          </a:prstGeom>
+          <a:noFill/>
+          <a:ln w="0">
+            <a:noFill/>
+          </a:ln>
+        </p:spPr>
+        <p:txBody>
+          <a:bodyPr wrap="square" anchor="ctr" lIns="73152" rIns="73152" tIns="45720" bIns="45720"/>
+          <a:lstStyle/>
+          <a:p>
+            <a:pPr algn="ctr"/>
+            <a:r>
+              <a:rPr lang="pt-BR" sz="850" b="1">
+                <a:solidFill>
+                  <a:srgbClr val="5B4A3A"/>
+                </a:solidFill>
+                <a:latin typeface="Aptos"/>
+              </a:rPr>
+              <a:t>05/06</a:t>
+            </a:r>
+            <a:endParaRPr lang="pt-BR" sz="850"/>
+          </a:p>
+        </p:txBody>
+      </p:sp>
+      <p:sp>
+        <p:nvSpPr>
+          <p:cNvPr id="20" name="shape"/>
+          <p:cNvSpPr/>
+          <p:nvPr/>
+        </p:nvSpPr>
+        <p:spPr>
+          <a:xfrm>
+            <a:off x="9961245" y="1627632"/>
+            <a:ext cx="9144" cy="4224528"/>
+          </a:xfrm>
+          <a:prstGeom prst="rect">
+            <a:avLst/>
+          </a:prstGeom>
+          <a:solidFill>
+            <a:srgbClr val="10231F">
+              <a:alpha val="18000"/>
+            </a:srgbClr>
+          </a:solidFill>
+          <a:ln w="0">
+            <a:noFill/>
+          </a:ln>
+        </p:spPr>
+      </p:sp>
+      <p:sp>
+        <p:nvSpPr>
+          <p:cNvPr id="21" name="shape"/>
+          <p:cNvSpPr/>
+          <p:nvPr/>
+        </p:nvSpPr>
+        <p:spPr>
+          <a:xfrm>
+            <a:off x="9732645" y="5888736"/>
+            <a:ext cx="457200" cy="219456"/>
+          </a:xfrm>
+          <a:prstGeom prst="rect">
+            <a:avLst/>
+          </a:prstGeom>
+          <a:noFill/>
+          <a:ln w="0">
+            <a:noFill/>
+          </a:ln>
+        </p:spPr>
+        <p:txBody>
+          <a:bodyPr wrap="square" anchor="ctr" lIns="73152" rIns="73152" tIns="45720" bIns="45720"/>
+          <a:lstStyle/>
+          <a:p>
+            <a:pPr algn="ctr"/>
+            <a:r>
+              <a:rPr lang="pt-BR" sz="850" b="1">
+                <a:solidFill>
+                  <a:srgbClr val="5B4A3A"/>
+                </a:solidFill>
+                <a:latin typeface="Aptos"/>
+              </a:rPr>
+              <a:t>12/06</a:t>
+            </a:r>
+            <a:endParaRPr lang="pt-BR" sz="850"/>
+          </a:p>
+        </p:txBody>
+      </p:sp>
+      <p:sp>
+        <p:nvSpPr>
+          <p:cNvPr id="22" name="shape"/>
+          <p:cNvSpPr/>
+          <p:nvPr/>
+        </p:nvSpPr>
+        <p:spPr>
+          <a:xfrm>
+            <a:off x="10880408" y="1627632"/>
+            <a:ext cx="9144" cy="4224528"/>
+          </a:xfrm>
+          <a:prstGeom prst="rect">
+            <a:avLst/>
+          </a:prstGeom>
+          <a:solidFill>
+            <a:srgbClr val="10231F">
+              <a:alpha val="18000"/>
+            </a:srgbClr>
+          </a:solidFill>
+          <a:ln w="0">
+            <a:noFill/>
+          </a:ln>
+        </p:spPr>
+      </p:sp>
+      <p:sp>
+        <p:nvSpPr>
+          <p:cNvPr id="23" name="shape"/>
+          <p:cNvSpPr/>
+          <p:nvPr/>
+        </p:nvSpPr>
+        <p:spPr>
+          <a:xfrm>
+            <a:off x="10651808" y="5888736"/>
+            <a:ext cx="457200" cy="219456"/>
+          </a:xfrm>
+          <a:prstGeom prst="rect">
+            <a:avLst/>
+          </a:prstGeom>
+          <a:noFill/>
+          <a:ln w="0">
+            <a:noFill/>
+          </a:ln>
+        </p:spPr>
+        <p:txBody>
+          <a:bodyPr wrap="square" anchor="ctr" lIns="73152" rIns="73152" tIns="45720" bIns="45720"/>
+          <a:lstStyle/>
+          <a:p>
+            <a:pPr algn="ctr"/>
+            <a:r>
+              <a:rPr lang="pt-BR" sz="850" b="1">
+                <a:solidFill>
+                  <a:srgbClr val="5B4A3A"/>
+                </a:solidFill>
+                <a:latin typeface="Aptos"/>
+              </a:rPr>
+              <a:t>17/06</a:t>
+            </a:r>
+            <a:endParaRPr lang="pt-BR" sz="850"/>
+          </a:p>
+        </p:txBody>
+      </p:sp>
+      <p:sp>
+        <p:nvSpPr>
+          <p:cNvPr id="24" name="shape"/>
+          <p:cNvSpPr/>
+          <p:nvPr/>
+        </p:nvSpPr>
+        <p:spPr>
+          <a:xfrm>
+            <a:off x="621792" y="1993392"/>
+            <a:ext cx="1371600" cy="384048"/>
+          </a:xfrm>
+          <a:prstGeom prst="rect">
+            <a:avLst/>
+          </a:prstGeom>
+          <a:noFill/>
+          <a:ln w="0">
+            <a:noFill/>
+          </a:ln>
+        </p:spPr>
+        <p:txBody>
+          <a:bodyPr wrap="square" anchor="ctr" lIns="73152" rIns="73152" tIns="45720" bIns="45720"/>
+          <a:lstStyle/>
+          <a:p>
+            <a:pPr algn="r"/>
+            <a:r>
+              <a:rPr lang="pt-BR" sz="1200" b="1">
                 <a:solidFill>
                   <a:srgbClr val="10231F"/>
                 </a:solidFill>
-                <a:latin typeface="Aptos Display"/>
-                <a:ea typeface="Aptos Display"/>
-                <a:cs typeface="Aptos Display"/>
-              </a:defRPr>
-            </a:pPr>
-            <a:r>
-              <a:rPr sz="3150" b="1">
+                <a:latin typeface="Aptos"/>
+              </a:rPr>
+              <a:t>Planejamento</a:t>
+            </a:r>
+            <a:endParaRPr lang="pt-BR" sz="1200"/>
+          </a:p>
+        </p:txBody>
+      </p:sp>
+      <p:sp>
+        <p:nvSpPr>
+          <p:cNvPr id="25" name="shape"/>
+          <p:cNvSpPr/>
+          <p:nvPr/>
+        </p:nvSpPr>
+        <p:spPr>
+          <a:xfrm>
+            <a:off x="2240280" y="1993392"/>
+            <a:ext cx="1470660" cy="384048"/>
+          </a:xfrm>
+          <a:prstGeom prst="roundRect">
+            <a:avLst/>
+          </a:prstGeom>
+          <a:solidFill>
+            <a:srgbClr val="3867FF"/>
+          </a:solidFill>
+          <a:ln w="0">
+            <a:noFill/>
+          </a:ln>
+        </p:spPr>
+        <p:txBody>
+          <a:bodyPr wrap="square" anchor="ctr" lIns="73152" rIns="73152" tIns="45720" bIns="45720"/>
+          <a:lstStyle/>
+          <a:p>
+            <a:pPr algn="ctr"/>
+            <a:r>
+              <a:rPr lang="pt-BR" sz="1050" b="1">
+                <a:solidFill>
+                  <a:srgbClr val="FFFFFF"/>
+                </a:solidFill>
+                <a:latin typeface="Aptos"/>
+              </a:rPr>
+              <a:t>proposta, escopo e backlog</a:t>
+            </a:r>
+            <a:endParaRPr lang="pt-BR" sz="1050"/>
+          </a:p>
+        </p:txBody>
+      </p:sp>
+      <p:sp>
+        <p:nvSpPr>
+          <p:cNvPr id="26" name="shape"/>
+          <p:cNvSpPr/>
+          <p:nvPr/>
+        </p:nvSpPr>
+        <p:spPr>
+          <a:xfrm>
+            <a:off x="621792" y="2651760"/>
+            <a:ext cx="1371600" cy="384048"/>
+          </a:xfrm>
+          <a:prstGeom prst="rect">
+            <a:avLst/>
+          </a:prstGeom>
+          <a:noFill/>
+          <a:ln w="0">
+            <a:noFill/>
+          </a:ln>
+        </p:spPr>
+        <p:txBody>
+          <a:bodyPr wrap="square" anchor="ctr" lIns="73152" rIns="73152" tIns="45720" bIns="45720"/>
+          <a:lstStyle/>
+          <a:p>
+            <a:pPr algn="r"/>
+            <a:r>
+              <a:rPr lang="pt-BR" sz="1200" b="1">
                 <a:solidFill>
                   <a:srgbClr val="10231F"/>
                 </a:solidFill>
-                <a:latin typeface="Aptos Display"/>
-                <a:ea typeface="Aptos Display"/>
-                <a:cs typeface="Aptos Display"/>
-              </a:rPr>
-              <a:t>O cronograma saiu da ideia para uma entrega demonstravel.</a:t>
-            </a:r>
-          </a:p>
-        </p:txBody>
-      </p:sp>
-      <p:sp>
-        <p:nvSpPr>
-          <p:cNvPr id="8" name="">
-            <a:extLst xmlns:a="http://schemas.openxmlformats.org/drawingml/2006/main">
-              <a:ext uri="{FF2B5EF4-FFF2-40B4-BE49-F238E27FC236}">
-                <a16:creationId xmlns:a16="http://schemas.microsoft.com/office/drawing/2014/main" id="{0806E8C1-9AB2-40B4-8716-19C074767A28}"/>
-              </a:ext>
-            </a:extLst>
-          </p:cNvPr>
-          <p:cNvSpPr>
-            <a:spLocks xmlns:a="http://schemas.openxmlformats.org/drawingml/2006/main" noGrp="1"/>
-          </p:cNvSpPr>
-          <p:nvPr/>
-        </p:nvSpPr>
-        <p:spPr>
-          <a:xfrm xmlns:a="http://schemas.openxmlformats.org/drawingml/2006/main">
-            <a:off x="819150" y="3714750"/>
-            <a:ext cx="9810750" cy="28575"/>
-          </a:xfrm>
-          <a:prstGeom xmlns:a="http://schemas.openxmlformats.org/drawingml/2006/main" prst="rect">
-            <a:avLst/>
-          </a:prstGeom>
-          <a:solidFill xmlns:a="http://schemas.openxmlformats.org/drawingml/2006/main">
-            <a:srgbClr val="DED1BA"/>
-          </a:solidFill>
-          <a:ln xmlns:a="http://schemas.openxmlformats.org/drawingml/2006/main" w="0">
-            <a:solidFill>
-              <a:srgbClr val="000000">
-                <a:alpha val="0"/>
-              </a:srgbClr>
-            </a:solidFill>
-            <a:prstDash val="solid"/>
-          </a:ln>
-        </p:spPr>
-      </p:sp>
-      <p:sp>
-        <p:nvSpPr>
-          <p:cNvPr id="9" name="">
-            <a:extLst xmlns:a="http://schemas.openxmlformats.org/drawingml/2006/main">
-              <a:ext uri="{FF2B5EF4-FFF2-40B4-BE49-F238E27FC236}">
-                <a16:creationId xmlns:a16="http://schemas.microsoft.com/office/drawing/2014/main" id="{217073E3-EE5B-4793-9DDF-C7920FA77338}"/>
-              </a:ext>
-            </a:extLst>
-          </p:cNvPr>
-          <p:cNvSpPr>
-            <a:spLocks xmlns:a="http://schemas.openxmlformats.org/drawingml/2006/main" noGrp="1"/>
-          </p:cNvSpPr>
-          <p:nvPr/>
-        </p:nvSpPr>
-        <p:spPr>
-          <a:xfrm xmlns:a="http://schemas.openxmlformats.org/drawingml/2006/main">
-            <a:off x="704850" y="3524250"/>
-            <a:ext cx="1600200" cy="381000"/>
-          </a:xfrm>
-          <a:prstGeom xmlns:a="http://schemas.openxmlformats.org/drawingml/2006/main" prst="rect">
-            <a:avLst/>
-          </a:prstGeom>
-          <a:solidFill xmlns:a="http://schemas.openxmlformats.org/drawingml/2006/main">
-            <a:srgbClr val="344C9A"/>
-          </a:solidFill>
-          <a:ln xmlns:a="http://schemas.openxmlformats.org/drawingml/2006/main" w="0">
-            <a:solidFill>
-              <a:srgbClr val="000000">
-                <a:alpha val="0"/>
-              </a:srgbClr>
-            </a:solidFill>
-            <a:prstDash val="solid"/>
-          </a:ln>
-        </p:spPr>
-      </p:sp>
-      <p:sp>
-        <p:nvSpPr>
-          <p:cNvPr id="10" name="">
-            <a:extLst xmlns:a="http://schemas.openxmlformats.org/drawingml/2006/main">
-              <a:ext uri="{FF2B5EF4-FFF2-40B4-BE49-F238E27FC236}">
-                <a16:creationId xmlns:a16="http://schemas.microsoft.com/office/drawing/2014/main" id="{4C2062FB-75EC-468C-A6EB-294F9CC3F737}"/>
-              </a:ext>
-            </a:extLst>
-          </p:cNvPr>
-          <p:cNvSpPr>
-            <a:spLocks xmlns:a="http://schemas.openxmlformats.org/drawingml/2006/main" noGrp="1"/>
-          </p:cNvSpPr>
-          <p:nvPr/>
-        </p:nvSpPr>
-        <p:spPr>
-          <a:xfrm xmlns:a="http://schemas.openxmlformats.org/drawingml/2006/main">
-            <a:off x="704850" y="4324350"/>
-            <a:ext cx="1600200" cy="838200"/>
-          </a:xfrm>
-          <a:prstGeom xmlns:a="http://schemas.openxmlformats.org/drawingml/2006/main" prst="rect">
-            <a:avLst/>
-          </a:prstGeom>
-          <a:solidFill xmlns:a="http://schemas.openxmlformats.org/drawingml/2006/main">
-            <a:srgbClr val="FFFAF0"/>
-          </a:solidFill>
-          <a:ln xmlns:a="http://schemas.openxmlformats.org/drawingml/2006/main" w="9525">
-            <a:solidFill>
-              <a:srgbClr val="D8CBB7"/>
-            </a:solidFill>
-            <a:prstDash val="solid"/>
-          </a:ln>
-        </p:spPr>
-      </p:sp>
-      <p:sp>
-        <p:nvSpPr>
-          <p:cNvPr id="11" name="">
-            <a:extLst xmlns:a="http://schemas.openxmlformats.org/drawingml/2006/main">
-              <a:ext uri="{FF2B5EF4-FFF2-40B4-BE49-F238E27FC236}">
-                <a16:creationId xmlns:a16="http://schemas.microsoft.com/office/drawing/2014/main" id="{EA145D64-AA86-42C3-8665-7E37AD359A6B}"/>
-              </a:ext>
-            </a:extLst>
-          </p:cNvPr>
-          <p:cNvSpPr>
-            <a:spLocks xmlns:a="http://schemas.openxmlformats.org/drawingml/2006/main" noGrp="1"/>
-          </p:cNvSpPr>
-          <p:nvPr/>
-        </p:nvSpPr>
-        <p:spPr>
-          <a:xfrm xmlns:a="http://schemas.openxmlformats.org/drawingml/2006/main">
-            <a:off x="876300" y="4457700"/>
-            <a:ext cx="1257300" cy="209550"/>
-          </a:xfrm>
-          <a:prstGeom xmlns:a="http://schemas.openxmlformats.org/drawingml/2006/main" prst="rect">
-            <a:avLst/>
-          </a:prstGeom>
-          <a:solidFill xmlns:a="http://schemas.openxmlformats.org/drawingml/2006/main">
-            <a:srgbClr val="000000">
-              <a:alpha val="0"/>
+                <a:latin typeface="Aptos"/>
+              </a:rPr>
+              <a:t>UX + arquitetura</a:t>
+            </a:r>
+            <a:endParaRPr lang="pt-BR" sz="1200"/>
+          </a:p>
+        </p:txBody>
+      </p:sp>
+      <p:sp>
+        <p:nvSpPr>
+          <p:cNvPr id="27" name="shape"/>
+          <p:cNvSpPr/>
+          <p:nvPr/>
+        </p:nvSpPr>
+        <p:spPr>
+          <a:xfrm>
+            <a:off x="3710940" y="2651760"/>
+            <a:ext cx="2389823" cy="384048"/>
+          </a:xfrm>
+          <a:prstGeom prst="roundRect">
+            <a:avLst/>
+          </a:prstGeom>
+          <a:solidFill>
+            <a:srgbClr val="17B8CC"/>
+          </a:solidFill>
+          <a:ln w="0">
+            <a:noFill/>
+          </a:ln>
+        </p:spPr>
+        <p:txBody>
+          <a:bodyPr wrap="square" anchor="ctr" lIns="73152" rIns="73152" tIns="45720" bIns="45720"/>
+          <a:lstStyle/>
+          <a:p>
+            <a:pPr algn="ctr"/>
+            <a:r>
+              <a:rPr lang="pt-BR" sz="1050" b="1">
+                <a:solidFill>
+                  <a:srgbClr val="FFFFFF"/>
+                </a:solidFill>
+                <a:latin typeface="Aptos"/>
+              </a:rPr>
+              <a:t>jornada, C4 e modelo de dados</a:t>
+            </a:r>
+            <a:endParaRPr lang="pt-BR" sz="1050"/>
+          </a:p>
+        </p:txBody>
+      </p:sp>
+      <p:sp>
+        <p:nvSpPr>
+          <p:cNvPr id="28" name="shape"/>
+          <p:cNvSpPr/>
+          <p:nvPr/>
+        </p:nvSpPr>
+        <p:spPr>
+          <a:xfrm>
+            <a:off x="621792" y="3310128"/>
+            <a:ext cx="1371600" cy="384048"/>
+          </a:xfrm>
+          <a:prstGeom prst="rect">
+            <a:avLst/>
+          </a:prstGeom>
+          <a:noFill/>
+          <a:ln w="0">
+            <a:noFill/>
+          </a:ln>
+        </p:spPr>
+        <p:txBody>
+          <a:bodyPr wrap="square" anchor="ctr" lIns="73152" rIns="73152" tIns="45720" bIns="45720"/>
+          <a:lstStyle/>
+          <a:p>
+            <a:pPr algn="r"/>
+            <a:r>
+              <a:rPr lang="pt-BR" sz="1200" b="1">
+                <a:solidFill>
+                  <a:srgbClr val="10231F"/>
+                </a:solidFill>
+                <a:latin typeface="Aptos"/>
+              </a:rPr>
+              <a:t>Desenvolvimento</a:t>
+            </a:r>
+            <a:endParaRPr lang="pt-BR" sz="1200"/>
+          </a:p>
+        </p:txBody>
+      </p:sp>
+      <p:sp>
+        <p:nvSpPr>
+          <p:cNvPr id="29" name="shape"/>
+          <p:cNvSpPr/>
+          <p:nvPr/>
+        </p:nvSpPr>
+        <p:spPr>
+          <a:xfrm>
+            <a:off x="6100762" y="3310128"/>
+            <a:ext cx="3125153" cy="384048"/>
+          </a:xfrm>
+          <a:prstGeom prst="roundRect">
+            <a:avLst/>
+          </a:prstGeom>
+          <a:solidFill>
+            <a:srgbClr val="23C98F"/>
+          </a:solidFill>
+          <a:ln w="0">
+            <a:noFill/>
+          </a:ln>
+        </p:spPr>
+        <p:txBody>
+          <a:bodyPr wrap="square" anchor="ctr" lIns="73152" rIns="73152" tIns="45720" bIns="45720"/>
+          <a:lstStyle/>
+          <a:p>
+            <a:pPr algn="ctr"/>
+            <a:r>
+              <a:rPr lang="pt-BR" sz="1050" b="1">
+                <a:solidFill>
+                  <a:srgbClr val="FFFFFF"/>
+                </a:solidFill>
+                <a:latin typeface="Aptos"/>
+              </a:rPr>
+              <a:t>Kanban, auditoria e metricas</a:t>
+            </a:r>
+            <a:endParaRPr lang="pt-BR" sz="1050"/>
+          </a:p>
+        </p:txBody>
+      </p:sp>
+      <p:sp>
+        <p:nvSpPr>
+          <p:cNvPr id="30" name="shape"/>
+          <p:cNvSpPr/>
+          <p:nvPr/>
+        </p:nvSpPr>
+        <p:spPr>
+          <a:xfrm>
+            <a:off x="621792" y="3968496"/>
+            <a:ext cx="1371600" cy="384048"/>
+          </a:xfrm>
+          <a:prstGeom prst="rect">
+            <a:avLst/>
+          </a:prstGeom>
+          <a:noFill/>
+          <a:ln w="0">
+            <a:noFill/>
+          </a:ln>
+        </p:spPr>
+        <p:txBody>
+          <a:bodyPr wrap="square" anchor="ctr" lIns="73152" rIns="73152" tIns="45720" bIns="45720"/>
+          <a:lstStyle/>
+          <a:p>
+            <a:pPr algn="r"/>
+            <a:r>
+              <a:rPr lang="pt-BR" sz="1200" b="1">
+                <a:solidFill>
+                  <a:srgbClr val="10231F"/>
+                </a:solidFill>
+                <a:latin typeface="Aptos"/>
+              </a:rPr>
+              <a:t>Qualidade</a:t>
+            </a:r>
+            <a:endParaRPr lang="pt-BR" sz="1200"/>
+          </a:p>
+        </p:txBody>
+      </p:sp>
+      <p:sp>
+        <p:nvSpPr>
+          <p:cNvPr id="31" name="shape"/>
+          <p:cNvSpPr/>
+          <p:nvPr/>
+        </p:nvSpPr>
+        <p:spPr>
+          <a:xfrm>
+            <a:off x="9225915" y="3968496"/>
+            <a:ext cx="1102995" cy="384048"/>
+          </a:xfrm>
+          <a:prstGeom prst="roundRect">
+            <a:avLst/>
+          </a:prstGeom>
+          <a:solidFill>
+            <a:srgbClr val="FFC857"/>
+          </a:solidFill>
+          <a:ln w="0">
+            <a:noFill/>
+          </a:ln>
+        </p:spPr>
+        <p:txBody>
+          <a:bodyPr wrap="square" anchor="ctr" lIns="73152" rIns="73152" tIns="45720" bIns="45720"/>
+          <a:lstStyle/>
+          <a:p>
+            <a:pPr algn="ctr"/>
+            <a:r>
+              <a:rPr lang="pt-BR" sz="1050" b="1">
+                <a:solidFill>
+                  <a:srgbClr val="10231F"/>
+                </a:solidFill>
+                <a:latin typeface="Aptos"/>
+              </a:rPr>
+              <a:t>testes, UI e documentacao</a:t>
+            </a:r>
+            <a:endParaRPr lang="pt-BR" sz="1050"/>
+          </a:p>
+        </p:txBody>
+      </p:sp>
+      <p:sp>
+        <p:nvSpPr>
+          <p:cNvPr id="32" name="shape"/>
+          <p:cNvSpPr/>
+          <p:nvPr/>
+        </p:nvSpPr>
+        <p:spPr>
+          <a:xfrm>
+            <a:off x="621792" y="4626864"/>
+            <a:ext cx="1371600" cy="384048"/>
+          </a:xfrm>
+          <a:prstGeom prst="rect">
+            <a:avLst/>
+          </a:prstGeom>
+          <a:noFill/>
+          <a:ln w="0">
+            <a:noFill/>
+          </a:ln>
+        </p:spPr>
+        <p:txBody>
+          <a:bodyPr wrap="square" anchor="ctr" lIns="73152" rIns="73152" tIns="45720" bIns="45720"/>
+          <a:lstStyle/>
+          <a:p>
+            <a:pPr algn="r"/>
+            <a:r>
+              <a:rPr lang="pt-BR" sz="1200" b="1">
+                <a:solidFill>
+                  <a:srgbClr val="10231F"/>
+                </a:solidFill>
+                <a:latin typeface="Aptos"/>
+              </a:rPr>
+              <a:t>Apresentacao</a:t>
+            </a:r>
+            <a:endParaRPr lang="pt-BR" sz="1200"/>
+          </a:p>
+        </p:txBody>
+      </p:sp>
+      <p:sp>
+        <p:nvSpPr>
+          <p:cNvPr id="33" name="shape"/>
+          <p:cNvSpPr/>
+          <p:nvPr/>
+        </p:nvSpPr>
+        <p:spPr>
+          <a:xfrm>
+            <a:off x="10328910" y="4626864"/>
+            <a:ext cx="735330" cy="384048"/>
+          </a:xfrm>
+          <a:prstGeom prst="roundRect">
+            <a:avLst/>
+          </a:prstGeom>
+          <a:solidFill>
+            <a:srgbClr val="FF5A8A"/>
+          </a:solidFill>
+          <a:ln w="0">
+            <a:noFill/>
+          </a:ln>
+        </p:spPr>
+        <p:txBody>
+          <a:bodyPr wrap="square" anchor="ctr" lIns="73152" rIns="73152" tIns="45720" bIns="45720"/>
+          <a:lstStyle/>
+          <a:p>
+            <a:pPr algn="ctr"/>
+            <a:r>
+              <a:rPr lang="pt-BR" sz="1050" b="1">
+                <a:solidFill>
+                  <a:srgbClr val="FFFFFF"/>
+                </a:solidFill>
+                <a:latin typeface="Aptos"/>
+              </a:rPr>
+              <a:t>slides, Git e entrega final</a:t>
+            </a:r>
+            <a:endParaRPr lang="pt-BR" sz="1050"/>
+          </a:p>
+        </p:txBody>
+      </p:sp>
+      <p:sp>
+        <p:nvSpPr>
+          <p:cNvPr id="34" name="shape"/>
+          <p:cNvSpPr/>
+          <p:nvPr/>
+        </p:nvSpPr>
+        <p:spPr>
+          <a:xfrm>
+            <a:off x="10807256" y="5340096"/>
+            <a:ext cx="146304" cy="146304"/>
+          </a:xfrm>
+          <a:prstGeom prst="diamond">
+            <a:avLst/>
+          </a:prstGeom>
+          <a:solidFill>
+            <a:srgbClr val="10231F"/>
+          </a:solidFill>
+          <a:ln w="0">
+            <a:noFill/>
+          </a:ln>
+        </p:spPr>
+      </p:sp>
+      <p:sp>
+        <p:nvSpPr>
+          <p:cNvPr id="35" name="shape"/>
+          <p:cNvSpPr/>
+          <p:nvPr/>
+        </p:nvSpPr>
+        <p:spPr>
+          <a:xfrm>
+            <a:off x="10222039" y="5468112"/>
+            <a:ext cx="1280160" cy="219456"/>
+          </a:xfrm>
+          <a:prstGeom prst="rect">
+            <a:avLst/>
+          </a:prstGeom>
+          <a:noFill/>
+          <a:ln w="0">
+            <a:noFill/>
+          </a:ln>
+        </p:spPr>
+        <p:txBody>
+          <a:bodyPr wrap="square" anchor="ctr" lIns="73152" rIns="73152" tIns="45720" bIns="45720"/>
+          <a:lstStyle/>
+          <a:p>
+            <a:pPr algn="ctr"/>
+            <a:r>
+              <a:rPr lang="pt-BR" sz="900" b="1">
+                <a:solidFill>
+                  <a:srgbClr val="10231F"/>
+                </a:solidFill>
+                <a:latin typeface="Aptos"/>
+              </a:rPr>
+              <a:t>marco de entrega</a:t>
+            </a:r>
+            <a:endParaRPr lang="pt-BR" sz="900"/>
+          </a:p>
+        </p:txBody>
+      </p:sp>
+      <p:sp>
+        <p:nvSpPr>
+          <p:cNvPr id="36" name="shape"/>
+          <p:cNvSpPr/>
+          <p:nvPr/>
+        </p:nvSpPr>
+        <p:spPr>
+          <a:xfrm>
+            <a:off x="658368" y="6291072"/>
+            <a:ext cx="10351008" cy="292608"/>
+          </a:xfrm>
+          <a:prstGeom prst="roundRect">
+            <a:avLst/>
+          </a:prstGeom>
+          <a:solidFill>
+            <a:srgbClr val="FFFFFF">
+              <a:alpha val="76000"/>
             </a:srgbClr>
           </a:solidFill>
-          <a:ln xmlns:a="http://schemas.openxmlformats.org/drawingml/2006/main" w="0">
-            <a:solidFill>
-              <a:srgbClr val="000000">
-                <a:alpha val="0"/>
-              </a:srgbClr>
-            </a:solidFill>
-            <a:prstDash val="solid"/>
-          </a:ln>
-        </p:spPr>
-        <p:txBody>
-          <a:bodyPr xmlns:a="http://schemas.openxmlformats.org/drawingml/2006/main" lIns="0" tIns="0" rIns="0" bIns="0" anchor="t"/>
-          <a:lstStyle xmlns:a="http://schemas.openxmlformats.org/drawingml/2006/main"/>
-          <a:p xmlns:a="http://schemas.openxmlformats.org/drawingml/2006/main">
-            <a:pPr algn="l">
-              <a:defRPr sz="900" b="1">
-                <a:solidFill>
-                  <a:srgbClr val="344C9A"/>
-                </a:solidFill>
-                <a:latin typeface="Aptos"/>
-                <a:ea typeface="Aptos"/>
-                <a:cs typeface="Aptos"/>
-              </a:defRPr>
-            </a:pPr>
-            <a:r>
-              <a:rPr sz="900" b="1">
-                <a:solidFill>
-                  <a:srgbClr val="344C9A"/>
-                </a:solidFill>
-                <a:latin typeface="Aptos"/>
-                <a:ea typeface="Aptos"/>
-                <a:cs typeface="Aptos"/>
-              </a:rPr>
-              <a:t>Fev</a:t>
-            </a:r>
-          </a:p>
-        </p:txBody>
-      </p:sp>
-      <p:sp>
-        <p:nvSpPr>
-          <p:cNvPr id="12" name="">
-            <a:extLst xmlns:a="http://schemas.openxmlformats.org/drawingml/2006/main">
-              <a:ext uri="{FF2B5EF4-FFF2-40B4-BE49-F238E27FC236}">
-                <a16:creationId xmlns:a16="http://schemas.microsoft.com/office/drawing/2014/main" id="{3B541A91-518F-4A89-84A4-3D609AD51DAF}"/>
-              </a:ext>
-            </a:extLst>
-          </p:cNvPr>
-          <p:cNvSpPr>
-            <a:spLocks xmlns:a="http://schemas.openxmlformats.org/drawingml/2006/main" noGrp="1"/>
-          </p:cNvSpPr>
-          <p:nvPr/>
-        </p:nvSpPr>
-        <p:spPr>
-          <a:xfrm xmlns:a="http://schemas.openxmlformats.org/drawingml/2006/main">
-            <a:off x="876300" y="4705350"/>
-            <a:ext cx="1257300" cy="323850"/>
-          </a:xfrm>
-          <a:prstGeom xmlns:a="http://schemas.openxmlformats.org/drawingml/2006/main" prst="rect">
-            <a:avLst/>
-          </a:prstGeom>
-          <a:solidFill xmlns:a="http://schemas.openxmlformats.org/drawingml/2006/main">
-            <a:srgbClr val="000000">
-              <a:alpha val="0"/>
-            </a:srgbClr>
-          </a:solidFill>
-          <a:ln xmlns:a="http://schemas.openxmlformats.org/drawingml/2006/main" w="0">
-            <a:solidFill>
-              <a:srgbClr val="000000">
-                <a:alpha val="0"/>
-              </a:srgbClr>
-            </a:solidFill>
-            <a:prstDash val="solid"/>
-          </a:ln>
-        </p:spPr>
-        <p:txBody>
-          <a:bodyPr xmlns:a="http://schemas.openxmlformats.org/drawingml/2006/main" lIns="0" tIns="0" rIns="0" bIns="0" anchor="t"/>
-          <a:lstStyle xmlns:a="http://schemas.openxmlformats.org/drawingml/2006/main"/>
-          <a:p xmlns:a="http://schemas.openxmlformats.org/drawingml/2006/main">
-            <a:pPr algn="l">
-              <a:defRPr sz="1350" b="1">
-                <a:solidFill>
-                  <a:srgbClr val="10231F"/>
-                </a:solidFill>
-                <a:latin typeface="Aptos Display"/>
-                <a:ea typeface="Aptos Display"/>
-                <a:cs typeface="Aptos Display"/>
-              </a:defRPr>
-            </a:pPr>
-            <a:r>
-              <a:rPr sz="1350" b="1">
-                <a:solidFill>
-                  <a:srgbClr val="10231F"/>
-                </a:solidFill>
-                <a:latin typeface="Aptos Display"/>
-                <a:ea typeface="Aptos Display"/>
-                <a:cs typeface="Aptos Display"/>
-              </a:rPr>
-              <a:t>Planejamento</a:t>
-            </a:r>
-          </a:p>
-        </p:txBody>
-      </p:sp>
-      <p:sp>
-        <p:nvSpPr>
-          <p:cNvPr id="13" name="">
-            <a:extLst xmlns:a="http://schemas.openxmlformats.org/drawingml/2006/main">
-              <a:ext uri="{FF2B5EF4-FFF2-40B4-BE49-F238E27FC236}">
-                <a16:creationId xmlns:a16="http://schemas.microsoft.com/office/drawing/2014/main" id="{777423F9-019B-4FFB-8FA9-84097A97BBC4}"/>
-              </a:ext>
-            </a:extLst>
-          </p:cNvPr>
-          <p:cNvSpPr>
-            <a:spLocks xmlns:a="http://schemas.openxmlformats.org/drawingml/2006/main" noGrp="1"/>
-          </p:cNvSpPr>
-          <p:nvPr/>
-        </p:nvSpPr>
-        <p:spPr>
-          <a:xfrm xmlns:a="http://schemas.openxmlformats.org/drawingml/2006/main">
-            <a:off x="2495550" y="3524250"/>
-            <a:ext cx="2000250" cy="381000"/>
-          </a:xfrm>
-          <a:prstGeom xmlns:a="http://schemas.openxmlformats.org/drawingml/2006/main" prst="rect">
-            <a:avLst/>
-          </a:prstGeom>
-          <a:solidFill xmlns:a="http://schemas.openxmlformats.org/drawingml/2006/main">
-            <a:srgbClr val="2F5F4F"/>
-          </a:solidFill>
-          <a:ln xmlns:a="http://schemas.openxmlformats.org/drawingml/2006/main" w="0">
-            <a:solidFill>
-              <a:srgbClr val="000000">
-                <a:alpha val="0"/>
-              </a:srgbClr>
-            </a:solidFill>
-            <a:prstDash val="solid"/>
-          </a:ln>
-        </p:spPr>
-      </p:sp>
-      <p:sp>
-        <p:nvSpPr>
-          <p:cNvPr id="14" name="">
-            <a:extLst xmlns:a="http://schemas.openxmlformats.org/drawingml/2006/main">
-              <a:ext uri="{FF2B5EF4-FFF2-40B4-BE49-F238E27FC236}">
-                <a16:creationId xmlns:a16="http://schemas.microsoft.com/office/drawing/2014/main" id="{13EA8B06-6692-4E6C-A645-23ED9BE01DB4}"/>
-              </a:ext>
-            </a:extLst>
-          </p:cNvPr>
-          <p:cNvSpPr>
-            <a:spLocks xmlns:a="http://schemas.openxmlformats.org/drawingml/2006/main" noGrp="1"/>
-          </p:cNvSpPr>
-          <p:nvPr/>
-        </p:nvSpPr>
-        <p:spPr>
-          <a:xfrm xmlns:a="http://schemas.openxmlformats.org/drawingml/2006/main">
-            <a:off x="2495550" y="4324350"/>
-            <a:ext cx="2000250" cy="838200"/>
-          </a:xfrm>
-          <a:prstGeom xmlns:a="http://schemas.openxmlformats.org/drawingml/2006/main" prst="rect">
-            <a:avLst/>
-          </a:prstGeom>
-          <a:solidFill xmlns:a="http://schemas.openxmlformats.org/drawingml/2006/main">
-            <a:srgbClr val="FFFAF0"/>
-          </a:solidFill>
-          <a:ln xmlns:a="http://schemas.openxmlformats.org/drawingml/2006/main" w="9525">
-            <a:solidFill>
-              <a:srgbClr val="D8CBB7"/>
-            </a:solidFill>
-            <a:prstDash val="solid"/>
-          </a:ln>
-        </p:spPr>
-      </p:sp>
-      <p:sp>
-        <p:nvSpPr>
-          <p:cNvPr id="15" name="">
-            <a:extLst xmlns:a="http://schemas.openxmlformats.org/drawingml/2006/main">
-              <a:ext uri="{FF2B5EF4-FFF2-40B4-BE49-F238E27FC236}">
-                <a16:creationId xmlns:a16="http://schemas.microsoft.com/office/drawing/2014/main" id="{7641D215-1A13-4C7C-8442-9018C28FC5E7}"/>
-              </a:ext>
-            </a:extLst>
-          </p:cNvPr>
-          <p:cNvSpPr>
-            <a:spLocks xmlns:a="http://schemas.openxmlformats.org/drawingml/2006/main" noGrp="1"/>
-          </p:cNvSpPr>
-          <p:nvPr/>
-        </p:nvSpPr>
-        <p:spPr>
-          <a:xfrm xmlns:a="http://schemas.openxmlformats.org/drawingml/2006/main">
-            <a:off x="2667000" y="4457700"/>
-            <a:ext cx="1657350" cy="209550"/>
-          </a:xfrm>
-          <a:prstGeom xmlns:a="http://schemas.openxmlformats.org/drawingml/2006/main" prst="rect">
-            <a:avLst/>
-          </a:prstGeom>
-          <a:solidFill xmlns:a="http://schemas.openxmlformats.org/drawingml/2006/main">
-            <a:srgbClr val="000000">
-              <a:alpha val="0"/>
-            </a:srgbClr>
-          </a:solidFill>
-          <a:ln xmlns:a="http://schemas.openxmlformats.org/drawingml/2006/main" w="0">
-            <a:solidFill>
-              <a:srgbClr val="000000">
-                <a:alpha val="0"/>
-              </a:srgbClr>
-            </a:solidFill>
-            <a:prstDash val="solid"/>
-          </a:ln>
-        </p:spPr>
-        <p:txBody>
-          <a:bodyPr xmlns:a="http://schemas.openxmlformats.org/drawingml/2006/main" lIns="0" tIns="0" rIns="0" bIns="0" anchor="t"/>
-          <a:lstStyle xmlns:a="http://schemas.openxmlformats.org/drawingml/2006/main"/>
-          <a:p xmlns:a="http://schemas.openxmlformats.org/drawingml/2006/main">
-            <a:pPr algn="l">
-              <a:defRPr sz="900" b="1">
-                <a:solidFill>
-                  <a:srgbClr val="2F5F4F"/>
-                </a:solidFill>
-                <a:latin typeface="Aptos"/>
-                <a:ea typeface="Aptos"/>
-                <a:cs typeface="Aptos"/>
-              </a:defRPr>
-            </a:pPr>
-            <a:r>
-              <a:rPr sz="900" b="1">
-                <a:solidFill>
-                  <a:srgbClr val="2F5F4F"/>
-                </a:solidFill>
-                <a:latin typeface="Aptos"/>
-                <a:ea typeface="Aptos"/>
-                <a:cs typeface="Aptos"/>
-              </a:rPr>
-              <a:t>Mar</a:t>
-            </a:r>
-          </a:p>
-        </p:txBody>
-      </p:sp>
-      <p:sp>
-        <p:nvSpPr>
-          <p:cNvPr id="16" name="">
-            <a:extLst xmlns:a="http://schemas.openxmlformats.org/drawingml/2006/main">
-              <a:ext uri="{FF2B5EF4-FFF2-40B4-BE49-F238E27FC236}">
-                <a16:creationId xmlns:a16="http://schemas.microsoft.com/office/drawing/2014/main" id="{449C4DB5-1DF3-4FE0-9370-AB422C60D123}"/>
-              </a:ext>
-            </a:extLst>
-          </p:cNvPr>
-          <p:cNvSpPr>
-            <a:spLocks xmlns:a="http://schemas.openxmlformats.org/drawingml/2006/main" noGrp="1"/>
-          </p:cNvSpPr>
-          <p:nvPr/>
-        </p:nvSpPr>
-        <p:spPr>
-          <a:xfrm xmlns:a="http://schemas.openxmlformats.org/drawingml/2006/main">
-            <a:off x="2667000" y="4705350"/>
-            <a:ext cx="1657350" cy="323850"/>
-          </a:xfrm>
-          <a:prstGeom xmlns:a="http://schemas.openxmlformats.org/drawingml/2006/main" prst="rect">
-            <a:avLst/>
-          </a:prstGeom>
-          <a:solidFill xmlns:a="http://schemas.openxmlformats.org/drawingml/2006/main">
-            <a:srgbClr val="000000">
-              <a:alpha val="0"/>
-            </a:srgbClr>
-          </a:solidFill>
-          <a:ln xmlns:a="http://schemas.openxmlformats.org/drawingml/2006/main" w="0">
-            <a:solidFill>
-              <a:srgbClr val="000000">
-                <a:alpha val="0"/>
-              </a:srgbClr>
-            </a:solidFill>
-            <a:prstDash val="solid"/>
-          </a:ln>
-        </p:spPr>
-        <p:txBody>
-          <a:bodyPr xmlns:a="http://schemas.openxmlformats.org/drawingml/2006/main" lIns="0" tIns="0" rIns="0" bIns="0" anchor="t"/>
-          <a:lstStyle xmlns:a="http://schemas.openxmlformats.org/drawingml/2006/main"/>
-          <a:p xmlns:a="http://schemas.openxmlformats.org/drawingml/2006/main">
-            <a:pPr algn="l">
-              <a:defRPr sz="1350" b="1">
-                <a:solidFill>
-                  <a:srgbClr val="10231F"/>
-                </a:solidFill>
-                <a:latin typeface="Aptos Display"/>
-                <a:ea typeface="Aptos Display"/>
-                <a:cs typeface="Aptos Display"/>
-              </a:defRPr>
-            </a:pPr>
-            <a:r>
-              <a:rPr sz="1350" b="1">
-                <a:solidFill>
-                  <a:srgbClr val="10231F"/>
-                </a:solidFill>
-                <a:latin typeface="Aptos Display"/>
-                <a:ea typeface="Aptos Display"/>
-                <a:cs typeface="Aptos Display"/>
-              </a:rPr>
-              <a:t>UX e arquitetura</a:t>
-            </a:r>
-          </a:p>
-        </p:txBody>
-      </p:sp>
-      <p:sp>
-        <p:nvSpPr>
-          <p:cNvPr id="17" name="">
-            <a:extLst xmlns:a="http://schemas.openxmlformats.org/drawingml/2006/main">
-              <a:ext uri="{FF2B5EF4-FFF2-40B4-BE49-F238E27FC236}">
-                <a16:creationId xmlns:a16="http://schemas.microsoft.com/office/drawing/2014/main" id="{1CEBADFC-3F5C-49E6-9124-A044A5FDBE38}"/>
-              </a:ext>
-            </a:extLst>
-          </p:cNvPr>
-          <p:cNvSpPr>
-            <a:spLocks xmlns:a="http://schemas.openxmlformats.org/drawingml/2006/main" noGrp="1"/>
-          </p:cNvSpPr>
-          <p:nvPr/>
-        </p:nvSpPr>
-        <p:spPr>
-          <a:xfrm xmlns:a="http://schemas.openxmlformats.org/drawingml/2006/main">
-            <a:off x="4686300" y="3524250"/>
-            <a:ext cx="2266950" cy="381000"/>
-          </a:xfrm>
-          <a:prstGeom xmlns:a="http://schemas.openxmlformats.org/drawingml/2006/main" prst="rect">
-            <a:avLst/>
-          </a:prstGeom>
-          <a:solidFill xmlns:a="http://schemas.openxmlformats.org/drawingml/2006/main">
-            <a:srgbClr val="D96045"/>
-          </a:solidFill>
-          <a:ln xmlns:a="http://schemas.openxmlformats.org/drawingml/2006/main" w="0">
-            <a:solidFill>
-              <a:srgbClr val="000000">
-                <a:alpha val="0"/>
-              </a:srgbClr>
-            </a:solidFill>
-            <a:prstDash val="solid"/>
-          </a:ln>
-        </p:spPr>
-      </p:sp>
-      <p:sp>
-        <p:nvSpPr>
-          <p:cNvPr id="18" name="">
-            <a:extLst xmlns:a="http://schemas.openxmlformats.org/drawingml/2006/main">
-              <a:ext uri="{FF2B5EF4-FFF2-40B4-BE49-F238E27FC236}">
-                <a16:creationId xmlns:a16="http://schemas.microsoft.com/office/drawing/2014/main" id="{6FB3F3FC-DAAC-435B-B631-2502469A5923}"/>
-              </a:ext>
-            </a:extLst>
-          </p:cNvPr>
-          <p:cNvSpPr>
-            <a:spLocks xmlns:a="http://schemas.openxmlformats.org/drawingml/2006/main" noGrp="1"/>
-          </p:cNvSpPr>
-          <p:nvPr/>
-        </p:nvSpPr>
-        <p:spPr>
-          <a:xfrm xmlns:a="http://schemas.openxmlformats.org/drawingml/2006/main">
-            <a:off x="4686300" y="4324350"/>
-            <a:ext cx="2266950" cy="838200"/>
-          </a:xfrm>
-          <a:prstGeom xmlns:a="http://schemas.openxmlformats.org/drawingml/2006/main" prst="rect">
-            <a:avLst/>
-          </a:prstGeom>
-          <a:solidFill xmlns:a="http://schemas.openxmlformats.org/drawingml/2006/main">
-            <a:srgbClr val="FFFAF0"/>
-          </a:solidFill>
-          <a:ln xmlns:a="http://schemas.openxmlformats.org/drawingml/2006/main" w="9525">
-            <a:solidFill>
-              <a:srgbClr val="D8CBB7"/>
-            </a:solidFill>
-            <a:prstDash val="solid"/>
-          </a:ln>
-        </p:spPr>
-      </p:sp>
-      <p:sp>
-        <p:nvSpPr>
-          <p:cNvPr id="19" name="">
-            <a:extLst xmlns:a="http://schemas.openxmlformats.org/drawingml/2006/main">
-              <a:ext uri="{FF2B5EF4-FFF2-40B4-BE49-F238E27FC236}">
-                <a16:creationId xmlns:a16="http://schemas.microsoft.com/office/drawing/2014/main" id="{B2F5181A-9E16-4C81-9F6A-C3190A1892F0}"/>
-              </a:ext>
-            </a:extLst>
-          </p:cNvPr>
-          <p:cNvSpPr>
-            <a:spLocks xmlns:a="http://schemas.openxmlformats.org/drawingml/2006/main" noGrp="1"/>
-          </p:cNvSpPr>
-          <p:nvPr/>
-        </p:nvSpPr>
-        <p:spPr>
-          <a:xfrm xmlns:a="http://schemas.openxmlformats.org/drawingml/2006/main">
-            <a:off x="4857750" y="4457700"/>
-            <a:ext cx="1924050" cy="209550"/>
-          </a:xfrm>
-          <a:prstGeom xmlns:a="http://schemas.openxmlformats.org/drawingml/2006/main" prst="rect">
-            <a:avLst/>
-          </a:prstGeom>
-          <a:solidFill xmlns:a="http://schemas.openxmlformats.org/drawingml/2006/main">
-            <a:srgbClr val="000000">
-              <a:alpha val="0"/>
-            </a:srgbClr>
-          </a:solidFill>
-          <a:ln xmlns:a="http://schemas.openxmlformats.org/drawingml/2006/main" w="0">
-            <a:solidFill>
-              <a:srgbClr val="000000">
-                <a:alpha val="0"/>
-              </a:srgbClr>
-            </a:solidFill>
-            <a:prstDash val="solid"/>
-          </a:ln>
-        </p:spPr>
-        <p:txBody>
-          <a:bodyPr xmlns:a="http://schemas.openxmlformats.org/drawingml/2006/main" lIns="0" tIns="0" rIns="0" bIns="0" anchor="t"/>
-          <a:lstStyle xmlns:a="http://schemas.openxmlformats.org/drawingml/2006/main"/>
-          <a:p xmlns:a="http://schemas.openxmlformats.org/drawingml/2006/main">
-            <a:pPr algn="l">
-              <a:defRPr sz="900" b="1">
-                <a:solidFill>
-                  <a:srgbClr val="D96045"/>
-                </a:solidFill>
-                <a:latin typeface="Aptos"/>
-                <a:ea typeface="Aptos"/>
-                <a:cs typeface="Aptos"/>
-              </a:defRPr>
-            </a:pPr>
-            <a:r>
-              <a:rPr sz="900" b="1">
-                <a:solidFill>
-                  <a:srgbClr val="D96045"/>
-                </a:solidFill>
-                <a:latin typeface="Aptos"/>
-                <a:ea typeface="Aptos"/>
-                <a:cs typeface="Aptos"/>
-              </a:rPr>
-              <a:t>Abr</a:t>
-            </a:r>
-          </a:p>
-        </p:txBody>
-      </p:sp>
-      <p:sp>
-        <p:nvSpPr>
-          <p:cNvPr id="20" name="">
-            <a:extLst xmlns:a="http://schemas.openxmlformats.org/drawingml/2006/main">
-              <a:ext uri="{FF2B5EF4-FFF2-40B4-BE49-F238E27FC236}">
-                <a16:creationId xmlns:a16="http://schemas.microsoft.com/office/drawing/2014/main" id="{1835846E-0AF1-4EF5-982C-6C9C06620688}"/>
-              </a:ext>
-            </a:extLst>
-          </p:cNvPr>
-          <p:cNvSpPr>
-            <a:spLocks xmlns:a="http://schemas.openxmlformats.org/drawingml/2006/main" noGrp="1"/>
-          </p:cNvSpPr>
-          <p:nvPr/>
-        </p:nvSpPr>
-        <p:spPr>
-          <a:xfrm xmlns:a="http://schemas.openxmlformats.org/drawingml/2006/main">
-            <a:off x="4857750" y="4705350"/>
-            <a:ext cx="1924050" cy="323850"/>
-          </a:xfrm>
-          <a:prstGeom xmlns:a="http://schemas.openxmlformats.org/drawingml/2006/main" prst="rect">
-            <a:avLst/>
-          </a:prstGeom>
-          <a:solidFill xmlns:a="http://schemas.openxmlformats.org/drawingml/2006/main">
-            <a:srgbClr val="000000">
-              <a:alpha val="0"/>
-            </a:srgbClr>
-          </a:solidFill>
-          <a:ln xmlns:a="http://schemas.openxmlformats.org/drawingml/2006/main" w="0">
-            <a:solidFill>
-              <a:srgbClr val="000000">
-                <a:alpha val="0"/>
-              </a:srgbClr>
-            </a:solidFill>
-            <a:prstDash val="solid"/>
-          </a:ln>
-        </p:spPr>
-        <p:txBody>
-          <a:bodyPr xmlns:a="http://schemas.openxmlformats.org/drawingml/2006/main" lIns="0" tIns="0" rIns="0" bIns="0" anchor="t"/>
-          <a:lstStyle xmlns:a="http://schemas.openxmlformats.org/drawingml/2006/main"/>
-          <a:p xmlns:a="http://schemas.openxmlformats.org/drawingml/2006/main">
-            <a:pPr algn="l">
-              <a:defRPr sz="1350" b="1">
-                <a:solidFill>
-                  <a:srgbClr val="10231F"/>
-                </a:solidFill>
-                <a:latin typeface="Aptos Display"/>
-                <a:ea typeface="Aptos Display"/>
-                <a:cs typeface="Aptos Display"/>
-              </a:defRPr>
-            </a:pPr>
-            <a:r>
-              <a:rPr sz="1350" b="1">
-                <a:solidFill>
-                  <a:srgbClr val="10231F"/>
-                </a:solidFill>
-                <a:latin typeface="Aptos Display"/>
-                <a:ea typeface="Aptos Display"/>
-                <a:cs typeface="Aptos Display"/>
-              </a:rPr>
-              <a:t>MVP</a:t>
-            </a:r>
-          </a:p>
-        </p:txBody>
-      </p:sp>
-      <p:sp>
-        <p:nvSpPr>
-          <p:cNvPr id="21" name="">
-            <a:extLst xmlns:a="http://schemas.openxmlformats.org/drawingml/2006/main">
-              <a:ext uri="{FF2B5EF4-FFF2-40B4-BE49-F238E27FC236}">
-                <a16:creationId xmlns:a16="http://schemas.microsoft.com/office/drawing/2014/main" id="{D8F42744-0703-4108-A9E0-65559FA3C43D}"/>
-              </a:ext>
-            </a:extLst>
-          </p:cNvPr>
-          <p:cNvSpPr>
-            <a:spLocks xmlns:a="http://schemas.openxmlformats.org/drawingml/2006/main" noGrp="1"/>
-          </p:cNvSpPr>
-          <p:nvPr/>
-        </p:nvSpPr>
-        <p:spPr>
-          <a:xfrm xmlns:a="http://schemas.openxmlformats.org/drawingml/2006/main">
-            <a:off x="7143750" y="3524250"/>
-            <a:ext cx="2000250" cy="381000"/>
-          </a:xfrm>
-          <a:prstGeom xmlns:a="http://schemas.openxmlformats.org/drawingml/2006/main" prst="rect">
-            <a:avLst/>
-          </a:prstGeom>
-          <a:solidFill xmlns:a="http://schemas.openxmlformats.org/drawingml/2006/main">
-            <a:srgbClr val="E0A13A"/>
-          </a:solidFill>
-          <a:ln xmlns:a="http://schemas.openxmlformats.org/drawingml/2006/main" w="0">
-            <a:solidFill>
-              <a:srgbClr val="000000">
-                <a:alpha val="0"/>
-              </a:srgbClr>
-            </a:solidFill>
-            <a:prstDash val="solid"/>
-          </a:ln>
-        </p:spPr>
-      </p:sp>
-      <p:sp>
-        <p:nvSpPr>
-          <p:cNvPr id="22" name="">
-            <a:extLst xmlns:a="http://schemas.openxmlformats.org/drawingml/2006/main">
-              <a:ext uri="{FF2B5EF4-FFF2-40B4-BE49-F238E27FC236}">
-                <a16:creationId xmlns:a16="http://schemas.microsoft.com/office/drawing/2014/main" id="{2A06CC27-C180-4A59-9883-2875EC9C74EE}"/>
-              </a:ext>
-            </a:extLst>
-          </p:cNvPr>
-          <p:cNvSpPr>
-            <a:spLocks xmlns:a="http://schemas.openxmlformats.org/drawingml/2006/main" noGrp="1"/>
-          </p:cNvSpPr>
-          <p:nvPr/>
-        </p:nvSpPr>
-        <p:spPr>
-          <a:xfrm xmlns:a="http://schemas.openxmlformats.org/drawingml/2006/main">
-            <a:off x="7143750" y="4324350"/>
-            <a:ext cx="2000250" cy="838200"/>
-          </a:xfrm>
-          <a:prstGeom xmlns:a="http://schemas.openxmlformats.org/drawingml/2006/main" prst="rect">
-            <a:avLst/>
-          </a:prstGeom>
-          <a:solidFill xmlns:a="http://schemas.openxmlformats.org/drawingml/2006/main">
-            <a:srgbClr val="FFFAF0"/>
-          </a:solidFill>
-          <a:ln xmlns:a="http://schemas.openxmlformats.org/drawingml/2006/main" w="9525">
-            <a:solidFill>
-              <a:srgbClr val="D8CBB7"/>
-            </a:solidFill>
-            <a:prstDash val="solid"/>
-          </a:ln>
-        </p:spPr>
-      </p:sp>
-      <p:sp>
-        <p:nvSpPr>
-          <p:cNvPr id="23" name="">
-            <a:extLst xmlns:a="http://schemas.openxmlformats.org/drawingml/2006/main">
-              <a:ext uri="{FF2B5EF4-FFF2-40B4-BE49-F238E27FC236}">
-                <a16:creationId xmlns:a16="http://schemas.microsoft.com/office/drawing/2014/main" id="{5D6BF0A1-37A9-4A4C-8986-1C5AB404CDB6}"/>
-              </a:ext>
-            </a:extLst>
-          </p:cNvPr>
-          <p:cNvSpPr>
-            <a:spLocks xmlns:a="http://schemas.openxmlformats.org/drawingml/2006/main" noGrp="1"/>
-          </p:cNvSpPr>
-          <p:nvPr/>
-        </p:nvSpPr>
-        <p:spPr>
-          <a:xfrm xmlns:a="http://schemas.openxmlformats.org/drawingml/2006/main">
-            <a:off x="7315200" y="4457700"/>
-            <a:ext cx="1657350" cy="209550"/>
-          </a:xfrm>
-          <a:prstGeom xmlns:a="http://schemas.openxmlformats.org/drawingml/2006/main" prst="rect">
-            <a:avLst/>
-          </a:prstGeom>
-          <a:solidFill xmlns:a="http://schemas.openxmlformats.org/drawingml/2006/main">
-            <a:srgbClr val="000000">
-              <a:alpha val="0"/>
-            </a:srgbClr>
-          </a:solidFill>
-          <a:ln xmlns:a="http://schemas.openxmlformats.org/drawingml/2006/main" w="0">
-            <a:solidFill>
-              <a:srgbClr val="000000">
-                <a:alpha val="0"/>
-              </a:srgbClr>
-            </a:solidFill>
-            <a:prstDash val="solid"/>
-          </a:ln>
-        </p:spPr>
-        <p:txBody>
-          <a:bodyPr xmlns:a="http://schemas.openxmlformats.org/drawingml/2006/main" lIns="0" tIns="0" rIns="0" bIns="0" anchor="t"/>
-          <a:lstStyle xmlns:a="http://schemas.openxmlformats.org/drawingml/2006/main"/>
-          <a:p xmlns:a="http://schemas.openxmlformats.org/drawingml/2006/main">
-            <a:pPr algn="l">
-              <a:defRPr sz="900" b="1">
-                <a:solidFill>
-                  <a:srgbClr val="E0A13A"/>
-                </a:solidFill>
-                <a:latin typeface="Aptos"/>
-                <a:ea typeface="Aptos"/>
-                <a:cs typeface="Aptos"/>
-              </a:defRPr>
-            </a:pPr>
-            <a:r>
-              <a:rPr sz="900" b="1">
-                <a:solidFill>
-                  <a:srgbClr val="E0A13A"/>
-                </a:solidFill>
-                <a:latin typeface="Aptos"/>
-                <a:ea typeface="Aptos"/>
-                <a:cs typeface="Aptos"/>
-              </a:rPr>
-              <a:t>Mai</a:t>
-            </a:r>
-          </a:p>
-        </p:txBody>
-      </p:sp>
-      <p:sp>
-        <p:nvSpPr>
-          <p:cNvPr id="24" name="">
-            <a:extLst xmlns:a="http://schemas.openxmlformats.org/drawingml/2006/main">
-              <a:ext uri="{FF2B5EF4-FFF2-40B4-BE49-F238E27FC236}">
-                <a16:creationId xmlns:a16="http://schemas.microsoft.com/office/drawing/2014/main" id="{5D62433F-F29D-4545-8CA4-19811D2D29ED}"/>
-              </a:ext>
-            </a:extLst>
-          </p:cNvPr>
-          <p:cNvSpPr>
-            <a:spLocks xmlns:a="http://schemas.openxmlformats.org/drawingml/2006/main" noGrp="1"/>
-          </p:cNvSpPr>
-          <p:nvPr/>
-        </p:nvSpPr>
-        <p:spPr>
-          <a:xfrm xmlns:a="http://schemas.openxmlformats.org/drawingml/2006/main">
-            <a:off x="7315200" y="4705350"/>
-            <a:ext cx="1657350" cy="323850"/>
-          </a:xfrm>
-          <a:prstGeom xmlns:a="http://schemas.openxmlformats.org/drawingml/2006/main" prst="rect">
-            <a:avLst/>
-          </a:prstGeom>
-          <a:solidFill xmlns:a="http://schemas.openxmlformats.org/drawingml/2006/main">
-            <a:srgbClr val="000000">
-              <a:alpha val="0"/>
-            </a:srgbClr>
-          </a:solidFill>
-          <a:ln xmlns:a="http://schemas.openxmlformats.org/drawingml/2006/main" w="0">
-            <a:solidFill>
-              <a:srgbClr val="000000">
-                <a:alpha val="0"/>
-              </a:srgbClr>
-            </a:solidFill>
-            <a:prstDash val="solid"/>
-          </a:ln>
-        </p:spPr>
-        <p:txBody>
-          <a:bodyPr xmlns:a="http://schemas.openxmlformats.org/drawingml/2006/main" lIns="0" tIns="0" rIns="0" bIns="0" anchor="t"/>
-          <a:lstStyle xmlns:a="http://schemas.openxmlformats.org/drawingml/2006/main"/>
-          <a:p xmlns:a="http://schemas.openxmlformats.org/drawingml/2006/main">
-            <a:pPr algn="l">
-              <a:defRPr sz="1350" b="1">
-                <a:solidFill>
-                  <a:srgbClr val="10231F"/>
-                </a:solidFill>
-                <a:latin typeface="Aptos Display"/>
-                <a:ea typeface="Aptos Display"/>
-                <a:cs typeface="Aptos Display"/>
-              </a:defRPr>
-            </a:pPr>
-            <a:r>
-              <a:rPr sz="1350" b="1">
-                <a:solidFill>
-                  <a:srgbClr val="10231F"/>
-                </a:solidFill>
-                <a:latin typeface="Aptos Display"/>
-                <a:ea typeface="Aptos Display"/>
-                <a:cs typeface="Aptos Display"/>
-              </a:rPr>
-              <a:t>QA e docs</a:t>
-            </a:r>
-          </a:p>
-        </p:txBody>
-      </p:sp>
-      <p:sp>
-        <p:nvSpPr>
-          <p:cNvPr id="25" name="">
-            <a:extLst xmlns:a="http://schemas.openxmlformats.org/drawingml/2006/main">
-              <a:ext uri="{FF2B5EF4-FFF2-40B4-BE49-F238E27FC236}">
-                <a16:creationId xmlns:a16="http://schemas.microsoft.com/office/drawing/2014/main" id="{14D93487-971E-4F24-A384-657E8640302A}"/>
-              </a:ext>
-            </a:extLst>
-          </p:cNvPr>
-          <p:cNvSpPr>
-            <a:spLocks xmlns:a="http://schemas.openxmlformats.org/drawingml/2006/main" noGrp="1"/>
-          </p:cNvSpPr>
-          <p:nvPr/>
-        </p:nvSpPr>
-        <p:spPr>
-          <a:xfrm xmlns:a="http://schemas.openxmlformats.org/drawingml/2006/main">
-            <a:off x="9334500" y="3524250"/>
-            <a:ext cx="1504950" cy="381000"/>
-          </a:xfrm>
-          <a:prstGeom xmlns:a="http://schemas.openxmlformats.org/drawingml/2006/main" prst="rect">
-            <a:avLst/>
-          </a:prstGeom>
-          <a:solidFill xmlns:a="http://schemas.openxmlformats.org/drawingml/2006/main">
-            <a:srgbClr val="153A33"/>
-          </a:solidFill>
-          <a:ln xmlns:a="http://schemas.openxmlformats.org/drawingml/2006/main" w="0">
-            <a:solidFill>
-              <a:srgbClr val="000000">
-                <a:alpha val="0"/>
-              </a:srgbClr>
-            </a:solidFill>
-            <a:prstDash val="solid"/>
-          </a:ln>
-        </p:spPr>
-      </p:sp>
-      <p:sp>
-        <p:nvSpPr>
-          <p:cNvPr id="26" name="">
-            <a:extLst xmlns:a="http://schemas.openxmlformats.org/drawingml/2006/main">
-              <a:ext uri="{FF2B5EF4-FFF2-40B4-BE49-F238E27FC236}">
-                <a16:creationId xmlns:a16="http://schemas.microsoft.com/office/drawing/2014/main" id="{4936DB0E-913A-4740-B2EB-D20367179B2C}"/>
-              </a:ext>
-            </a:extLst>
-          </p:cNvPr>
-          <p:cNvSpPr>
-            <a:spLocks xmlns:a="http://schemas.openxmlformats.org/drawingml/2006/main" noGrp="1"/>
-          </p:cNvSpPr>
-          <p:nvPr/>
-        </p:nvSpPr>
-        <p:spPr>
-          <a:xfrm xmlns:a="http://schemas.openxmlformats.org/drawingml/2006/main">
-            <a:off x="9334500" y="4324350"/>
-            <a:ext cx="1504950" cy="838200"/>
-          </a:xfrm>
-          <a:prstGeom xmlns:a="http://schemas.openxmlformats.org/drawingml/2006/main" prst="rect">
-            <a:avLst/>
-          </a:prstGeom>
-          <a:solidFill xmlns:a="http://schemas.openxmlformats.org/drawingml/2006/main">
-            <a:srgbClr val="FFFAF0"/>
-          </a:solidFill>
-          <a:ln xmlns:a="http://schemas.openxmlformats.org/drawingml/2006/main" w="9525">
-            <a:solidFill>
-              <a:srgbClr val="D8CBB7"/>
-            </a:solidFill>
-            <a:prstDash val="solid"/>
-          </a:ln>
-        </p:spPr>
-      </p:sp>
-      <p:sp>
-        <p:nvSpPr>
-          <p:cNvPr id="27" name="">
-            <a:extLst xmlns:a="http://schemas.openxmlformats.org/drawingml/2006/main">
-              <a:ext uri="{FF2B5EF4-FFF2-40B4-BE49-F238E27FC236}">
-                <a16:creationId xmlns:a16="http://schemas.microsoft.com/office/drawing/2014/main" id="{874C5661-34E5-47A6-9275-BE54C811F02D}"/>
-              </a:ext>
-            </a:extLst>
-          </p:cNvPr>
-          <p:cNvSpPr>
-            <a:spLocks xmlns:a="http://schemas.openxmlformats.org/drawingml/2006/main" noGrp="1"/>
-          </p:cNvSpPr>
-          <p:nvPr/>
-        </p:nvSpPr>
-        <p:spPr>
-          <a:xfrm xmlns:a="http://schemas.openxmlformats.org/drawingml/2006/main">
-            <a:off x="9505950" y="4457700"/>
-            <a:ext cx="1162050" cy="209550"/>
-          </a:xfrm>
-          <a:prstGeom xmlns:a="http://schemas.openxmlformats.org/drawingml/2006/main" prst="rect">
-            <a:avLst/>
-          </a:prstGeom>
-          <a:solidFill xmlns:a="http://schemas.openxmlformats.org/drawingml/2006/main">
-            <a:srgbClr val="000000">
-              <a:alpha val="0"/>
-            </a:srgbClr>
-          </a:solidFill>
-          <a:ln xmlns:a="http://schemas.openxmlformats.org/drawingml/2006/main" w="0">
-            <a:solidFill>
-              <a:srgbClr val="000000">
-                <a:alpha val="0"/>
-              </a:srgbClr>
-            </a:solidFill>
-            <a:prstDash val="solid"/>
-          </a:ln>
-        </p:spPr>
-        <p:txBody>
-          <a:bodyPr xmlns:a="http://schemas.openxmlformats.org/drawingml/2006/main" lIns="0" tIns="0" rIns="0" bIns="0" anchor="t"/>
-          <a:lstStyle xmlns:a="http://schemas.openxmlformats.org/drawingml/2006/main"/>
-          <a:p xmlns:a="http://schemas.openxmlformats.org/drawingml/2006/main">
-            <a:pPr algn="l">
-              <a:defRPr sz="900" b="1">
-                <a:solidFill>
-                  <a:srgbClr val="153A33"/>
-                </a:solidFill>
-                <a:latin typeface="Aptos"/>
-                <a:ea typeface="Aptos"/>
-                <a:cs typeface="Aptos"/>
-              </a:defRPr>
-            </a:pPr>
-            <a:r>
-              <a:rPr sz="900" b="1">
-                <a:solidFill>
-                  <a:srgbClr val="153A33"/>
-                </a:solidFill>
-                <a:latin typeface="Aptos"/>
-                <a:ea typeface="Aptos"/>
-                <a:cs typeface="Aptos"/>
-              </a:rPr>
-              <a:t>Jun</a:t>
-            </a:r>
-          </a:p>
-        </p:txBody>
-      </p:sp>
-      <p:sp>
-        <p:nvSpPr>
-          <p:cNvPr id="28" name="">
-            <a:extLst xmlns:a="http://schemas.openxmlformats.org/drawingml/2006/main">
-              <a:ext uri="{FF2B5EF4-FFF2-40B4-BE49-F238E27FC236}">
-                <a16:creationId xmlns:a16="http://schemas.microsoft.com/office/drawing/2014/main" id="{9C327588-599C-4533-AE70-07D9354045EB}"/>
-              </a:ext>
-            </a:extLst>
-          </p:cNvPr>
-          <p:cNvSpPr>
-            <a:spLocks xmlns:a="http://schemas.openxmlformats.org/drawingml/2006/main" noGrp="1"/>
-          </p:cNvSpPr>
-          <p:nvPr/>
-        </p:nvSpPr>
-        <p:spPr>
-          <a:xfrm xmlns:a="http://schemas.openxmlformats.org/drawingml/2006/main">
-            <a:off x="9505950" y="4705350"/>
-            <a:ext cx="1162050" cy="323850"/>
-          </a:xfrm>
-          <a:prstGeom xmlns:a="http://schemas.openxmlformats.org/drawingml/2006/main" prst="rect">
-            <a:avLst/>
-          </a:prstGeom>
-          <a:solidFill xmlns:a="http://schemas.openxmlformats.org/drawingml/2006/main">
-            <a:srgbClr val="000000">
-              <a:alpha val="0"/>
-            </a:srgbClr>
-          </a:solidFill>
-          <a:ln xmlns:a="http://schemas.openxmlformats.org/drawingml/2006/main" w="0">
-            <a:solidFill>
-              <a:srgbClr val="000000">
-                <a:alpha val="0"/>
-              </a:srgbClr>
-            </a:solidFill>
-            <a:prstDash val="solid"/>
-          </a:ln>
-        </p:spPr>
-        <p:txBody>
-          <a:bodyPr xmlns:a="http://schemas.openxmlformats.org/drawingml/2006/main" lIns="0" tIns="0" rIns="0" bIns="0" anchor="t"/>
-          <a:lstStyle xmlns:a="http://schemas.openxmlformats.org/drawingml/2006/main"/>
-          <a:p xmlns:a="http://schemas.openxmlformats.org/drawingml/2006/main">
-            <a:pPr algn="l">
-              <a:defRPr sz="1350" b="1">
-                <a:solidFill>
-                  <a:srgbClr val="10231F"/>
-                </a:solidFill>
-                <a:latin typeface="Aptos Display"/>
-                <a:ea typeface="Aptos Display"/>
-                <a:cs typeface="Aptos Display"/>
-              </a:defRPr>
-            </a:pPr>
-            <a:r>
-              <a:rPr sz="1350" b="1">
-                <a:solidFill>
-                  <a:srgbClr val="10231F"/>
-                </a:solidFill>
-                <a:latin typeface="Aptos Display"/>
-                <a:ea typeface="Aptos Display"/>
-                <a:cs typeface="Aptos Display"/>
-              </a:rPr>
-              <a:t>Apresentacao</a:t>
-            </a:r>
-          </a:p>
-        </p:txBody>
-      </p:sp>
-      <p:sp>
-        <p:nvSpPr>
-          <p:cNvPr id="29" name="">
-            <a:extLst xmlns:a="http://schemas.openxmlformats.org/drawingml/2006/main">
-              <a:ext uri="{FF2B5EF4-FFF2-40B4-BE49-F238E27FC236}">
-                <a16:creationId xmlns:a16="http://schemas.microsoft.com/office/drawing/2014/main" id="{F4D634DC-D7AD-4A5F-883C-E2DDC8D1BB76}"/>
-              </a:ext>
-            </a:extLst>
-          </p:cNvPr>
-          <p:cNvSpPr>
-            <a:spLocks xmlns:a="http://schemas.openxmlformats.org/drawingml/2006/main" noGrp="1"/>
-          </p:cNvSpPr>
-          <p:nvPr/>
-        </p:nvSpPr>
-        <p:spPr>
-          <a:xfrm xmlns:a="http://schemas.openxmlformats.org/drawingml/2006/main">
-            <a:off x="704850" y="5581650"/>
-            <a:ext cx="8001000" cy="323850"/>
-          </a:xfrm>
-          <a:prstGeom xmlns:a="http://schemas.openxmlformats.org/drawingml/2006/main" prst="rect">
-            <a:avLst/>
-          </a:prstGeom>
-          <a:solidFill xmlns:a="http://schemas.openxmlformats.org/drawingml/2006/main">
-            <a:srgbClr val="000000">
-              <a:alpha val="0"/>
-            </a:srgbClr>
-          </a:solidFill>
-          <a:ln xmlns:a="http://schemas.openxmlformats.org/drawingml/2006/main" w="0">
-            <a:solidFill>
-              <a:srgbClr val="000000">
-                <a:alpha val="0"/>
-              </a:srgbClr>
-            </a:solidFill>
-            <a:prstDash val="solid"/>
-          </a:ln>
-        </p:spPr>
-        <p:txBody>
-          <a:bodyPr xmlns:a="http://schemas.openxmlformats.org/drawingml/2006/main" lIns="0" tIns="0" rIns="0" bIns="0" anchor="t"/>
-          <a:lstStyle xmlns:a="http://schemas.openxmlformats.org/drawingml/2006/main"/>
-          <a:p xmlns:a="http://schemas.openxmlformats.org/drawingml/2006/main">
-            <a:pPr algn="l">
-              <a:defRPr sz="1500" b="0">
-                <a:solidFill>
-                  <a:srgbClr val="153A33"/>
-                </a:solidFill>
-                <a:latin typeface="Aptos"/>
-                <a:ea typeface="Aptos"/>
-                <a:cs typeface="Aptos"/>
-              </a:defRPr>
-            </a:pPr>
-            <a:r>
-              <a:rPr sz="1500" b="0">
-                <a:solidFill>
-                  <a:srgbClr val="153A33"/>
-                </a:solidFill>
-                <a:latin typeface="Aptos"/>
-                <a:ea typeface="Aptos"/>
-                <a:cs typeface="Aptos"/>
-              </a:rPr>
-              <a:t>O foco do bimestre foi provar a funcionalidade central antes de expandir cadastro, permissoes e integracoes.</a:t>
-            </a:r>
+          <a:ln w="0">
+            <a:noFill/>
+          </a:ln>
+        </p:spPr>
+        <p:txBody>
+          <a:bodyPr wrap="square" anchor="ctr" lIns="73152" rIns="73152" tIns="45720" bIns="45720"/>
+          <a:lstStyle/>
+          <a:p>
+            <a:pPr algn="ctr"/>
+            <a:r>
+              <a:rPr lang="pt-BR" sz="1050" b="1">
+                <a:solidFill>
+                  <a:srgbClr val="5B4A3A"/>
+                </a:solidFill>
+                <a:latin typeface="Aptos"/>
+              </a:rPr>
+              <a:t>Leitura: barras representam duracao das etapas; linhas verticais indicam cortes semanais e marco final do MVP.</a:t>
+            </a:r>
+            <a:endParaRPr lang="pt-BR" sz="1050"/>
           </a:p>
         </p:txBody>
       </p:sp>
     </p:spTree>
-    <p:extLst>
-      <p:ext uri="{BB962C8B-B14F-4D97-AF65-F5344CB8AC3E}">
-        <p14:creationId xmlns:p14="http://schemas.microsoft.com/office/powerpoint/2010/main" val="567293449"/>
-      </p:ext>
-    </p:extLst>
   </p:cSld>
+  <p:clrMapOvr>
+    <a:masterClrMapping/>
+  </p:clrMapOvr>
 </p:sld>
 </file>
 
